--- a/doc/use-case.pptx
+++ b/doc/use-case.pptx
@@ -5,10 +5,11 @@
     <p:sldMasterId id="2147483648" r:id="rId4"/>
   </p:sldMasterIdLst>
   <p:notesMasterIdLst>
-    <p:notesMasterId r:id="rId6"/>
+    <p:notesMasterId r:id="rId7"/>
   </p:notesMasterIdLst>
   <p:sldIdLst>
     <p:sldId id="351" r:id="rId5"/>
+    <p:sldId id="352" r:id="rId6"/>
   </p:sldIdLst>
   <p:sldSz cx="19046825" cy="6858000"/>
   <p:notesSz cx="6858000" cy="9144000"/>
@@ -115,6 +116,11 @@
             <p14:sldId id="351"/>
           </p14:sldIdLst>
         </p14:section>
+        <p14:section name="Instructions" id="{53E2791F-512E-BF4D-8316-73914EEBE1B0}">
+          <p14:sldIdLst>
+            <p14:sldId id="352"/>
+          </p14:sldIdLst>
+        </p14:section>
         <p14:section name="Title/intro examples" id="{EAFC2341-9A9E-4C28-BFFA-6B825D0AC4BA}">
           <p14:sldIdLst/>
         </p14:section>
@@ -236,7 +242,7 @@
             <a:fld id="{1DE7078C-3525-4C9B-BF62-C9FD13B9A875}" type="datetimeFigureOut">
               <a:rPr lang="en-US" smtClean="0"/>
               <a:pPr/>
-              <a:t>4/8/26</a:t>
+              <a:t>9/8/26</a:t>
             </a:fld>
             <a:endParaRPr lang="en-US" dirty="0"/>
           </a:p>
@@ -38681,8 +38687,8 @@
         </p:nvSpPr>
         <p:spPr>
           <a:xfrm>
-            <a:off x="1810646" y="453234"/>
-            <a:ext cx="13089105" cy="1861865"/>
+            <a:off x="1810646" y="559203"/>
+            <a:ext cx="13089105" cy="1861403"/>
           </a:xfrm>
           <a:prstGeom prst="roundRect">
             <a:avLst/>
@@ -38733,7 +38739,7 @@
         </p:nvSpPr>
         <p:spPr>
           <a:xfrm>
-            <a:off x="2152214" y="347250"/>
+            <a:off x="2174684" y="465346"/>
             <a:ext cx="983419" cy="187561"/>
           </a:xfrm>
           <a:prstGeom prst="roundRect">
@@ -38792,7 +38798,7 @@
         </p:nvSpPr>
         <p:spPr>
           <a:xfrm>
-            <a:off x="202830" y="3676021"/>
+            <a:off x="202830" y="3781528"/>
             <a:ext cx="657895" cy="282935"/>
           </a:xfrm>
           <a:prstGeom prst="roundRect">
@@ -38853,7 +38859,7 @@
         </p:nvSpPr>
         <p:spPr>
           <a:xfrm>
-            <a:off x="2248660" y="967755"/>
+            <a:off x="2248660" y="1190492"/>
             <a:ext cx="835470" cy="238814"/>
           </a:xfrm>
           <a:prstGeom prst="roundRect">
@@ -38913,7 +38919,7 @@
         </p:nvSpPr>
         <p:spPr>
           <a:xfrm rot="5400000">
-            <a:off x="3765922" y="985760"/>
+            <a:off x="3765922" y="1091267"/>
             <a:ext cx="310669" cy="915333"/>
           </a:xfrm>
           <a:prstGeom prst="can">
@@ -38977,8 +38983,8 @@
         </p:nvCxnSpPr>
         <p:spPr>
           <a:xfrm flipV="1">
-            <a:off x="860725" y="1083860"/>
-            <a:ext cx="849625" cy="2733629"/>
+            <a:off x="860725" y="1306595"/>
+            <a:ext cx="849626" cy="2616401"/>
           </a:xfrm>
           <a:prstGeom prst="curvedConnector3">
             <a:avLst>
@@ -39021,7 +39027,7 @@
         </p:nvSpPr>
         <p:spPr>
           <a:xfrm>
-            <a:off x="3597069" y="1356217"/>
+            <a:off x="3597069" y="1461724"/>
             <a:ext cx="192024" cy="187452"/>
           </a:xfrm>
           <a:prstGeom prst="roundRect">
@@ -39073,7 +39079,7 @@
         </p:nvSpPr>
         <p:spPr>
           <a:xfrm>
-            <a:off x="3854565" y="1356217"/>
+            <a:off x="3854565" y="1461724"/>
             <a:ext cx="192024" cy="187452"/>
           </a:xfrm>
           <a:prstGeom prst="roundRect">
@@ -39125,7 +39131,7 @@
         </p:nvSpPr>
         <p:spPr>
           <a:xfrm>
-            <a:off x="4477596" y="1592853"/>
+            <a:off x="4477596" y="1698360"/>
             <a:ext cx="0" cy="0"/>
           </a:xfrm>
           <a:prstGeom prst="rect">
@@ -39162,7 +39168,7 @@
         </p:nvSpPr>
         <p:spPr>
           <a:xfrm>
-            <a:off x="2328352" y="1647312"/>
+            <a:off x="2328352" y="1752819"/>
             <a:ext cx="676093" cy="253790"/>
           </a:xfrm>
           <a:prstGeom prst="can">
@@ -39222,8 +39228,8 @@
         </p:nvCxnSpPr>
         <p:spPr>
           <a:xfrm rot="16200000" flipH="1">
-            <a:off x="2446027" y="1426939"/>
-            <a:ext cx="440743" cy="2"/>
+            <a:off x="2504641" y="1591060"/>
+            <a:ext cx="323513" cy="4"/>
           </a:xfrm>
           <a:prstGeom prst="curvedConnector3">
             <a:avLst>
@@ -39270,8 +39276,8 @@
         </p:nvCxnSpPr>
         <p:spPr>
           <a:xfrm rot="16200000" flipH="1">
-            <a:off x="2946563" y="926402"/>
-            <a:ext cx="236856" cy="797193"/>
+            <a:off x="3005178" y="1090522"/>
+            <a:ext cx="119628" cy="797195"/>
           </a:xfrm>
           <a:prstGeom prst="curvedConnector2">
             <a:avLst/>
@@ -39312,7 +39318,7 @@
         </p:nvSpPr>
         <p:spPr>
           <a:xfrm rot="16200000">
-            <a:off x="1514050" y="973685"/>
+            <a:off x="1514050" y="1196422"/>
             <a:ext cx="612947" cy="220346"/>
           </a:xfrm>
           <a:prstGeom prst="roundRect">
@@ -39377,8 +39383,8 @@
         </p:nvCxnSpPr>
         <p:spPr>
           <a:xfrm>
-            <a:off x="1930696" y="1083858"/>
-            <a:ext cx="317964" cy="3304"/>
+            <a:off x="1930697" y="1306595"/>
+            <a:ext cx="317963" cy="3304"/>
           </a:xfrm>
           <a:prstGeom prst="curvedConnector3">
             <a:avLst>
@@ -39421,7 +39427,7 @@
         </p:nvSpPr>
         <p:spPr>
           <a:xfrm rot="5400000">
-            <a:off x="2391444" y="3359822"/>
+            <a:off x="2391444" y="3465329"/>
             <a:ext cx="310669" cy="915333"/>
           </a:xfrm>
           <a:prstGeom prst="can">
@@ -39481,7 +39487,7 @@
         </p:nvSpPr>
         <p:spPr>
           <a:xfrm>
-            <a:off x="2222591" y="3730279"/>
+            <a:off x="2222591" y="3835786"/>
             <a:ext cx="192024" cy="187452"/>
           </a:xfrm>
           <a:prstGeom prst="roundRect">
@@ -39533,7 +39539,7 @@
         </p:nvSpPr>
         <p:spPr>
           <a:xfrm>
-            <a:off x="2480087" y="3730279"/>
+            <a:off x="2480087" y="3835786"/>
             <a:ext cx="192024" cy="187452"/>
           </a:xfrm>
           <a:prstGeom prst="roundRect">
@@ -39585,7 +39591,7 @@
         </p:nvSpPr>
         <p:spPr>
           <a:xfrm>
-            <a:off x="3103118" y="3966915"/>
+            <a:off x="3103118" y="4072422"/>
             <a:ext cx="0" cy="0"/>
           </a:xfrm>
           <a:prstGeom prst="rect">
@@ -39622,7 +39628,7 @@
         </p:nvSpPr>
         <p:spPr>
           <a:xfrm>
-            <a:off x="3412698" y="3714567"/>
+            <a:off x="3412698" y="3820074"/>
             <a:ext cx="659078" cy="206150"/>
           </a:xfrm>
           <a:prstGeom prst="roundRect">
@@ -39682,7 +39688,7 @@
         </p:nvSpPr>
         <p:spPr>
           <a:xfrm>
-            <a:off x="3533371" y="1136584"/>
+            <a:off x="3533371" y="1242091"/>
             <a:ext cx="1666555" cy="197028"/>
           </a:xfrm>
           <a:prstGeom prst="rect">
@@ -39722,7 +39728,7 @@
         </p:nvSpPr>
         <p:spPr>
           <a:xfrm>
-            <a:off x="2052791" y="3495250"/>
+            <a:off x="2052791" y="3600757"/>
             <a:ext cx="1666555" cy="197028"/>
           </a:xfrm>
           <a:prstGeom prst="rect">
@@ -39762,7 +39768,7 @@
         </p:nvSpPr>
         <p:spPr>
           <a:xfrm rot="5400000">
-            <a:off x="2391444" y="3961783"/>
+            <a:off x="2391444" y="4067290"/>
             <a:ext cx="310669" cy="915333"/>
           </a:xfrm>
           <a:prstGeom prst="can">
@@ -39822,7 +39828,7 @@
         </p:nvSpPr>
         <p:spPr>
           <a:xfrm>
-            <a:off x="2222591" y="4332240"/>
+            <a:off x="2222591" y="4437747"/>
             <a:ext cx="192024" cy="187452"/>
           </a:xfrm>
           <a:prstGeom prst="roundRect">
@@ -39874,7 +39880,7 @@
         </p:nvSpPr>
         <p:spPr>
           <a:xfrm>
-            <a:off x="2480087" y="4332240"/>
+            <a:off x="2480087" y="4437747"/>
             <a:ext cx="192024" cy="187452"/>
           </a:xfrm>
           <a:prstGeom prst="roundRect">
@@ -39926,7 +39932,7 @@
         </p:nvSpPr>
         <p:spPr>
           <a:xfrm>
-            <a:off x="3103118" y="4568876"/>
+            <a:off x="3103118" y="4674383"/>
             <a:ext cx="0" cy="0"/>
           </a:xfrm>
           <a:prstGeom prst="rect">
@@ -39963,7 +39969,7 @@
         </p:nvSpPr>
         <p:spPr>
           <a:xfrm>
-            <a:off x="2016591" y="4100470"/>
+            <a:off x="2016591" y="4205977"/>
             <a:ext cx="1666555" cy="197028"/>
           </a:xfrm>
           <a:prstGeom prst="rect">
@@ -40007,7 +40013,7 @@
         </p:nvCxnSpPr>
         <p:spPr>
           <a:xfrm>
-            <a:off x="860725" y="3817487"/>
+            <a:off x="860725" y="3922994"/>
             <a:ext cx="1228385" cy="12700"/>
           </a:xfrm>
           <a:prstGeom prst="curvedConnector3">
@@ -40051,7 +40057,7 @@
         </p:nvSpPr>
         <p:spPr>
           <a:xfrm rot="5400000">
-            <a:off x="4681255" y="3359823"/>
+            <a:off x="4681255" y="3465330"/>
             <a:ext cx="310669" cy="915333"/>
           </a:xfrm>
           <a:prstGeom prst="can">
@@ -40111,7 +40117,7 @@
         </p:nvSpPr>
         <p:spPr>
           <a:xfrm>
-            <a:off x="4512402" y="3730279"/>
+            <a:off x="4512402" y="3835786"/>
             <a:ext cx="192024" cy="187452"/>
           </a:xfrm>
           <a:prstGeom prst="roundRect">
@@ -40163,7 +40169,7 @@
         </p:nvSpPr>
         <p:spPr>
           <a:xfrm>
-            <a:off x="4769898" y="3730279"/>
+            <a:off x="4769898" y="3835786"/>
             <a:ext cx="192024" cy="187452"/>
           </a:xfrm>
           <a:prstGeom prst="roundRect">
@@ -40215,7 +40221,7 @@
         </p:nvSpPr>
         <p:spPr>
           <a:xfrm>
-            <a:off x="5392929" y="3966915"/>
+            <a:off x="5392929" y="4072422"/>
             <a:ext cx="0" cy="0"/>
           </a:xfrm>
           <a:prstGeom prst="rect">
@@ -40252,7 +40258,7 @@
         </p:nvSpPr>
         <p:spPr>
           <a:xfrm>
-            <a:off x="4097137" y="3511971"/>
+            <a:off x="4097137" y="3617478"/>
             <a:ext cx="1666555" cy="197028"/>
           </a:xfrm>
           <a:prstGeom prst="rect">
@@ -40296,7 +40302,7 @@
         </p:nvCxnSpPr>
         <p:spPr>
           <a:xfrm>
-            <a:off x="3004445" y="3817489"/>
+            <a:off x="3004445" y="3922996"/>
             <a:ext cx="408255" cy="155"/>
           </a:xfrm>
           <a:prstGeom prst="curvedConnector3">
@@ -40344,7 +40350,7 @@
         </p:nvCxnSpPr>
         <p:spPr>
           <a:xfrm flipV="1">
-            <a:off x="4071778" y="3817488"/>
+            <a:off x="4071778" y="3922995"/>
             <a:ext cx="307145" cy="154"/>
           </a:xfrm>
           <a:prstGeom prst="curvedConnector3">
@@ -40388,7 +40394,7 @@
         </p:nvSpPr>
         <p:spPr>
           <a:xfrm>
-            <a:off x="5764659" y="3719719"/>
+            <a:off x="5764659" y="3825226"/>
             <a:ext cx="659078" cy="206150"/>
           </a:xfrm>
           <a:prstGeom prst="roundRect">
@@ -40448,7 +40454,7 @@
         </p:nvSpPr>
         <p:spPr>
           <a:xfrm>
-            <a:off x="3140200" y="5140770"/>
+            <a:off x="3140200" y="5246277"/>
             <a:ext cx="0" cy="0"/>
           </a:xfrm>
           <a:prstGeom prst="rect">
@@ -40485,7 +40491,7 @@
         </p:nvSpPr>
         <p:spPr>
           <a:xfrm rot="5400000">
-            <a:off x="2428526" y="5121238"/>
+            <a:off x="4503127" y="5014805"/>
             <a:ext cx="310669" cy="915333"/>
           </a:xfrm>
           <a:prstGeom prst="can">
@@ -40545,7 +40551,7 @@
         </p:nvSpPr>
         <p:spPr>
           <a:xfrm>
-            <a:off x="2259673" y="5491695"/>
+            <a:off x="4334274" y="5385262"/>
             <a:ext cx="192024" cy="187452"/>
           </a:xfrm>
           <a:prstGeom prst="roundRect">
@@ -40597,7 +40603,7 @@
         </p:nvSpPr>
         <p:spPr>
           <a:xfrm>
-            <a:off x="2517169" y="5491695"/>
+            <a:off x="4591770" y="5385262"/>
             <a:ext cx="192024" cy="187452"/>
           </a:xfrm>
           <a:prstGeom prst="roundRect">
@@ -40649,7 +40655,7 @@
         </p:nvSpPr>
         <p:spPr>
           <a:xfrm>
-            <a:off x="3140200" y="5728331"/>
+            <a:off x="5214801" y="5621898"/>
             <a:ext cx="0" cy="0"/>
           </a:xfrm>
           <a:prstGeom prst="rect">
@@ -40686,7 +40692,7 @@
         </p:nvSpPr>
         <p:spPr>
           <a:xfrm>
-            <a:off x="2061413" y="5273385"/>
+            <a:off x="4200795" y="5188234"/>
             <a:ext cx="1666555" cy="197028"/>
           </a:xfrm>
           <a:prstGeom prst="rect">
@@ -40724,14 +40730,14 @@
           <p:cNvCxnSpPr>
             <a:cxnSpLocks/>
             <a:stCxn id="6" idx="3"/>
-            <a:endCxn id="70" idx="3"/>
+            <a:endCxn id="2" idx="2"/>
           </p:cNvCxnSpPr>
           <p:nvPr/>
         </p:nvCxnSpPr>
         <p:spPr>
           <a:xfrm>
-            <a:off x="860725" y="3817487"/>
-            <a:ext cx="1265467" cy="1761416"/>
+            <a:off x="860725" y="3922996"/>
+            <a:ext cx="1349250" cy="1551846"/>
           </a:xfrm>
           <a:prstGeom prst="curvedConnector3">
             <a:avLst>
@@ -40778,7 +40784,7 @@
         </p:nvCxnSpPr>
         <p:spPr>
           <a:xfrm>
-            <a:off x="5294256" y="3817488"/>
+            <a:off x="5294256" y="3922995"/>
             <a:ext cx="470405" cy="5306"/>
           </a:xfrm>
           <a:prstGeom prst="curvedConnector3">
@@ -40820,18 +40826,20 @@
           <p:cNvCxnSpPr>
             <a:cxnSpLocks/>
             <a:stCxn id="70" idx="1"/>
-            <a:endCxn id="68" idx="1"/>
+            <a:endCxn id="44" idx="1"/>
           </p:cNvCxnSpPr>
           <p:nvPr/>
         </p:nvCxnSpPr>
         <p:spPr>
-          <a:xfrm flipV="1">
-            <a:off x="3041525" y="3822796"/>
-            <a:ext cx="2723134" cy="1756109"/>
-          </a:xfrm>
-          <a:prstGeom prst="curvedConnector3">
+          <a:xfrm flipH="1" flipV="1">
+            <a:off x="3412698" y="3923149"/>
+            <a:ext cx="1703430" cy="1549323"/>
+          </a:xfrm>
+          <a:prstGeom prst="curvedConnector5">
             <a:avLst>
-              <a:gd name="adj1" fmla="val 78555"/>
+              <a:gd name="adj1" fmla="val -13420"/>
+              <a:gd name="adj2" fmla="val 64470"/>
+              <a:gd name="adj3" fmla="val 109291"/>
             </a:avLst>
           </a:prstGeom>
           <a:ln>
@@ -40870,7 +40878,7 @@
         </p:nvSpPr>
         <p:spPr>
           <a:xfrm rot="5400000">
-            <a:off x="7117946" y="3365100"/>
+            <a:off x="7117946" y="3470607"/>
             <a:ext cx="310669" cy="915333"/>
           </a:xfrm>
           <a:prstGeom prst="can">
@@ -40930,7 +40938,7 @@
         </p:nvSpPr>
         <p:spPr>
           <a:xfrm>
-            <a:off x="6949093" y="3735556"/>
+            <a:off x="6949093" y="3841063"/>
             <a:ext cx="192024" cy="187452"/>
           </a:xfrm>
           <a:prstGeom prst="roundRect">
@@ -40982,7 +40990,7 @@
         </p:nvSpPr>
         <p:spPr>
           <a:xfrm>
-            <a:off x="7206589" y="3735556"/>
+            <a:off x="7206589" y="3841063"/>
             <a:ext cx="192024" cy="187452"/>
           </a:xfrm>
           <a:prstGeom prst="roundRect">
@@ -41034,7 +41042,7 @@
         </p:nvSpPr>
         <p:spPr>
           <a:xfrm>
-            <a:off x="7829620" y="3972192"/>
+            <a:off x="7829620" y="4077699"/>
             <a:ext cx="0" cy="0"/>
           </a:xfrm>
           <a:prstGeom prst="rect">
@@ -41071,7 +41079,7 @@
         </p:nvSpPr>
         <p:spPr>
           <a:xfrm>
-            <a:off x="6533828" y="3517248"/>
+            <a:off x="6533828" y="3622755"/>
             <a:ext cx="1666555" cy="197028"/>
           </a:xfrm>
           <a:prstGeom prst="rect">
@@ -41115,7 +41123,7 @@
         </p:nvCxnSpPr>
         <p:spPr>
           <a:xfrm flipV="1">
-            <a:off x="6423739" y="3822767"/>
+            <a:off x="6423739" y="3928274"/>
             <a:ext cx="391875" cy="29"/>
           </a:xfrm>
           <a:prstGeom prst="curvedConnector3">
@@ -41162,9 +41170,9 @@
           <p:nvPr/>
         </p:nvCxnSpPr>
         <p:spPr>
-          <a:xfrm>
-            <a:off x="7730945" y="3822767"/>
-            <a:ext cx="2624074" cy="9151"/>
+          <a:xfrm flipV="1">
+            <a:off x="7730947" y="3927797"/>
+            <a:ext cx="2624072" cy="477"/>
           </a:xfrm>
           <a:prstGeom prst="curvedConnector3">
             <a:avLst>
@@ -41211,7 +41219,7 @@
         </p:nvCxnSpPr>
         <p:spPr>
           <a:xfrm flipV="1">
-            <a:off x="3004445" y="3817642"/>
+            <a:off x="3004445" y="3923149"/>
             <a:ext cx="408255" cy="601806"/>
           </a:xfrm>
           <a:prstGeom prst="curvedConnector3">
@@ -41255,7 +41263,7 @@
         </p:nvSpPr>
         <p:spPr>
           <a:xfrm>
-            <a:off x="10355019" y="3728841"/>
+            <a:off x="10355019" y="3824722"/>
             <a:ext cx="659078" cy="206150"/>
           </a:xfrm>
           <a:prstGeom prst="roundRect">
@@ -41315,7 +41323,7 @@
         </p:nvSpPr>
         <p:spPr>
           <a:xfrm>
-            <a:off x="10355019" y="1333917"/>
+            <a:off x="10355019" y="1439424"/>
             <a:ext cx="659078" cy="206150"/>
           </a:xfrm>
           <a:prstGeom prst="roundRect">
@@ -41379,7 +41387,7 @@
         </p:nvCxnSpPr>
         <p:spPr>
           <a:xfrm flipV="1">
-            <a:off x="4378921" y="1436994"/>
+            <a:off x="4378921" y="1542501"/>
             <a:ext cx="5976098" cy="6433"/>
           </a:xfrm>
           <a:prstGeom prst="curvedConnector3">
@@ -41437,7 +41445,7 @@
         </p:blipFill>
         <p:spPr>
           <a:xfrm>
-            <a:off x="11416364" y="1188287"/>
+            <a:off x="11416364" y="1293794"/>
             <a:ext cx="481251" cy="481251"/>
           </a:xfrm>
           <a:prstGeom prst="rect">
@@ -41473,7 +41481,7 @@
         </p:blipFill>
         <p:spPr>
           <a:xfrm>
-            <a:off x="11416364" y="3590581"/>
+            <a:off x="11416364" y="3686462"/>
             <a:ext cx="481251" cy="481251"/>
           </a:xfrm>
           <a:prstGeom prst="rect">
@@ -41495,7 +41503,7 @@
         </p:nvSpPr>
         <p:spPr>
           <a:xfrm>
-            <a:off x="12719472" y="1318439"/>
+            <a:off x="12719472" y="1423946"/>
             <a:ext cx="659078" cy="206150"/>
           </a:xfrm>
           <a:prstGeom prst="roundRect">
@@ -41569,7 +41577,7 @@
         </p:blipFill>
         <p:spPr>
           <a:xfrm>
-            <a:off x="13990364" y="605674"/>
+            <a:off x="13990364" y="711181"/>
             <a:ext cx="481251" cy="481251"/>
           </a:xfrm>
           <a:prstGeom prst="rect">
@@ -41605,7 +41613,7 @@
         </p:blipFill>
         <p:spPr>
           <a:xfrm>
-            <a:off x="13990363" y="1767569"/>
+            <a:off x="13990363" y="1873076"/>
             <a:ext cx="481251" cy="481251"/>
           </a:xfrm>
           <a:prstGeom prst="rect">
@@ -41641,7 +41649,7 @@
         </p:blipFill>
         <p:spPr>
           <a:xfrm>
-            <a:off x="13990363" y="1184313"/>
+            <a:off x="13990363" y="1289820"/>
             <a:ext cx="481251" cy="481251"/>
           </a:xfrm>
           <a:prstGeom prst="rect">
@@ -41677,7 +41685,7 @@
         </p:blipFill>
         <p:spPr>
           <a:xfrm>
-            <a:off x="14207134" y="2901565"/>
+            <a:off x="14207134" y="3007072"/>
             <a:ext cx="481251" cy="481251"/>
           </a:xfrm>
           <a:prstGeom prst="rect">
@@ -41703,7 +41711,7 @@
         </p:nvCxnSpPr>
         <p:spPr>
           <a:xfrm flipV="1">
-            <a:off x="11014099" y="1428913"/>
+            <a:off x="11014099" y="1534420"/>
             <a:ext cx="402265" cy="8081"/>
           </a:xfrm>
           <a:prstGeom prst="curvedConnector3">
@@ -41751,7 +41759,7 @@
         </p:nvCxnSpPr>
         <p:spPr>
           <a:xfrm flipV="1">
-            <a:off x="11897615" y="1421516"/>
+            <a:off x="11897615" y="1527023"/>
             <a:ext cx="821859" cy="7397"/>
           </a:xfrm>
           <a:prstGeom prst="curvedConnector3">
@@ -41810,7 +41818,7 @@
         </p:blipFill>
         <p:spPr bwMode="auto">
           <a:xfrm>
-            <a:off x="11415490" y="1418477"/>
+            <a:off x="11415490" y="1523984"/>
             <a:ext cx="198421" cy="198421"/>
           </a:xfrm>
           <a:prstGeom prst="rect">
@@ -41850,7 +41858,7 @@
         </p:blipFill>
         <p:spPr bwMode="auto">
           <a:xfrm>
-            <a:off x="11382624" y="3839287"/>
+            <a:off x="11382624" y="3935168"/>
             <a:ext cx="198421" cy="198421"/>
           </a:xfrm>
           <a:prstGeom prst="rect">
@@ -41890,7 +41898,7 @@
         </p:blipFill>
         <p:spPr bwMode="auto">
           <a:xfrm>
-            <a:off x="13968228" y="875712"/>
+            <a:off x="13968228" y="981219"/>
             <a:ext cx="198421" cy="198421"/>
           </a:xfrm>
           <a:prstGeom prst="rect">
@@ -41930,7 +41938,7 @@
         </p:blipFill>
         <p:spPr bwMode="auto">
           <a:xfrm>
-            <a:off x="13960792" y="1447276"/>
+            <a:off x="13960792" y="1552783"/>
             <a:ext cx="198421" cy="198421"/>
           </a:xfrm>
           <a:prstGeom prst="rect">
@@ -41970,7 +41978,7 @@
         </p:blipFill>
         <p:spPr bwMode="auto">
           <a:xfrm>
-            <a:off x="13960792" y="2025915"/>
+            <a:off x="13960792" y="2131422"/>
             <a:ext cx="198421" cy="198421"/>
           </a:xfrm>
           <a:prstGeom prst="rect">
@@ -42010,7 +42018,7 @@
         </p:blipFill>
         <p:spPr bwMode="auto">
           <a:xfrm>
-            <a:off x="14178399" y="3179778"/>
+            <a:off x="14178399" y="3285285"/>
             <a:ext cx="198421" cy="198421"/>
           </a:xfrm>
           <a:prstGeom prst="rect">
@@ -42039,7 +42047,7 @@
         </p:nvCxnSpPr>
         <p:spPr>
           <a:xfrm flipV="1">
-            <a:off x="11014099" y="3831207"/>
+            <a:off x="11014099" y="3927088"/>
             <a:ext cx="402265" cy="711"/>
           </a:xfrm>
           <a:prstGeom prst="curvedConnector3">
@@ -42083,7 +42091,7 @@
         </p:nvSpPr>
         <p:spPr>
           <a:xfrm>
-            <a:off x="10355019" y="3038841"/>
+            <a:off x="10355019" y="3144348"/>
             <a:ext cx="659078" cy="206150"/>
           </a:xfrm>
           <a:prstGeom prst="roundRect">
@@ -42157,7 +42165,7 @@
         </p:blipFill>
         <p:spPr>
           <a:xfrm>
-            <a:off x="11431027" y="2898640"/>
+            <a:off x="11431027" y="3004147"/>
             <a:ext cx="481251" cy="481251"/>
           </a:xfrm>
           <a:prstGeom prst="rect">
@@ -42194,7 +42202,7 @@
         </p:blipFill>
         <p:spPr bwMode="auto">
           <a:xfrm>
-            <a:off x="11397287" y="3154546"/>
+            <a:off x="11397287" y="3260053"/>
             <a:ext cx="198421" cy="198421"/>
           </a:xfrm>
           <a:prstGeom prst="rect">
@@ -42223,7 +42231,7 @@
         </p:nvCxnSpPr>
         <p:spPr>
           <a:xfrm flipV="1">
-            <a:off x="11014097" y="3139264"/>
+            <a:off x="11014097" y="3244771"/>
             <a:ext cx="416928" cy="2652"/>
           </a:xfrm>
           <a:prstGeom prst="curvedConnector3">
@@ -42271,7 +42279,7 @@
         </p:nvCxnSpPr>
         <p:spPr>
           <a:xfrm flipV="1">
-            <a:off x="3004443" y="3141918"/>
+            <a:off x="3004443" y="3247425"/>
             <a:ext cx="7350576" cy="675571"/>
           </a:xfrm>
           <a:prstGeom prst="curvedConnector3">
@@ -42315,7 +42323,7 @@
         </p:nvSpPr>
         <p:spPr>
           <a:xfrm>
-            <a:off x="11365583" y="2829563"/>
+            <a:off x="11365583" y="2935070"/>
             <a:ext cx="812569" cy="197028"/>
           </a:xfrm>
           <a:prstGeom prst="rect">
@@ -42356,7 +42364,7 @@
         </p:nvSpPr>
         <p:spPr>
           <a:xfrm>
-            <a:off x="11240374" y="3511971"/>
+            <a:off x="11240374" y="3607852"/>
             <a:ext cx="1666555" cy="197028"/>
           </a:xfrm>
           <a:prstGeom prst="rect">
@@ -42397,7 +42405,7 @@
         </p:nvSpPr>
         <p:spPr>
           <a:xfrm>
-            <a:off x="11269575" y="1108055"/>
+            <a:off x="11269575" y="1213562"/>
             <a:ext cx="812569" cy="197028"/>
           </a:xfrm>
           <a:prstGeom prst="rect">
@@ -42438,7 +42446,7 @@
         </p:nvSpPr>
         <p:spPr>
           <a:xfrm>
-            <a:off x="13990362" y="550900"/>
+            <a:off x="13990362" y="656407"/>
             <a:ext cx="812569" cy="197028"/>
           </a:xfrm>
           <a:prstGeom prst="rect">
@@ -42479,7 +42487,7 @@
         </p:nvSpPr>
         <p:spPr>
           <a:xfrm>
-            <a:off x="13973321" y="1127425"/>
+            <a:off x="13973321" y="1232932"/>
             <a:ext cx="812569" cy="197028"/>
           </a:xfrm>
           <a:prstGeom prst="rect">
@@ -42520,7 +42528,7 @@
         </p:nvSpPr>
         <p:spPr>
           <a:xfrm>
-            <a:off x="13960792" y="1718824"/>
+            <a:off x="13960792" y="1824331"/>
             <a:ext cx="812569" cy="197028"/>
           </a:xfrm>
           <a:prstGeom prst="rect">
@@ -42565,7 +42573,7 @@
         </p:nvCxnSpPr>
         <p:spPr>
           <a:xfrm flipV="1">
-            <a:off x="13378550" y="846298"/>
+            <a:off x="13378550" y="951805"/>
             <a:ext cx="611812" cy="575216"/>
           </a:xfrm>
           <a:prstGeom prst="curvedConnector3">
@@ -42613,7 +42621,7 @@
         </p:nvCxnSpPr>
         <p:spPr>
           <a:xfrm>
-            <a:off x="13378552" y="1421516"/>
+            <a:off x="13378552" y="1527023"/>
             <a:ext cx="611811" cy="3423"/>
           </a:xfrm>
           <a:prstGeom prst="curvedConnector3">
@@ -42660,7 +42668,7 @@
         </p:nvCxnSpPr>
         <p:spPr>
           <a:xfrm>
-            <a:off x="13378552" y="1421516"/>
+            <a:off x="13378552" y="1527023"/>
             <a:ext cx="611811" cy="586367"/>
           </a:xfrm>
           <a:prstGeom prst="curvedConnector3">
@@ -42718,7 +42726,7 @@
         </p:blipFill>
         <p:spPr>
           <a:xfrm>
-            <a:off x="11392164" y="5316678"/>
+            <a:off x="11392164" y="5220152"/>
             <a:ext cx="481251" cy="481251"/>
           </a:xfrm>
           <a:prstGeom prst="rect">
@@ -42755,7 +42763,7 @@
         </p:blipFill>
         <p:spPr bwMode="auto">
           <a:xfrm>
-            <a:off x="11363429" y="5594891"/>
+            <a:off x="11363429" y="5498365"/>
             <a:ext cx="198421" cy="198421"/>
           </a:xfrm>
           <a:prstGeom prst="rect">
@@ -42780,7 +42788,7 @@
         </p:nvSpPr>
         <p:spPr>
           <a:xfrm>
-            <a:off x="10392101" y="5467649"/>
+            <a:off x="10392101" y="5359400"/>
             <a:ext cx="659078" cy="206150"/>
           </a:xfrm>
           <a:prstGeom prst="roundRect">
@@ -42844,8 +42852,8 @@
         </p:nvCxnSpPr>
         <p:spPr>
           <a:xfrm flipV="1">
-            <a:off x="3041525" y="5570726"/>
-            <a:ext cx="7350576" cy="8179"/>
+            <a:off x="5116128" y="5462475"/>
+            <a:ext cx="5275973" cy="9997"/>
           </a:xfrm>
           <a:prstGeom prst="curvedConnector3">
             <a:avLst>
@@ -42892,8 +42900,8 @@
         </p:nvCxnSpPr>
         <p:spPr>
           <a:xfrm flipV="1">
-            <a:off x="11051181" y="5557302"/>
-            <a:ext cx="340983" cy="13422"/>
+            <a:off x="11051179" y="5460778"/>
+            <a:ext cx="340985" cy="1697"/>
           </a:xfrm>
           <a:prstGeom prst="curvedConnector3">
             <a:avLst>
@@ -42936,7 +42944,7 @@
         </p:nvSpPr>
         <p:spPr>
           <a:xfrm>
-            <a:off x="11287786" y="5251785"/>
+            <a:off x="11287786" y="4535765"/>
             <a:ext cx="812569" cy="197028"/>
           </a:xfrm>
           <a:prstGeom prst="rect">
@@ -42977,7 +42985,7 @@
         </p:nvSpPr>
         <p:spPr>
           <a:xfrm>
-            <a:off x="13855107" y="2821724"/>
+            <a:off x="13855107" y="2927231"/>
             <a:ext cx="1666555" cy="197028"/>
           </a:xfrm>
           <a:prstGeom prst="rect">
@@ -43021,7 +43029,7 @@
         </p:nvCxnSpPr>
         <p:spPr>
           <a:xfrm>
-            <a:off x="11933289" y="3134022"/>
+            <a:off x="11933289" y="3239529"/>
             <a:ext cx="781488" cy="6122"/>
           </a:xfrm>
           <a:prstGeom prst="curvedConnector3">
@@ -43065,7 +43073,7 @@
         </p:nvSpPr>
         <p:spPr>
           <a:xfrm>
-            <a:off x="12714777" y="3037069"/>
+            <a:off x="12714777" y="3142576"/>
             <a:ext cx="659078" cy="206150"/>
           </a:xfrm>
           <a:prstGeom prst="roundRect">
@@ -43129,7 +43137,7 @@
         </p:nvCxnSpPr>
         <p:spPr>
           <a:xfrm>
-            <a:off x="13373857" y="3140146"/>
+            <a:off x="13373857" y="3245653"/>
             <a:ext cx="833277" cy="2045"/>
           </a:xfrm>
           <a:prstGeom prst="curvedConnector3">
@@ -43177,8 +43185,8 @@
         </p:nvCxnSpPr>
         <p:spPr>
           <a:xfrm flipV="1">
-            <a:off x="11873413" y="3140144"/>
-            <a:ext cx="841364" cy="2417158"/>
+            <a:off x="11873415" y="3245651"/>
+            <a:ext cx="841362" cy="2215127"/>
           </a:xfrm>
           <a:prstGeom prst="curvedConnector3">
             <a:avLst>
@@ -43221,7 +43229,7 @@
         </p:nvSpPr>
         <p:spPr>
           <a:xfrm>
-            <a:off x="15548404" y="3039113"/>
+            <a:off x="15548404" y="3144620"/>
             <a:ext cx="659078" cy="206150"/>
           </a:xfrm>
           <a:prstGeom prst="roundRect">
@@ -43285,7 +43293,7 @@
         </p:nvCxnSpPr>
         <p:spPr>
           <a:xfrm flipV="1">
-            <a:off x="14688385" y="3142190"/>
+            <a:off x="14688385" y="3247697"/>
             <a:ext cx="860021" cy="1"/>
           </a:xfrm>
           <a:prstGeom prst="curvedConnector3">
@@ -43333,7 +43341,7 @@
         </p:nvCxnSpPr>
         <p:spPr>
           <a:xfrm>
-            <a:off x="14471615" y="846298"/>
+            <a:off x="14471615" y="951805"/>
             <a:ext cx="1076791" cy="2295890"/>
           </a:xfrm>
           <a:prstGeom prst="curvedConnector3">
@@ -43391,7 +43399,7 @@
         </p:blipFill>
         <p:spPr>
           <a:xfrm>
-            <a:off x="16615641" y="2903659"/>
+            <a:off x="16615641" y="3009166"/>
             <a:ext cx="481251" cy="481251"/>
           </a:xfrm>
           <a:prstGeom prst="rect">
@@ -43428,7 +43436,7 @@
         </p:blipFill>
         <p:spPr bwMode="auto">
           <a:xfrm>
-            <a:off x="16586906" y="3181872"/>
+            <a:off x="16586906" y="3287379"/>
             <a:ext cx="198421" cy="198421"/>
           </a:xfrm>
           <a:prstGeom prst="rect">
@@ -43457,7 +43465,7 @@
         </p:nvCxnSpPr>
         <p:spPr>
           <a:xfrm>
-            <a:off x="16207484" y="3142190"/>
+            <a:off x="16207484" y="3247697"/>
             <a:ext cx="408157" cy="2095"/>
           </a:xfrm>
           <a:prstGeom prst="curvedConnector3">
@@ -43501,7 +43509,7 @@
         </p:nvSpPr>
         <p:spPr>
           <a:xfrm>
-            <a:off x="1810646" y="2638967"/>
+            <a:off x="1810646" y="2744474"/>
             <a:ext cx="15774704" cy="2096084"/>
           </a:xfrm>
           <a:prstGeom prst="roundRect">
@@ -43553,7 +43561,7 @@
         </p:nvSpPr>
         <p:spPr>
           <a:xfrm>
-            <a:off x="2084390" y="2539621"/>
+            <a:off x="2084390" y="2645128"/>
             <a:ext cx="983419" cy="187561"/>
           </a:xfrm>
           <a:prstGeom prst="roundRect">
@@ -43612,8 +43620,8 @@
         </p:nvSpPr>
         <p:spPr>
           <a:xfrm>
-            <a:off x="1810646" y="5029495"/>
-            <a:ext cx="10872586" cy="1661698"/>
+            <a:off x="1810646" y="5135002"/>
+            <a:ext cx="10872586" cy="1017135"/>
           </a:xfrm>
           <a:prstGeom prst="roundRect">
             <a:avLst/>
@@ -43664,7 +43672,7 @@
         </p:nvSpPr>
         <p:spPr>
           <a:xfrm>
-            <a:off x="2121472" y="4919811"/>
+            <a:off x="2121472" y="5025318"/>
             <a:ext cx="983419" cy="187561"/>
           </a:xfrm>
           <a:prstGeom prst="roundRect">
@@ -43737,7 +43745,7 @@
         </p:blipFill>
         <p:spPr>
           <a:xfrm>
-            <a:off x="2096647" y="1947280"/>
+            <a:off x="2096647" y="2052787"/>
             <a:ext cx="368444" cy="368444"/>
           </a:xfrm>
           <a:prstGeom prst="rect">
@@ -43773,7 +43781,7 @@
         </p:blipFill>
         <p:spPr>
           <a:xfrm>
-            <a:off x="2436332" y="1947280"/>
+            <a:off x="2436332" y="2052787"/>
             <a:ext cx="368444" cy="368444"/>
           </a:xfrm>
           <a:prstGeom prst="rect">
@@ -43809,7 +43817,7 @@
         </p:blipFill>
         <p:spPr>
           <a:xfrm>
-            <a:off x="2783208" y="1947280"/>
+            <a:off x="2783208" y="2052787"/>
             <a:ext cx="368444" cy="368444"/>
           </a:xfrm>
           <a:prstGeom prst="rect">
@@ -43845,7 +43853,7 @@
         </p:blipFill>
         <p:spPr>
           <a:xfrm>
-            <a:off x="3132922" y="1947280"/>
+            <a:off x="3132922" y="2052787"/>
             <a:ext cx="368444" cy="368444"/>
           </a:xfrm>
           <a:prstGeom prst="rect">
@@ -43867,7 +43875,7 @@
         </p:nvSpPr>
         <p:spPr>
           <a:xfrm>
-            <a:off x="2149677" y="1891804"/>
+            <a:off x="2149677" y="1997311"/>
             <a:ext cx="337852" cy="197028"/>
           </a:xfrm>
           <a:prstGeom prst="rect">
@@ -43908,7 +43916,7 @@
         </p:nvSpPr>
         <p:spPr>
           <a:xfrm>
-            <a:off x="2474996" y="1898793"/>
+            <a:off x="2474996" y="2004300"/>
             <a:ext cx="337852" cy="197028"/>
           </a:xfrm>
           <a:prstGeom prst="rect">
@@ -43949,7 +43957,7 @@
         </p:nvSpPr>
         <p:spPr>
           <a:xfrm>
-            <a:off x="2822792" y="1899354"/>
+            <a:off x="2822792" y="2004861"/>
             <a:ext cx="337852" cy="197028"/>
           </a:xfrm>
           <a:prstGeom prst="rect">
@@ -43990,7 +43998,7 @@
         </p:nvSpPr>
         <p:spPr>
           <a:xfrm>
-            <a:off x="3208570" y="1893293"/>
+            <a:off x="3208570" y="1998800"/>
             <a:ext cx="337852" cy="197028"/>
           </a:xfrm>
           <a:prstGeom prst="rect">
@@ -44019,10 +44027,47 @@
       </p:sp>
       <p:sp>
         <p:nvSpPr>
-          <p:cNvPr id="1121" name="Can 1120">
-            <a:extLst>
-              <a:ext uri="{FF2B5EF4-FFF2-40B4-BE49-F238E27FC236}">
-                <a16:creationId xmlns:a16="http://schemas.microsoft.com/office/drawing/2014/main" id="{FF67B152-7EF7-8729-0540-223851F017BD}"/>
+          <p:cNvPr id="1167" name="TextBox 1166">
+            <a:extLst>
+              <a:ext uri="{FF2B5EF4-FFF2-40B4-BE49-F238E27FC236}">
+                <a16:creationId xmlns:a16="http://schemas.microsoft.com/office/drawing/2014/main" id="{C785EC6A-D258-6268-A1F9-C35F7479E13D}"/>
+              </a:ext>
+            </a:extLst>
+          </p:cNvPr>
+          <p:cNvSpPr txBox="1"/>
+          <p:nvPr/>
+        </p:nvSpPr>
+        <p:spPr>
+          <a:xfrm>
+            <a:off x="13675750" y="5308367"/>
+            <a:ext cx="0" cy="0"/>
+          </a:xfrm>
+          <a:prstGeom prst="rect">
+            <a:avLst/>
+          </a:prstGeom>
+          <a:noFill/>
+        </p:spPr>
+        <p:txBody>
+          <a:bodyPr wrap="none" lIns="0" tIns="0" rIns="0" bIns="0" rtlCol="0">
+            <a:noAutofit/>
+          </a:bodyPr>
+          <a:lstStyle/>
+          <a:p>
+            <a:pPr defTabSz="228600">
+              <a:spcAft>
+                <a:spcPts val="1200"/>
+              </a:spcAft>
+            </a:pPr>
+            <a:endParaRPr lang="de-DE" dirty="0"/>
+          </a:p>
+        </p:txBody>
+      </p:sp>
+      <p:sp>
+        <p:nvSpPr>
+          <p:cNvPr id="2" name="Can 1">
+            <a:extLst>
+              <a:ext uri="{FF2B5EF4-FFF2-40B4-BE49-F238E27FC236}">
+                <a16:creationId xmlns:a16="http://schemas.microsoft.com/office/drawing/2014/main" id="{9AD183CD-9C2F-04A4-598D-5A89424BEABA}"/>
               </a:ext>
             </a:extLst>
           </p:cNvPr>
@@ -44030,22 +44075,18 @@
           <p:nvPr/>
         </p:nvSpPr>
         <p:spPr>
-          <a:xfrm rot="5400000">
-            <a:off x="2405424" y="5673928"/>
-            <a:ext cx="310669" cy="915333"/>
+          <a:xfrm>
+            <a:off x="2209975" y="5347947"/>
+            <a:ext cx="676093" cy="253790"/>
           </a:xfrm>
           <a:prstGeom prst="can">
             <a:avLst/>
           </a:prstGeom>
           <a:solidFill>
-            <a:schemeClr val="bg1">
-              <a:lumMod val="85000"/>
-            </a:schemeClr>
+            <a:schemeClr val="accent2"/>
           </a:solidFill>
           <a:ln>
-            <a:solidFill>
-              <a:schemeClr val="bg1"/>
-            </a:solidFill>
+            <a:noFill/>
           </a:ln>
         </p:spPr>
         <p:style>
@@ -44065,24 +44106,101 @@
           </a:fontRef>
         </p:style>
         <p:txBody>
-          <a:bodyPr rtlCol="0" anchor="ctr"/>
+          <a:bodyPr tIns="91440" bIns="91440" rtlCol="0" anchor="ctr"/>
           <a:lstStyle/>
           <a:p>
             <a:pPr algn="ctr"/>
-            <a:endParaRPr lang="en-US">
-              <a:solidFill>
-                <a:srgbClr val="5A00D2"/>
-              </a:solidFill>
-            </a:endParaRPr>
-          </a:p>
-        </p:txBody>
-      </p:sp>
-      <p:sp>
-        <p:nvSpPr>
-          <p:cNvPr id="1122" name="Rounded Rectangle 1121">
-            <a:extLst>
-              <a:ext uri="{FF2B5EF4-FFF2-40B4-BE49-F238E27FC236}">
-                <a16:creationId xmlns:a16="http://schemas.microsoft.com/office/drawing/2014/main" id="{883681DD-139B-C280-901A-109CD0C62E20}"/>
+            <a:r>
+              <a:rPr lang="en-GB" sz="700" b="1" dirty="0"/>
+              <a:t>RDBMS</a:t>
+            </a:r>
+            <a:endParaRPr lang="en-GB" sz="800" b="1" dirty="0"/>
+          </a:p>
+        </p:txBody>
+      </p:sp>
+      <p:pic>
+        <p:nvPicPr>
+          <p:cNvPr id="10" name="Graphic 9" descr="Table outline">
+            <a:extLst>
+              <a:ext uri="{FF2B5EF4-FFF2-40B4-BE49-F238E27FC236}">
+                <a16:creationId xmlns:a16="http://schemas.microsoft.com/office/drawing/2014/main" id="{52E05881-CBAE-6AC2-5430-EC87EE5B5796}"/>
+              </a:ext>
+            </a:extLst>
+          </p:cNvPr>
+          <p:cNvPicPr>
+            <a:picLocks noChangeAspect="1"/>
+          </p:cNvPicPr>
+          <p:nvPr/>
+        </p:nvPicPr>
+        <p:blipFill>
+          <a:blip>
+            <a:extLst>
+              <a:ext uri="{96DAC541-7B7A-43D3-8B79-37D633B846F1}">
+                <asvg:svgBlip xmlns:asvg="http://schemas.microsoft.com/office/drawing/2016/SVG/main" r:embed="rId2"/>
+              </a:ext>
+            </a:extLst>
+          </a:blip>
+          <a:stretch>
+            <a:fillRect/>
+          </a:stretch>
+        </p:blipFill>
+        <p:spPr>
+          <a:xfrm>
+            <a:off x="2358053" y="5660742"/>
+            <a:ext cx="334949" cy="334949"/>
+          </a:xfrm>
+          <a:prstGeom prst="rect">
+            <a:avLst/>
+          </a:prstGeom>
+        </p:spPr>
+      </p:pic>
+      <p:sp>
+        <p:nvSpPr>
+          <p:cNvPr id="13" name="TextBox 12">
+            <a:extLst>
+              <a:ext uri="{FF2B5EF4-FFF2-40B4-BE49-F238E27FC236}">
+                <a16:creationId xmlns:a16="http://schemas.microsoft.com/office/drawing/2014/main" id="{1ED0EFBC-1C39-56C0-BEE5-DB4457616946}"/>
+              </a:ext>
+            </a:extLst>
+          </p:cNvPr>
+          <p:cNvSpPr txBox="1"/>
+          <p:nvPr/>
+        </p:nvSpPr>
+        <p:spPr>
+          <a:xfrm>
+            <a:off x="2368948" y="5607357"/>
+            <a:ext cx="337852" cy="179116"/>
+          </a:xfrm>
+          <a:prstGeom prst="rect">
+            <a:avLst/>
+          </a:prstGeom>
+          <a:noFill/>
+        </p:spPr>
+        <p:txBody>
+          <a:bodyPr wrap="none" lIns="0" tIns="0" rIns="0" bIns="0" rtlCol="0">
+            <a:noAutofit/>
+          </a:bodyPr>
+          <a:lstStyle/>
+          <a:p>
+            <a:pPr defTabSz="228600">
+              <a:spcAft>
+                <a:spcPts val="1200"/>
+              </a:spcAft>
+            </a:pPr>
+            <a:r>
+              <a:rPr lang="de-DE" sz="700" dirty="0" err="1"/>
+              <a:t>merchant</a:t>
+            </a:r>
+            <a:endParaRPr lang="de-DE" sz="700" dirty="0"/>
+          </a:p>
+        </p:txBody>
+      </p:sp>
+      <p:sp>
+        <p:nvSpPr>
+          <p:cNvPr id="24" name="Rounded Rectangle 23">
+            <a:extLst>
+              <a:ext uri="{FF2B5EF4-FFF2-40B4-BE49-F238E27FC236}">
+                <a16:creationId xmlns:a16="http://schemas.microsoft.com/office/drawing/2014/main" id="{AF2F482E-EFC9-9CA2-4EFA-DD95A72E1522}"/>
               </a:ext>
             </a:extLst>
           </p:cNvPr>
@@ -44091,17 +44209,22 @@
         </p:nvSpPr>
         <p:spPr>
           <a:xfrm>
-            <a:off x="2236571" y="6044385"/>
-            <a:ext cx="192024" cy="187452"/>
+            <a:off x="3196847" y="5369711"/>
+            <a:ext cx="659078" cy="206150"/>
           </a:xfrm>
           <a:prstGeom prst="roundRect">
             <a:avLst/>
           </a:prstGeom>
           <a:solidFill>
-            <a:srgbClr val="9600FF"/>
+            <a:schemeClr val="accent3">
+              <a:lumMod val="60000"/>
+              <a:lumOff val="40000"/>
+            </a:schemeClr>
           </a:solidFill>
           <a:ln>
-            <a:noFill/>
+            <a:solidFill>
+              <a:schemeClr val="accent1"/>
+            </a:solidFill>
           </a:ln>
         </p:spPr>
         <p:style>
@@ -44125,16 +44248,229 @@
           <a:lstStyle/>
           <a:p>
             <a:pPr algn="ctr"/>
-            <a:endParaRPr lang="en-US"/>
-          </a:p>
-        </p:txBody>
-      </p:sp>
-      <p:sp>
-        <p:nvSpPr>
-          <p:cNvPr id="1123" name="Rounded Rectangle 1122">
-            <a:extLst>
-              <a:ext uri="{FF2B5EF4-FFF2-40B4-BE49-F238E27FC236}">
-                <a16:creationId xmlns:a16="http://schemas.microsoft.com/office/drawing/2014/main" id="{9C99A0D2-79AA-4D51-85D4-28F68CCCD9AC}"/>
+            <a:r>
+              <a:rPr lang="en-US" sz="700" b="1" dirty="0"/>
+              <a:t>CDC</a:t>
+            </a:r>
+          </a:p>
+        </p:txBody>
+      </p:sp>
+      <p:cxnSp>
+        <p:nvCxnSpPr>
+          <p:cNvPr id="29" name="Straight Arrow Connector 47">
+            <a:extLst>
+              <a:ext uri="{FF2B5EF4-FFF2-40B4-BE49-F238E27FC236}">
+                <a16:creationId xmlns:a16="http://schemas.microsoft.com/office/drawing/2014/main" id="{4E4BB77A-8075-0F5A-115D-D90DD6AE26DE}"/>
+              </a:ext>
+            </a:extLst>
+          </p:cNvPr>
+          <p:cNvCxnSpPr>
+            <a:cxnSpLocks/>
+            <a:stCxn id="2" idx="4"/>
+            <a:endCxn id="24" idx="1"/>
+          </p:cNvCxnSpPr>
+          <p:nvPr/>
+        </p:nvCxnSpPr>
+        <p:spPr>
+          <a:xfrm flipV="1">
+            <a:off x="2886068" y="5472786"/>
+            <a:ext cx="310779" cy="2056"/>
+          </a:xfrm>
+          <a:prstGeom prst="curvedConnector3">
+            <a:avLst>
+              <a:gd name="adj1" fmla="val 50000"/>
+            </a:avLst>
+          </a:prstGeom>
+          <a:ln>
+            <a:solidFill>
+              <a:srgbClr val="5A00D2"/>
+            </a:solidFill>
+            <a:tailEnd type="triangle"/>
+          </a:ln>
+        </p:spPr>
+        <p:style>
+          <a:lnRef idx="1">
+            <a:schemeClr val="accent1"/>
+          </a:lnRef>
+          <a:fillRef idx="0">
+            <a:schemeClr val="accent1"/>
+          </a:fillRef>
+          <a:effectRef idx="0">
+            <a:schemeClr val="accent1"/>
+          </a:effectRef>
+          <a:fontRef idx="minor">
+            <a:schemeClr val="tx1"/>
+          </a:fontRef>
+        </p:style>
+      </p:cxnSp>
+      <p:cxnSp>
+        <p:nvCxnSpPr>
+          <p:cNvPr id="33" name="Straight Arrow Connector 47">
+            <a:extLst>
+              <a:ext uri="{FF2B5EF4-FFF2-40B4-BE49-F238E27FC236}">
+                <a16:creationId xmlns:a16="http://schemas.microsoft.com/office/drawing/2014/main" id="{13B0A16B-B262-AA8E-4E2B-FD6F03477633}"/>
+              </a:ext>
+            </a:extLst>
+          </p:cNvPr>
+          <p:cNvCxnSpPr>
+            <a:cxnSpLocks/>
+            <a:stCxn id="24" idx="3"/>
+            <a:endCxn id="70" idx="3"/>
+          </p:cNvCxnSpPr>
+          <p:nvPr/>
+        </p:nvCxnSpPr>
+        <p:spPr>
+          <a:xfrm flipV="1">
+            <a:off x="3855925" y="5472472"/>
+            <a:ext cx="344870" cy="314"/>
+          </a:xfrm>
+          <a:prstGeom prst="curvedConnector3">
+            <a:avLst>
+              <a:gd name="adj1" fmla="val 50000"/>
+            </a:avLst>
+          </a:prstGeom>
+          <a:ln>
+            <a:solidFill>
+              <a:srgbClr val="5A00D2"/>
+            </a:solidFill>
+            <a:tailEnd type="triangle"/>
+          </a:ln>
+        </p:spPr>
+        <p:style>
+          <a:lnRef idx="1">
+            <a:schemeClr val="accent1"/>
+          </a:lnRef>
+          <a:fillRef idx="0">
+            <a:schemeClr val="accent1"/>
+          </a:fillRef>
+          <a:effectRef idx="0">
+            <a:schemeClr val="accent1"/>
+          </a:effectRef>
+          <a:fontRef idx="minor">
+            <a:schemeClr val="tx1"/>
+          </a:fontRef>
+        </p:style>
+      </p:cxnSp>
+      <p:cxnSp>
+        <p:nvCxnSpPr>
+          <p:cNvPr id="94" name="Straight Arrow Connector 47">
+            <a:extLst>
+              <a:ext uri="{FF2B5EF4-FFF2-40B4-BE49-F238E27FC236}">
+                <a16:creationId xmlns:a16="http://schemas.microsoft.com/office/drawing/2014/main" id="{A7892B74-E4D1-57AD-47D2-E32A3D4E5CC7}"/>
+              </a:ext>
+            </a:extLst>
+          </p:cNvPr>
+          <p:cNvCxnSpPr>
+            <a:cxnSpLocks/>
+            <a:stCxn id="8" idx="1"/>
+            <a:endCxn id="68" idx="1"/>
+          </p:cNvCxnSpPr>
+          <p:nvPr/>
+        </p:nvCxnSpPr>
+        <p:spPr>
+          <a:xfrm>
+            <a:off x="4378923" y="1548934"/>
+            <a:ext cx="1385736" cy="2379367"/>
+          </a:xfrm>
+          <a:prstGeom prst="curvedConnector3">
+            <a:avLst>
+              <a:gd name="adj1" fmla="val 50000"/>
+            </a:avLst>
+          </a:prstGeom>
+          <a:ln>
+            <a:solidFill>
+              <a:srgbClr val="5A00D2"/>
+            </a:solidFill>
+            <a:tailEnd type="triangle"/>
+          </a:ln>
+        </p:spPr>
+        <p:style>
+          <a:lnRef idx="1">
+            <a:schemeClr val="accent1"/>
+          </a:lnRef>
+          <a:fillRef idx="0">
+            <a:schemeClr val="accent1"/>
+          </a:fillRef>
+          <a:effectRef idx="0">
+            <a:schemeClr val="accent1"/>
+          </a:effectRef>
+          <a:fontRef idx="minor">
+            <a:schemeClr val="tx1"/>
+          </a:fontRef>
+        </p:style>
+      </p:cxnSp>
+    </p:spTree>
+    <p:extLst>
+      <p:ext uri="{BB962C8B-B14F-4D97-AF65-F5344CB8AC3E}">
+        <p14:creationId xmlns:p14="http://schemas.microsoft.com/office/powerpoint/2010/main" val="771826861"/>
+      </p:ext>
+    </p:extLst>
+  </p:cSld>
+  <p:clrMapOvr>
+    <a:masterClrMapping/>
+  </p:clrMapOvr>
+</p:sld>
+</file>
+
+<file path=ppt/slides/slide2.xml><?xml version="1.0" encoding="utf-8"?>
+<p:sld xmlns:a="http://schemas.openxmlformats.org/drawingml/2006/main" xmlns:r="http://schemas.openxmlformats.org/officeDocument/2006/relationships" xmlns:p="http://schemas.openxmlformats.org/presentationml/2006/main">
+  <p:cSld>
+    <p:spTree>
+      <p:nvGrpSpPr>
+        <p:cNvPr id="1" name="">
+          <a:extLst>
+            <a:ext uri="{FF2B5EF4-FFF2-40B4-BE49-F238E27FC236}">
+              <a16:creationId xmlns:a16="http://schemas.microsoft.com/office/drawing/2014/main" id="{7967CC92-3456-AEB5-0C0D-290279BC9363}"/>
+            </a:ext>
+          </a:extLst>
+        </p:cNvPr>
+        <p:cNvGrpSpPr/>
+        <p:nvPr/>
+      </p:nvGrpSpPr>
+      <p:grpSpPr>
+        <a:xfrm>
+          <a:off x="0" y="0"/>
+          <a:ext cx="0" cy="0"/>
+          <a:chOff x="0" y="0"/>
+          <a:chExt cx="0" cy="0"/>
+        </a:xfrm>
+      </p:grpSpPr>
+      <p:sp>
+        <p:nvSpPr>
+          <p:cNvPr id="3" name="Slide Number Placeholder 2">
+            <a:extLst>
+              <a:ext uri="{FF2B5EF4-FFF2-40B4-BE49-F238E27FC236}">
+                <a16:creationId xmlns:a16="http://schemas.microsoft.com/office/drawing/2014/main" id="{FC606360-962C-D605-0541-2D7BBD93B602}"/>
+              </a:ext>
+            </a:extLst>
+          </p:cNvPr>
+          <p:cNvSpPr>
+            <a:spLocks noGrp="1"/>
+          </p:cNvSpPr>
+          <p:nvPr>
+            <p:ph type="sldNum" sz="quarter" idx="11"/>
+          </p:nvPr>
+        </p:nvSpPr>
+        <p:spPr/>
+        <p:txBody>
+          <a:bodyPr/>
+          <a:lstStyle/>
+          <a:p>
+            <a:fld id="{1F90F471-3972-4120-B8B3-0237DE626C35}" type="slidenum">
+              <a:rPr lang="en-US" smtClean="0"/>
+              <a:pPr/>
+              <a:t>2</a:t>
+            </a:fld>
+            <a:endParaRPr lang="en-US" dirty="0"/>
+          </a:p>
+        </p:txBody>
+      </p:sp>
+      <p:sp>
+        <p:nvSpPr>
+          <p:cNvPr id="4" name="Rounded Rectangle 3">
+            <a:extLst>
+              <a:ext uri="{FF2B5EF4-FFF2-40B4-BE49-F238E27FC236}">
+                <a16:creationId xmlns:a16="http://schemas.microsoft.com/office/drawing/2014/main" id="{439786C1-9477-F057-176B-977CA6E21751}"/>
               </a:ext>
             </a:extLst>
           </p:cNvPr>
@@ -44143,17 +44479,17 @@
         </p:nvSpPr>
         <p:spPr>
           <a:xfrm>
-            <a:off x="2494067" y="6044385"/>
-            <a:ext cx="192024" cy="187452"/>
+            <a:off x="1810646" y="559203"/>
+            <a:ext cx="13089105" cy="1861403"/>
           </a:xfrm>
           <a:prstGeom prst="roundRect">
             <a:avLst/>
           </a:prstGeom>
-          <a:solidFill>
-            <a:srgbClr val="9600FF"/>
-          </a:solidFill>
+          <a:noFill/>
           <a:ln>
-            <a:noFill/>
+            <a:solidFill>
+              <a:schemeClr val="accent1"/>
+            </a:solidFill>
           </a:ln>
         </p:spPr>
         <p:style>
@@ -44177,93 +44513,16 @@
           <a:lstStyle/>
           <a:p>
             <a:pPr algn="ctr"/>
-            <a:endParaRPr lang="en-US"/>
-          </a:p>
-        </p:txBody>
-      </p:sp>
-      <p:sp>
-        <p:nvSpPr>
-          <p:cNvPr id="1124" name="TextBox 1123">
-            <a:extLst>
-              <a:ext uri="{FF2B5EF4-FFF2-40B4-BE49-F238E27FC236}">
-                <a16:creationId xmlns:a16="http://schemas.microsoft.com/office/drawing/2014/main" id="{F78738CE-FA47-DFA9-DDD1-423D1B1A7D0E}"/>
-              </a:ext>
-            </a:extLst>
-          </p:cNvPr>
-          <p:cNvSpPr txBox="1"/>
-          <p:nvPr/>
-        </p:nvSpPr>
-        <p:spPr>
-          <a:xfrm>
-            <a:off x="3117098" y="6281021"/>
-            <a:ext cx="0" cy="0"/>
-          </a:xfrm>
-          <a:prstGeom prst="rect">
-            <a:avLst/>
-          </a:prstGeom>
-          <a:noFill/>
-        </p:spPr>
-        <p:txBody>
-          <a:bodyPr wrap="none" lIns="0" tIns="0" rIns="0" bIns="0" rtlCol="0">
-            <a:noAutofit/>
-          </a:bodyPr>
-          <a:lstStyle/>
-          <a:p>
-            <a:pPr defTabSz="228600">
-              <a:spcAft>
-                <a:spcPts val="1200"/>
-              </a:spcAft>
-            </a:pPr>
-            <a:endParaRPr lang="de-DE" dirty="0"/>
-          </a:p>
-        </p:txBody>
-      </p:sp>
-      <p:sp>
-        <p:nvSpPr>
-          <p:cNvPr id="1125" name="TextBox 1124">
-            <a:extLst>
-              <a:ext uri="{FF2B5EF4-FFF2-40B4-BE49-F238E27FC236}">
-                <a16:creationId xmlns:a16="http://schemas.microsoft.com/office/drawing/2014/main" id="{4117F76A-4108-D397-8897-96890926AFA5}"/>
-              </a:ext>
-            </a:extLst>
-          </p:cNvPr>
-          <p:cNvSpPr txBox="1"/>
-          <p:nvPr/>
-        </p:nvSpPr>
-        <p:spPr>
-          <a:xfrm>
-            <a:off x="2052790" y="5840416"/>
-            <a:ext cx="1666555" cy="197028"/>
-          </a:xfrm>
-          <a:prstGeom prst="rect">
-            <a:avLst/>
-          </a:prstGeom>
-          <a:noFill/>
-        </p:spPr>
-        <p:txBody>
-          <a:bodyPr wrap="none" lIns="0" tIns="0" rIns="0" bIns="0" rtlCol="0">
-            <a:noAutofit/>
-          </a:bodyPr>
-          <a:lstStyle/>
-          <a:p>
-            <a:pPr defTabSz="228600">
-              <a:spcAft>
-                <a:spcPts val="1200"/>
-              </a:spcAft>
-            </a:pPr>
-            <a:r>
-              <a:rPr lang="de-DE" sz="700" dirty="0"/>
-              <a:t>priv.ref.geonames.state.v1</a:t>
-            </a:r>
-          </a:p>
-        </p:txBody>
-      </p:sp>
-      <p:sp>
-        <p:nvSpPr>
-          <p:cNvPr id="1126" name="Rounded Rectangle 1125">
-            <a:extLst>
-              <a:ext uri="{FF2B5EF4-FFF2-40B4-BE49-F238E27FC236}">
-                <a16:creationId xmlns:a16="http://schemas.microsoft.com/office/drawing/2014/main" id="{A33B6668-8A5F-3C72-952F-A0BF9F176A14}"/>
+            <a:endParaRPr lang="en-US" dirty="0"/>
+          </a:p>
+        </p:txBody>
+      </p:sp>
+      <p:sp>
+        <p:nvSpPr>
+          <p:cNvPr id="5" name="Rounded Rectangle 4">
+            <a:extLst>
+              <a:ext uri="{FF2B5EF4-FFF2-40B4-BE49-F238E27FC236}">
+                <a16:creationId xmlns:a16="http://schemas.microsoft.com/office/drawing/2014/main" id="{E16AD95D-937D-BAF1-5D94-9E2CEE6225E1}"/>
               </a:ext>
             </a:extLst>
           </p:cNvPr>
@@ -44272,22 +44531,17 @@
         </p:nvSpPr>
         <p:spPr>
           <a:xfrm>
-            <a:off x="3389806" y="6333005"/>
-            <a:ext cx="793882" cy="229853"/>
+            <a:off x="2174684" y="465346"/>
+            <a:ext cx="983419" cy="187561"/>
           </a:xfrm>
           <a:prstGeom prst="roundRect">
             <a:avLst/>
           </a:prstGeom>
           <a:solidFill>
-            <a:schemeClr val="accent3">
-              <a:lumMod val="60000"/>
-              <a:lumOff val="40000"/>
-            </a:schemeClr>
+            <a:srgbClr val="EB55F5"/>
           </a:solidFill>
           <a:ln>
-            <a:solidFill>
-              <a:schemeClr val="accent1"/>
-            </a:solidFill>
+            <a:noFill/>
           </a:ln>
         </p:spPr>
         <p:style>
@@ -44307,23 +44561,2660 @@
           </a:fontRef>
         </p:style>
         <p:txBody>
+          <a:bodyPr lIns="0" rIns="0" rtlCol="0" anchor="ctr"/>
+          <a:lstStyle/>
+          <a:p>
+            <a:pPr algn="ctr"/>
+            <a:r>
+              <a:rPr lang="en-US" sz="800" b="1" dirty="0">
+                <a:solidFill>
+                  <a:schemeClr val="bg1"/>
+                </a:solidFill>
+              </a:rPr>
+              <a:t>Customer</a:t>
+            </a:r>
+          </a:p>
+        </p:txBody>
+      </p:sp>
+      <p:sp>
+        <p:nvSpPr>
+          <p:cNvPr id="6" name="Rounded Rectangle 5">
+            <a:extLst>
+              <a:ext uri="{FF2B5EF4-FFF2-40B4-BE49-F238E27FC236}">
+                <a16:creationId xmlns:a16="http://schemas.microsoft.com/office/drawing/2014/main" id="{500D1D55-EB7C-A739-6461-DB4145AFE3BA}"/>
+              </a:ext>
+            </a:extLst>
+          </p:cNvPr>
+          <p:cNvSpPr/>
+          <p:nvPr/>
+        </p:nvSpPr>
+        <p:spPr>
+          <a:xfrm>
+            <a:off x="202830" y="3781528"/>
+            <a:ext cx="657895" cy="282935"/>
+          </a:xfrm>
+          <a:prstGeom prst="roundRect">
+            <a:avLst/>
+          </a:prstGeom>
+          <a:solidFill>
+            <a:schemeClr val="accent3">
+              <a:lumMod val="60000"/>
+              <a:lumOff val="40000"/>
+            </a:schemeClr>
+          </a:solidFill>
+          <a:ln>
+            <a:solidFill>
+              <a:schemeClr val="accent1"/>
+            </a:solidFill>
+          </a:ln>
+        </p:spPr>
+        <p:style>
+          <a:lnRef idx="2">
+            <a:schemeClr val="accent1">
+              <a:shade val="50000"/>
+            </a:schemeClr>
+          </a:lnRef>
+          <a:fillRef idx="1">
+            <a:schemeClr val="accent1"/>
+          </a:fillRef>
+          <a:effectRef idx="0">
+            <a:schemeClr val="accent1"/>
+          </a:effectRef>
+          <a:fontRef idx="minor">
+            <a:schemeClr val="lt1"/>
+          </a:fontRef>
+        </p:style>
+        <p:txBody>
+          <a:bodyPr rtlCol="0" anchor="ctr"/>
+          <a:lstStyle/>
+          <a:p>
+            <a:pPr algn="ctr"/>
+            <a:r>
+              <a:rPr lang="en-US" sz="700" b="1" dirty="0"/>
+              <a:t>Simulator</a:t>
+            </a:r>
+            <a:endParaRPr lang="en-US" sz="800" b="1" dirty="0"/>
+          </a:p>
+        </p:txBody>
+      </p:sp>
+      <p:sp>
+        <p:nvSpPr>
+          <p:cNvPr id="7" name="Rounded Rectangle 6">
+            <a:extLst>
+              <a:ext uri="{FF2B5EF4-FFF2-40B4-BE49-F238E27FC236}">
+                <a16:creationId xmlns:a16="http://schemas.microsoft.com/office/drawing/2014/main" id="{144D2403-8F8E-09CF-5974-5859AE25B55D}"/>
+              </a:ext>
+            </a:extLst>
+          </p:cNvPr>
+          <p:cNvSpPr/>
+          <p:nvPr/>
+        </p:nvSpPr>
+        <p:spPr>
+          <a:xfrm>
+            <a:off x="2248660" y="1190492"/>
+            <a:ext cx="835470" cy="238814"/>
+          </a:xfrm>
+          <a:prstGeom prst="roundRect">
+            <a:avLst/>
+          </a:prstGeom>
+          <a:solidFill>
+            <a:schemeClr val="accent3">
+              <a:lumMod val="60000"/>
+              <a:lumOff val="40000"/>
+            </a:schemeClr>
+          </a:solidFill>
+          <a:ln>
+            <a:solidFill>
+              <a:schemeClr val="accent1"/>
+            </a:solidFill>
+          </a:ln>
+        </p:spPr>
+        <p:style>
+          <a:lnRef idx="2">
+            <a:schemeClr val="accent1">
+              <a:shade val="50000"/>
+            </a:schemeClr>
+          </a:lnRef>
+          <a:fillRef idx="1">
+            <a:schemeClr val="accent1"/>
+          </a:fillRef>
+          <a:effectRef idx="0">
+            <a:schemeClr val="accent1"/>
+          </a:effectRef>
+          <a:fontRef idx="minor">
+            <a:schemeClr val="lt1"/>
+          </a:fontRef>
+        </p:style>
+        <p:txBody>
+          <a:bodyPr rtlCol="0" anchor="ctr"/>
+          <a:lstStyle/>
+          <a:p>
+            <a:pPr algn="ctr"/>
+            <a:r>
+              <a:rPr lang="en-US" sz="700" b="1" dirty="0"/>
+              <a:t>Cardholder App</a:t>
+            </a:r>
+          </a:p>
+        </p:txBody>
+      </p:sp>
+      <p:sp>
+        <p:nvSpPr>
+          <p:cNvPr id="8" name="Can 7">
+            <a:extLst>
+              <a:ext uri="{FF2B5EF4-FFF2-40B4-BE49-F238E27FC236}">
+                <a16:creationId xmlns:a16="http://schemas.microsoft.com/office/drawing/2014/main" id="{B61AAD07-E312-2517-77F8-815E3D712B52}"/>
+              </a:ext>
+            </a:extLst>
+          </p:cNvPr>
+          <p:cNvSpPr/>
+          <p:nvPr/>
+        </p:nvSpPr>
+        <p:spPr>
+          <a:xfrm rot="5400000">
+            <a:off x="3765922" y="1091267"/>
+            <a:ext cx="310669" cy="915333"/>
+          </a:xfrm>
+          <a:prstGeom prst="can">
+            <a:avLst/>
+          </a:prstGeom>
+          <a:solidFill>
+            <a:schemeClr val="bg1">
+              <a:lumMod val="85000"/>
+            </a:schemeClr>
+          </a:solidFill>
+          <a:ln>
+            <a:solidFill>
+              <a:schemeClr val="bg1"/>
+            </a:solidFill>
+          </a:ln>
+        </p:spPr>
+        <p:style>
+          <a:lnRef idx="2">
+            <a:schemeClr val="accent1">
+              <a:shade val="50000"/>
+            </a:schemeClr>
+          </a:lnRef>
+          <a:fillRef idx="1">
+            <a:schemeClr val="accent1"/>
+          </a:fillRef>
+          <a:effectRef idx="0">
+            <a:schemeClr val="accent1"/>
+          </a:effectRef>
+          <a:fontRef idx="minor">
+            <a:schemeClr val="lt1"/>
+          </a:fontRef>
+        </p:style>
+        <p:txBody>
+          <a:bodyPr rtlCol="0" anchor="ctr"/>
+          <a:lstStyle/>
+          <a:p>
+            <a:pPr algn="ctr"/>
+            <a:endParaRPr lang="en-US" dirty="0">
+              <a:solidFill>
+                <a:srgbClr val="5A00D2"/>
+              </a:solidFill>
+            </a:endParaRPr>
+          </a:p>
+        </p:txBody>
+      </p:sp>
+      <p:cxnSp>
+        <p:nvCxnSpPr>
+          <p:cNvPr id="9" name="Straight Arrow Connector 47">
+            <a:extLst>
+              <a:ext uri="{FF2B5EF4-FFF2-40B4-BE49-F238E27FC236}">
+                <a16:creationId xmlns:a16="http://schemas.microsoft.com/office/drawing/2014/main" id="{F5D99EE7-4580-3C91-5FF5-75F75332AB45}"/>
+              </a:ext>
+            </a:extLst>
+          </p:cNvPr>
+          <p:cNvCxnSpPr>
+            <a:cxnSpLocks/>
+            <a:stCxn id="6" idx="3"/>
+            <a:endCxn id="32" idx="0"/>
+          </p:cNvCxnSpPr>
+          <p:nvPr/>
+        </p:nvCxnSpPr>
+        <p:spPr>
+          <a:xfrm flipV="1">
+            <a:off x="860725" y="1306595"/>
+            <a:ext cx="849626" cy="2616401"/>
+          </a:xfrm>
+          <a:prstGeom prst="curvedConnector3">
+            <a:avLst>
+              <a:gd name="adj1" fmla="val 50000"/>
+            </a:avLst>
+          </a:prstGeom>
+          <a:ln>
+            <a:solidFill>
+              <a:srgbClr val="5A00D2"/>
+            </a:solidFill>
+            <a:tailEnd type="triangle"/>
+          </a:ln>
+        </p:spPr>
+        <p:style>
+          <a:lnRef idx="1">
+            <a:schemeClr val="accent1"/>
+          </a:lnRef>
+          <a:fillRef idx="0">
+            <a:schemeClr val="accent1"/>
+          </a:fillRef>
+          <a:effectRef idx="0">
+            <a:schemeClr val="accent1"/>
+          </a:effectRef>
+          <a:fontRef idx="minor">
+            <a:schemeClr val="tx1"/>
+          </a:fontRef>
+        </p:style>
+      </p:cxnSp>
+      <p:sp>
+        <p:nvSpPr>
+          <p:cNvPr id="11" name="Rounded Rectangle 10">
+            <a:extLst>
+              <a:ext uri="{FF2B5EF4-FFF2-40B4-BE49-F238E27FC236}">
+                <a16:creationId xmlns:a16="http://schemas.microsoft.com/office/drawing/2014/main" id="{095FA188-7AAC-A440-C504-868A47773860}"/>
+              </a:ext>
+            </a:extLst>
+          </p:cNvPr>
+          <p:cNvSpPr/>
+          <p:nvPr/>
+        </p:nvSpPr>
+        <p:spPr>
+          <a:xfrm>
+            <a:off x="3597069" y="1461724"/>
+            <a:ext cx="192024" cy="187452"/>
+          </a:xfrm>
+          <a:prstGeom prst="roundRect">
+            <a:avLst/>
+          </a:prstGeom>
+          <a:solidFill>
+            <a:srgbClr val="9600FF"/>
+          </a:solidFill>
+          <a:ln>
+            <a:noFill/>
+          </a:ln>
+        </p:spPr>
+        <p:style>
+          <a:lnRef idx="2">
+            <a:schemeClr val="accent1">
+              <a:shade val="50000"/>
+            </a:schemeClr>
+          </a:lnRef>
+          <a:fillRef idx="1">
+            <a:schemeClr val="accent1"/>
+          </a:fillRef>
+          <a:effectRef idx="0">
+            <a:schemeClr val="accent1"/>
+          </a:effectRef>
+          <a:fontRef idx="minor">
+            <a:schemeClr val="lt1"/>
+          </a:fontRef>
+        </p:style>
+        <p:txBody>
+          <a:bodyPr rtlCol="0" anchor="ctr"/>
+          <a:lstStyle/>
+          <a:p>
+            <a:pPr algn="ctr"/>
+            <a:endParaRPr lang="en-US"/>
+          </a:p>
+        </p:txBody>
+      </p:sp>
+      <p:sp>
+        <p:nvSpPr>
+          <p:cNvPr id="12" name="Rounded Rectangle 11">
+            <a:extLst>
+              <a:ext uri="{FF2B5EF4-FFF2-40B4-BE49-F238E27FC236}">
+                <a16:creationId xmlns:a16="http://schemas.microsoft.com/office/drawing/2014/main" id="{E3D001A8-FE4A-CCD3-52C8-24787D2188EC}"/>
+              </a:ext>
+            </a:extLst>
+          </p:cNvPr>
+          <p:cNvSpPr/>
+          <p:nvPr/>
+        </p:nvSpPr>
+        <p:spPr>
+          <a:xfrm>
+            <a:off x="3854565" y="1461724"/>
+            <a:ext cx="192024" cy="187452"/>
+          </a:xfrm>
+          <a:prstGeom prst="roundRect">
+            <a:avLst/>
+          </a:prstGeom>
+          <a:solidFill>
+            <a:srgbClr val="9600FF"/>
+          </a:solidFill>
+          <a:ln>
+            <a:noFill/>
+          </a:ln>
+        </p:spPr>
+        <p:style>
+          <a:lnRef idx="2">
+            <a:schemeClr val="accent1">
+              <a:shade val="50000"/>
+            </a:schemeClr>
+          </a:lnRef>
+          <a:fillRef idx="1">
+            <a:schemeClr val="accent1"/>
+          </a:fillRef>
+          <a:effectRef idx="0">
+            <a:schemeClr val="accent1"/>
+          </a:effectRef>
+          <a:fontRef idx="minor">
+            <a:schemeClr val="lt1"/>
+          </a:fontRef>
+        </p:style>
+        <p:txBody>
+          <a:bodyPr rtlCol="0" anchor="ctr"/>
+          <a:lstStyle/>
+          <a:p>
+            <a:pPr algn="ctr"/>
+            <a:endParaRPr lang="en-US"/>
+          </a:p>
+        </p:txBody>
+      </p:sp>
+      <p:sp>
+        <p:nvSpPr>
+          <p:cNvPr id="18" name="TextBox 17">
+            <a:extLst>
+              <a:ext uri="{FF2B5EF4-FFF2-40B4-BE49-F238E27FC236}">
+                <a16:creationId xmlns:a16="http://schemas.microsoft.com/office/drawing/2014/main" id="{DA4AB673-7EFE-2FD8-867E-1E1A027C87FD}"/>
+              </a:ext>
+            </a:extLst>
+          </p:cNvPr>
+          <p:cNvSpPr txBox="1"/>
+          <p:nvPr/>
+        </p:nvSpPr>
+        <p:spPr>
+          <a:xfrm>
+            <a:off x="4477596" y="1698360"/>
+            <a:ext cx="0" cy="0"/>
+          </a:xfrm>
+          <a:prstGeom prst="rect">
+            <a:avLst/>
+          </a:prstGeom>
+          <a:noFill/>
+        </p:spPr>
+        <p:txBody>
+          <a:bodyPr wrap="none" lIns="0" tIns="0" rIns="0" bIns="0" rtlCol="0">
+            <a:noAutofit/>
+          </a:bodyPr>
+          <a:lstStyle/>
+          <a:p>
+            <a:pPr defTabSz="228600">
+              <a:spcAft>
+                <a:spcPts val="1200"/>
+              </a:spcAft>
+            </a:pPr>
+            <a:endParaRPr lang="de-DE" dirty="0"/>
+          </a:p>
+        </p:txBody>
+      </p:sp>
+      <p:sp>
+        <p:nvSpPr>
+          <p:cNvPr id="19" name="Can 18">
+            <a:extLst>
+              <a:ext uri="{FF2B5EF4-FFF2-40B4-BE49-F238E27FC236}">
+                <a16:creationId xmlns:a16="http://schemas.microsoft.com/office/drawing/2014/main" id="{29AB2726-78CB-19A6-4A45-C50640A92781}"/>
+              </a:ext>
+            </a:extLst>
+          </p:cNvPr>
+          <p:cNvSpPr/>
+          <p:nvPr/>
+        </p:nvSpPr>
+        <p:spPr>
+          <a:xfrm>
+            <a:off x="2328352" y="1752819"/>
+            <a:ext cx="676093" cy="253790"/>
+          </a:xfrm>
+          <a:prstGeom prst="can">
+            <a:avLst/>
+          </a:prstGeom>
+          <a:solidFill>
+            <a:schemeClr val="accent2"/>
+          </a:solidFill>
+          <a:ln>
+            <a:noFill/>
+          </a:ln>
+        </p:spPr>
+        <p:style>
+          <a:lnRef idx="2">
+            <a:schemeClr val="accent1">
+              <a:shade val="50000"/>
+            </a:schemeClr>
+          </a:lnRef>
+          <a:fillRef idx="1">
+            <a:schemeClr val="accent1"/>
+          </a:fillRef>
+          <a:effectRef idx="0">
+            <a:schemeClr val="accent1"/>
+          </a:effectRef>
+          <a:fontRef idx="minor">
+            <a:schemeClr val="lt1"/>
+          </a:fontRef>
+        </p:style>
+        <p:txBody>
+          <a:bodyPr tIns="91440" bIns="91440" rtlCol="0" anchor="ctr"/>
+          <a:lstStyle/>
+          <a:p>
+            <a:pPr algn="ctr"/>
+            <a:r>
+              <a:rPr lang="en-GB" sz="700" b="1" dirty="0"/>
+              <a:t>RDBMS</a:t>
+            </a:r>
+            <a:endParaRPr lang="en-GB" sz="800" b="1" dirty="0"/>
+          </a:p>
+        </p:txBody>
+      </p:sp>
+      <p:cxnSp>
+        <p:nvCxnSpPr>
+          <p:cNvPr id="20" name="Straight Arrow Connector 47">
+            <a:extLst>
+              <a:ext uri="{FF2B5EF4-FFF2-40B4-BE49-F238E27FC236}">
+                <a16:creationId xmlns:a16="http://schemas.microsoft.com/office/drawing/2014/main" id="{490B6275-2A77-7EB5-7489-D2347912FEC3}"/>
+              </a:ext>
+            </a:extLst>
+          </p:cNvPr>
+          <p:cNvCxnSpPr>
+            <a:cxnSpLocks/>
+            <a:stCxn id="7" idx="2"/>
+            <a:endCxn id="19" idx="1"/>
+          </p:cNvCxnSpPr>
+          <p:nvPr/>
+        </p:nvCxnSpPr>
+        <p:spPr>
+          <a:xfrm rot="16200000" flipH="1">
+            <a:off x="2504641" y="1591060"/>
+            <a:ext cx="323513" cy="4"/>
+          </a:xfrm>
+          <a:prstGeom prst="curvedConnector3">
+            <a:avLst>
+              <a:gd name="adj1" fmla="val 50000"/>
+            </a:avLst>
+          </a:prstGeom>
+          <a:ln>
+            <a:solidFill>
+              <a:srgbClr val="5A00D2"/>
+            </a:solidFill>
+            <a:tailEnd type="triangle"/>
+          </a:ln>
+        </p:spPr>
+        <p:style>
+          <a:lnRef idx="1">
+            <a:schemeClr val="accent1"/>
+          </a:lnRef>
+          <a:fillRef idx="0">
+            <a:schemeClr val="accent1"/>
+          </a:fillRef>
+          <a:effectRef idx="0">
+            <a:schemeClr val="accent1"/>
+          </a:effectRef>
+          <a:fontRef idx="minor">
+            <a:schemeClr val="tx1"/>
+          </a:fontRef>
+        </p:style>
+      </p:cxnSp>
+      <p:cxnSp>
+        <p:nvCxnSpPr>
+          <p:cNvPr id="23" name="Straight Arrow Connector 47">
+            <a:extLst>
+              <a:ext uri="{FF2B5EF4-FFF2-40B4-BE49-F238E27FC236}">
+                <a16:creationId xmlns:a16="http://schemas.microsoft.com/office/drawing/2014/main" id="{EE3353DB-124E-A026-D344-795DCE4B5F29}"/>
+              </a:ext>
+            </a:extLst>
+          </p:cNvPr>
+          <p:cNvCxnSpPr>
+            <a:cxnSpLocks/>
+            <a:stCxn id="7" idx="2"/>
+            <a:endCxn id="8" idx="3"/>
+          </p:cNvCxnSpPr>
+          <p:nvPr/>
+        </p:nvCxnSpPr>
+        <p:spPr>
+          <a:xfrm rot="16200000" flipH="1">
+            <a:off x="3005178" y="1090522"/>
+            <a:ext cx="119628" cy="797195"/>
+          </a:xfrm>
+          <a:prstGeom prst="curvedConnector2">
+            <a:avLst/>
+          </a:prstGeom>
+          <a:ln>
+            <a:solidFill>
+              <a:srgbClr val="5A00D2"/>
+            </a:solidFill>
+            <a:tailEnd type="triangle"/>
+          </a:ln>
+        </p:spPr>
+        <p:style>
+          <a:lnRef idx="1">
+            <a:schemeClr val="accent1"/>
+          </a:lnRef>
+          <a:fillRef idx="0">
+            <a:schemeClr val="accent1"/>
+          </a:fillRef>
+          <a:effectRef idx="0">
+            <a:schemeClr val="accent1"/>
+          </a:effectRef>
+          <a:fontRef idx="minor">
+            <a:schemeClr val="tx1"/>
+          </a:fontRef>
+        </p:style>
+      </p:cxnSp>
+      <p:sp>
+        <p:nvSpPr>
+          <p:cNvPr id="32" name="Rounded Rectangle 31">
+            <a:extLst>
+              <a:ext uri="{FF2B5EF4-FFF2-40B4-BE49-F238E27FC236}">
+                <a16:creationId xmlns:a16="http://schemas.microsoft.com/office/drawing/2014/main" id="{73540170-F0F0-384A-20E5-48F6731C461B}"/>
+              </a:ext>
+            </a:extLst>
+          </p:cNvPr>
+          <p:cNvSpPr/>
+          <p:nvPr/>
+        </p:nvSpPr>
+        <p:spPr>
+          <a:xfrm rot="16200000">
+            <a:off x="1514050" y="1196422"/>
+            <a:ext cx="612947" cy="220346"/>
+          </a:xfrm>
+          <a:prstGeom prst="roundRect">
+            <a:avLst/>
+          </a:prstGeom>
+          <a:solidFill>
+            <a:schemeClr val="accent3">
+              <a:lumMod val="60000"/>
+              <a:lumOff val="40000"/>
+            </a:schemeClr>
+          </a:solidFill>
+          <a:ln>
+            <a:solidFill>
+              <a:schemeClr val="accent1"/>
+            </a:solidFill>
+          </a:ln>
+        </p:spPr>
+        <p:style>
+          <a:lnRef idx="2">
+            <a:schemeClr val="accent1">
+              <a:shade val="50000"/>
+            </a:schemeClr>
+          </a:lnRef>
+          <a:fillRef idx="1">
+            <a:schemeClr val="accent1"/>
+          </a:fillRef>
+          <a:effectRef idx="0">
+            <a:schemeClr val="accent1"/>
+          </a:effectRef>
+          <a:fontRef idx="minor">
+            <a:schemeClr val="lt1"/>
+          </a:fontRef>
+        </p:style>
+        <p:txBody>
+          <a:bodyPr rtlCol="0" anchor="ctr"/>
+          <a:lstStyle/>
+          <a:p>
+            <a:pPr algn="ctr"/>
+            <a:r>
+              <a:rPr lang="en-US" sz="700" b="1" dirty="0"/>
+              <a:t>API</a:t>
+            </a:r>
+            <a:endParaRPr lang="en-US" sz="800" b="1" dirty="0"/>
+          </a:p>
+        </p:txBody>
+      </p:sp>
+      <p:cxnSp>
+        <p:nvCxnSpPr>
+          <p:cNvPr id="36" name="Straight Arrow Connector 47">
+            <a:extLst>
+              <a:ext uri="{FF2B5EF4-FFF2-40B4-BE49-F238E27FC236}">
+                <a16:creationId xmlns:a16="http://schemas.microsoft.com/office/drawing/2014/main" id="{90B70F3B-44C6-FE2D-B1E1-DF295B042540}"/>
+              </a:ext>
+            </a:extLst>
+          </p:cNvPr>
+          <p:cNvCxnSpPr>
+            <a:cxnSpLocks/>
+            <a:stCxn id="32" idx="2"/>
+            <a:endCxn id="7" idx="1"/>
+          </p:cNvCxnSpPr>
+          <p:nvPr/>
+        </p:nvCxnSpPr>
+        <p:spPr>
+          <a:xfrm>
+            <a:off x="1930697" y="1306595"/>
+            <a:ext cx="317963" cy="3304"/>
+          </a:xfrm>
+          <a:prstGeom prst="curvedConnector3">
+            <a:avLst>
+              <a:gd name="adj1" fmla="val 50000"/>
+            </a:avLst>
+          </a:prstGeom>
+          <a:ln>
+            <a:solidFill>
+              <a:srgbClr val="5A00D2"/>
+            </a:solidFill>
+            <a:tailEnd type="triangle"/>
+          </a:ln>
+        </p:spPr>
+        <p:style>
+          <a:lnRef idx="1">
+            <a:schemeClr val="accent1"/>
+          </a:lnRef>
+          <a:fillRef idx="0">
+            <a:schemeClr val="accent1"/>
+          </a:fillRef>
+          <a:effectRef idx="0">
+            <a:schemeClr val="accent1"/>
+          </a:effectRef>
+          <a:fontRef idx="minor">
+            <a:schemeClr val="tx1"/>
+          </a:fontRef>
+        </p:style>
+      </p:cxnSp>
+      <p:sp>
+        <p:nvSpPr>
+          <p:cNvPr id="40" name="Can 39">
+            <a:extLst>
+              <a:ext uri="{FF2B5EF4-FFF2-40B4-BE49-F238E27FC236}">
+                <a16:creationId xmlns:a16="http://schemas.microsoft.com/office/drawing/2014/main" id="{9CA1F7C0-C596-3A50-BE3F-6AB27399626D}"/>
+              </a:ext>
+            </a:extLst>
+          </p:cNvPr>
+          <p:cNvSpPr/>
+          <p:nvPr/>
+        </p:nvSpPr>
+        <p:spPr>
+          <a:xfrm rot="5400000">
+            <a:off x="2391444" y="3465329"/>
+            <a:ext cx="310669" cy="915333"/>
+          </a:xfrm>
+          <a:prstGeom prst="can">
+            <a:avLst/>
+          </a:prstGeom>
+          <a:solidFill>
+            <a:schemeClr val="bg1">
+              <a:lumMod val="85000"/>
+            </a:schemeClr>
+          </a:solidFill>
+          <a:ln>
+            <a:solidFill>
+              <a:schemeClr val="bg1"/>
+            </a:solidFill>
+          </a:ln>
+        </p:spPr>
+        <p:style>
+          <a:lnRef idx="2">
+            <a:schemeClr val="accent1">
+              <a:shade val="50000"/>
+            </a:schemeClr>
+          </a:lnRef>
+          <a:fillRef idx="1">
+            <a:schemeClr val="accent1"/>
+          </a:fillRef>
+          <a:effectRef idx="0">
+            <a:schemeClr val="accent1"/>
+          </a:effectRef>
+          <a:fontRef idx="minor">
+            <a:schemeClr val="lt1"/>
+          </a:fontRef>
+        </p:style>
+        <p:txBody>
+          <a:bodyPr rtlCol="0" anchor="ctr"/>
+          <a:lstStyle/>
+          <a:p>
+            <a:pPr algn="ctr"/>
+            <a:endParaRPr lang="en-US">
+              <a:solidFill>
+                <a:srgbClr val="5A00D2"/>
+              </a:solidFill>
+            </a:endParaRPr>
+          </a:p>
+        </p:txBody>
+      </p:sp>
+      <p:sp>
+        <p:nvSpPr>
+          <p:cNvPr id="41" name="Rounded Rectangle 40">
+            <a:extLst>
+              <a:ext uri="{FF2B5EF4-FFF2-40B4-BE49-F238E27FC236}">
+                <a16:creationId xmlns:a16="http://schemas.microsoft.com/office/drawing/2014/main" id="{563AF11E-6BBF-526F-D153-7775E6A0E420}"/>
+              </a:ext>
+            </a:extLst>
+          </p:cNvPr>
+          <p:cNvSpPr/>
+          <p:nvPr/>
+        </p:nvSpPr>
+        <p:spPr>
+          <a:xfrm>
+            <a:off x="2222591" y="3835786"/>
+            <a:ext cx="192024" cy="187452"/>
+          </a:xfrm>
+          <a:prstGeom prst="roundRect">
+            <a:avLst/>
+          </a:prstGeom>
+          <a:solidFill>
+            <a:srgbClr val="9600FF"/>
+          </a:solidFill>
+          <a:ln>
+            <a:noFill/>
+          </a:ln>
+        </p:spPr>
+        <p:style>
+          <a:lnRef idx="2">
+            <a:schemeClr val="accent1">
+              <a:shade val="50000"/>
+            </a:schemeClr>
+          </a:lnRef>
+          <a:fillRef idx="1">
+            <a:schemeClr val="accent1"/>
+          </a:fillRef>
+          <a:effectRef idx="0">
+            <a:schemeClr val="accent1"/>
+          </a:effectRef>
+          <a:fontRef idx="minor">
+            <a:schemeClr val="lt1"/>
+          </a:fontRef>
+        </p:style>
+        <p:txBody>
+          <a:bodyPr rtlCol="0" anchor="ctr"/>
+          <a:lstStyle/>
+          <a:p>
+            <a:pPr algn="ctr"/>
+            <a:endParaRPr lang="en-US"/>
+          </a:p>
+        </p:txBody>
+      </p:sp>
+      <p:sp>
+        <p:nvSpPr>
+          <p:cNvPr id="42" name="Rounded Rectangle 41">
+            <a:extLst>
+              <a:ext uri="{FF2B5EF4-FFF2-40B4-BE49-F238E27FC236}">
+                <a16:creationId xmlns:a16="http://schemas.microsoft.com/office/drawing/2014/main" id="{1298261E-1835-166A-A5B6-4803A1CD0E56}"/>
+              </a:ext>
+            </a:extLst>
+          </p:cNvPr>
+          <p:cNvSpPr/>
+          <p:nvPr/>
+        </p:nvSpPr>
+        <p:spPr>
+          <a:xfrm>
+            <a:off x="2480087" y="3835786"/>
+            <a:ext cx="192024" cy="187452"/>
+          </a:xfrm>
+          <a:prstGeom prst="roundRect">
+            <a:avLst/>
+          </a:prstGeom>
+          <a:solidFill>
+            <a:srgbClr val="9600FF"/>
+          </a:solidFill>
+          <a:ln>
+            <a:noFill/>
+          </a:ln>
+        </p:spPr>
+        <p:style>
+          <a:lnRef idx="2">
+            <a:schemeClr val="accent1">
+              <a:shade val="50000"/>
+            </a:schemeClr>
+          </a:lnRef>
+          <a:fillRef idx="1">
+            <a:schemeClr val="accent1"/>
+          </a:fillRef>
+          <a:effectRef idx="0">
+            <a:schemeClr val="accent1"/>
+          </a:effectRef>
+          <a:fontRef idx="minor">
+            <a:schemeClr val="lt1"/>
+          </a:fontRef>
+        </p:style>
+        <p:txBody>
+          <a:bodyPr rtlCol="0" anchor="ctr"/>
+          <a:lstStyle/>
+          <a:p>
+            <a:pPr algn="ctr"/>
+            <a:endParaRPr lang="en-US"/>
+          </a:p>
+        </p:txBody>
+      </p:sp>
+      <p:sp>
+        <p:nvSpPr>
+          <p:cNvPr id="43" name="TextBox 42">
+            <a:extLst>
+              <a:ext uri="{FF2B5EF4-FFF2-40B4-BE49-F238E27FC236}">
+                <a16:creationId xmlns:a16="http://schemas.microsoft.com/office/drawing/2014/main" id="{A97E4E1D-EBF0-3732-ED0A-E5099048C59C}"/>
+              </a:ext>
+            </a:extLst>
+          </p:cNvPr>
+          <p:cNvSpPr txBox="1"/>
+          <p:nvPr/>
+        </p:nvSpPr>
+        <p:spPr>
+          <a:xfrm>
+            <a:off x="3103118" y="4072422"/>
+            <a:ext cx="0" cy="0"/>
+          </a:xfrm>
+          <a:prstGeom prst="rect">
+            <a:avLst/>
+          </a:prstGeom>
+          <a:noFill/>
+        </p:spPr>
+        <p:txBody>
+          <a:bodyPr wrap="none" lIns="0" tIns="0" rIns="0" bIns="0" rtlCol="0">
+            <a:noAutofit/>
+          </a:bodyPr>
+          <a:lstStyle/>
+          <a:p>
+            <a:pPr defTabSz="228600">
+              <a:spcAft>
+                <a:spcPts val="1200"/>
+              </a:spcAft>
+            </a:pPr>
+            <a:endParaRPr lang="de-DE" dirty="0"/>
+          </a:p>
+        </p:txBody>
+      </p:sp>
+      <p:sp>
+        <p:nvSpPr>
+          <p:cNvPr id="44" name="Rounded Rectangle 43">
+            <a:extLst>
+              <a:ext uri="{FF2B5EF4-FFF2-40B4-BE49-F238E27FC236}">
+                <a16:creationId xmlns:a16="http://schemas.microsoft.com/office/drawing/2014/main" id="{167E1B63-AC79-D94B-1740-E18323AD838D}"/>
+              </a:ext>
+            </a:extLst>
+          </p:cNvPr>
+          <p:cNvSpPr/>
+          <p:nvPr/>
+        </p:nvSpPr>
+        <p:spPr>
+          <a:xfrm>
+            <a:off x="3412698" y="3820074"/>
+            <a:ext cx="659078" cy="206150"/>
+          </a:xfrm>
+          <a:prstGeom prst="roundRect">
+            <a:avLst/>
+          </a:prstGeom>
+          <a:solidFill>
+            <a:schemeClr val="accent3">
+              <a:lumMod val="60000"/>
+              <a:lumOff val="40000"/>
+            </a:schemeClr>
+          </a:solidFill>
+          <a:ln>
+            <a:solidFill>
+              <a:schemeClr val="accent1"/>
+            </a:solidFill>
+          </a:ln>
+        </p:spPr>
+        <p:style>
+          <a:lnRef idx="2">
+            <a:schemeClr val="accent1">
+              <a:shade val="50000"/>
+            </a:schemeClr>
+          </a:lnRef>
+          <a:fillRef idx="1">
+            <a:schemeClr val="accent1"/>
+          </a:fillRef>
+          <a:effectRef idx="0">
+            <a:schemeClr val="accent1"/>
+          </a:effectRef>
+          <a:fontRef idx="minor">
+            <a:schemeClr val="lt1"/>
+          </a:fontRef>
+        </p:style>
+        <p:txBody>
+          <a:bodyPr rtlCol="0" anchor="ctr"/>
+          <a:lstStyle/>
+          <a:p>
+            <a:pPr algn="ctr"/>
+            <a:r>
+              <a:rPr lang="en-US" sz="700" b="1" dirty="0"/>
+              <a:t>Flagger</a:t>
+            </a:r>
+          </a:p>
+        </p:txBody>
+      </p:sp>
+      <p:sp>
+        <p:nvSpPr>
+          <p:cNvPr id="45" name="TextBox 44">
+            <a:extLst>
+              <a:ext uri="{FF2B5EF4-FFF2-40B4-BE49-F238E27FC236}">
+                <a16:creationId xmlns:a16="http://schemas.microsoft.com/office/drawing/2014/main" id="{AD9A3B56-A1BD-1A6C-E84E-E0B5D4F2AAEB}"/>
+              </a:ext>
+            </a:extLst>
+          </p:cNvPr>
+          <p:cNvSpPr txBox="1"/>
+          <p:nvPr/>
+        </p:nvSpPr>
+        <p:spPr>
+          <a:xfrm>
+            <a:off x="3533371" y="1242091"/>
+            <a:ext cx="1666555" cy="197028"/>
+          </a:xfrm>
+          <a:prstGeom prst="rect">
+            <a:avLst/>
+          </a:prstGeom>
+          <a:noFill/>
+        </p:spPr>
+        <p:txBody>
+          <a:bodyPr wrap="none" lIns="0" tIns="0" rIns="0" bIns="0" rtlCol="0">
+            <a:noAutofit/>
+          </a:bodyPr>
+          <a:lstStyle/>
+          <a:p>
+            <a:pPr defTabSz="228600">
+              <a:spcAft>
+                <a:spcPts val="1200"/>
+              </a:spcAft>
+            </a:pPr>
+            <a:r>
+              <a:rPr lang="de-DE" sz="700" dirty="0"/>
+              <a:t>pub.cust.cardholder.state.v1</a:t>
+            </a:r>
+          </a:p>
+        </p:txBody>
+      </p:sp>
+      <p:sp>
+        <p:nvSpPr>
+          <p:cNvPr id="46" name="TextBox 45">
+            <a:extLst>
+              <a:ext uri="{FF2B5EF4-FFF2-40B4-BE49-F238E27FC236}">
+                <a16:creationId xmlns:a16="http://schemas.microsoft.com/office/drawing/2014/main" id="{3ECAC6CC-D528-C811-0C7D-7AC3A30D6692}"/>
+              </a:ext>
+            </a:extLst>
+          </p:cNvPr>
+          <p:cNvSpPr txBox="1"/>
+          <p:nvPr/>
+        </p:nvSpPr>
+        <p:spPr>
+          <a:xfrm>
+            <a:off x="2052791" y="3600757"/>
+            <a:ext cx="1666555" cy="197028"/>
+          </a:xfrm>
+          <a:prstGeom prst="rect">
+            <a:avLst/>
+          </a:prstGeom>
+          <a:noFill/>
+        </p:spPr>
+        <p:txBody>
+          <a:bodyPr wrap="none" lIns="0" tIns="0" rIns="0" bIns="0" rtlCol="0">
+            <a:noAutofit/>
+          </a:bodyPr>
+          <a:lstStyle/>
+          <a:p>
+            <a:pPr defTabSz="228600">
+              <a:spcAft>
+                <a:spcPts val="1200"/>
+              </a:spcAft>
+            </a:pPr>
+            <a:r>
+              <a:rPr lang="de-DE" sz="700" dirty="0"/>
+              <a:t>priv.pay.transaction.delta.v1</a:t>
+            </a:r>
+          </a:p>
+        </p:txBody>
+      </p:sp>
+      <p:sp>
+        <p:nvSpPr>
+          <p:cNvPr id="47" name="Can 46">
+            <a:extLst>
+              <a:ext uri="{FF2B5EF4-FFF2-40B4-BE49-F238E27FC236}">
+                <a16:creationId xmlns:a16="http://schemas.microsoft.com/office/drawing/2014/main" id="{0C15DF8B-4D81-6917-B1A2-6E4C25249463}"/>
+              </a:ext>
+            </a:extLst>
+          </p:cNvPr>
+          <p:cNvSpPr/>
+          <p:nvPr/>
+        </p:nvSpPr>
+        <p:spPr>
+          <a:xfrm rot="5400000">
+            <a:off x="2391444" y="4067290"/>
+            <a:ext cx="310669" cy="915333"/>
+          </a:xfrm>
+          <a:prstGeom prst="can">
+            <a:avLst/>
+          </a:prstGeom>
+          <a:solidFill>
+            <a:schemeClr val="bg1">
+              <a:lumMod val="85000"/>
+            </a:schemeClr>
+          </a:solidFill>
+          <a:ln>
+            <a:solidFill>
+              <a:schemeClr val="bg1"/>
+            </a:solidFill>
+          </a:ln>
+        </p:spPr>
+        <p:style>
+          <a:lnRef idx="2">
+            <a:schemeClr val="accent1">
+              <a:shade val="50000"/>
+            </a:schemeClr>
+          </a:lnRef>
+          <a:fillRef idx="1">
+            <a:schemeClr val="accent1"/>
+          </a:fillRef>
+          <a:effectRef idx="0">
+            <a:schemeClr val="accent1"/>
+          </a:effectRef>
+          <a:fontRef idx="minor">
+            <a:schemeClr val="lt1"/>
+          </a:fontRef>
+        </p:style>
+        <p:txBody>
+          <a:bodyPr rtlCol="0" anchor="ctr"/>
+          <a:lstStyle/>
+          <a:p>
+            <a:pPr algn="ctr"/>
+            <a:endParaRPr lang="en-US">
+              <a:solidFill>
+                <a:srgbClr val="5A00D2"/>
+              </a:solidFill>
+            </a:endParaRPr>
+          </a:p>
+        </p:txBody>
+      </p:sp>
+      <p:sp>
+        <p:nvSpPr>
+          <p:cNvPr id="48" name="Rounded Rectangle 47">
+            <a:extLst>
+              <a:ext uri="{FF2B5EF4-FFF2-40B4-BE49-F238E27FC236}">
+                <a16:creationId xmlns:a16="http://schemas.microsoft.com/office/drawing/2014/main" id="{ECDAB2C7-E8E6-5F3A-74C0-0362D6548B4B}"/>
+              </a:ext>
+            </a:extLst>
+          </p:cNvPr>
+          <p:cNvSpPr/>
+          <p:nvPr/>
+        </p:nvSpPr>
+        <p:spPr>
+          <a:xfrm>
+            <a:off x="2222591" y="4437747"/>
+            <a:ext cx="192024" cy="187452"/>
+          </a:xfrm>
+          <a:prstGeom prst="roundRect">
+            <a:avLst/>
+          </a:prstGeom>
+          <a:solidFill>
+            <a:srgbClr val="9600FF"/>
+          </a:solidFill>
+          <a:ln>
+            <a:noFill/>
+          </a:ln>
+        </p:spPr>
+        <p:style>
+          <a:lnRef idx="2">
+            <a:schemeClr val="accent1">
+              <a:shade val="50000"/>
+            </a:schemeClr>
+          </a:lnRef>
+          <a:fillRef idx="1">
+            <a:schemeClr val="accent1"/>
+          </a:fillRef>
+          <a:effectRef idx="0">
+            <a:schemeClr val="accent1"/>
+          </a:effectRef>
+          <a:fontRef idx="minor">
+            <a:schemeClr val="lt1"/>
+          </a:fontRef>
+        </p:style>
+        <p:txBody>
+          <a:bodyPr rtlCol="0" anchor="ctr"/>
+          <a:lstStyle/>
+          <a:p>
+            <a:pPr algn="ctr"/>
+            <a:endParaRPr lang="en-US"/>
+          </a:p>
+        </p:txBody>
+      </p:sp>
+      <p:sp>
+        <p:nvSpPr>
+          <p:cNvPr id="49" name="Rounded Rectangle 48">
+            <a:extLst>
+              <a:ext uri="{FF2B5EF4-FFF2-40B4-BE49-F238E27FC236}">
+                <a16:creationId xmlns:a16="http://schemas.microsoft.com/office/drawing/2014/main" id="{663AFF2B-48A8-D3CE-83A8-CC63C03EF29B}"/>
+              </a:ext>
+            </a:extLst>
+          </p:cNvPr>
+          <p:cNvSpPr/>
+          <p:nvPr/>
+        </p:nvSpPr>
+        <p:spPr>
+          <a:xfrm>
+            <a:off x="2480087" y="4437747"/>
+            <a:ext cx="192024" cy="187452"/>
+          </a:xfrm>
+          <a:prstGeom prst="roundRect">
+            <a:avLst/>
+          </a:prstGeom>
+          <a:solidFill>
+            <a:srgbClr val="9600FF"/>
+          </a:solidFill>
+          <a:ln>
+            <a:noFill/>
+          </a:ln>
+        </p:spPr>
+        <p:style>
+          <a:lnRef idx="2">
+            <a:schemeClr val="accent1">
+              <a:shade val="50000"/>
+            </a:schemeClr>
+          </a:lnRef>
+          <a:fillRef idx="1">
+            <a:schemeClr val="accent1"/>
+          </a:fillRef>
+          <a:effectRef idx="0">
+            <a:schemeClr val="accent1"/>
+          </a:effectRef>
+          <a:fontRef idx="minor">
+            <a:schemeClr val="lt1"/>
+          </a:fontRef>
+        </p:style>
+        <p:txBody>
+          <a:bodyPr rtlCol="0" anchor="ctr"/>
+          <a:lstStyle/>
+          <a:p>
+            <a:pPr algn="ctr"/>
+            <a:endParaRPr lang="en-US"/>
+          </a:p>
+        </p:txBody>
+      </p:sp>
+      <p:sp>
+        <p:nvSpPr>
+          <p:cNvPr id="50" name="TextBox 49">
+            <a:extLst>
+              <a:ext uri="{FF2B5EF4-FFF2-40B4-BE49-F238E27FC236}">
+                <a16:creationId xmlns:a16="http://schemas.microsoft.com/office/drawing/2014/main" id="{1CC1491F-C96B-50E2-B04C-A32EA91E05F2}"/>
+              </a:ext>
+            </a:extLst>
+          </p:cNvPr>
+          <p:cNvSpPr txBox="1"/>
+          <p:nvPr/>
+        </p:nvSpPr>
+        <p:spPr>
+          <a:xfrm>
+            <a:off x="3103118" y="4674383"/>
+            <a:ext cx="0" cy="0"/>
+          </a:xfrm>
+          <a:prstGeom prst="rect">
+            <a:avLst/>
+          </a:prstGeom>
+          <a:noFill/>
+        </p:spPr>
+        <p:txBody>
+          <a:bodyPr wrap="none" lIns="0" tIns="0" rIns="0" bIns="0" rtlCol="0">
+            <a:noAutofit/>
+          </a:bodyPr>
+          <a:lstStyle/>
+          <a:p>
+            <a:pPr defTabSz="228600">
+              <a:spcAft>
+                <a:spcPts val="1200"/>
+              </a:spcAft>
+            </a:pPr>
+            <a:endParaRPr lang="de-DE" dirty="0"/>
+          </a:p>
+        </p:txBody>
+      </p:sp>
+      <p:sp>
+        <p:nvSpPr>
+          <p:cNvPr id="51" name="TextBox 50">
+            <a:extLst>
+              <a:ext uri="{FF2B5EF4-FFF2-40B4-BE49-F238E27FC236}">
+                <a16:creationId xmlns:a16="http://schemas.microsoft.com/office/drawing/2014/main" id="{31C84A52-1D2F-9D76-082F-11AEAD64AAE0}"/>
+              </a:ext>
+            </a:extLst>
+          </p:cNvPr>
+          <p:cNvSpPr txBox="1"/>
+          <p:nvPr/>
+        </p:nvSpPr>
+        <p:spPr>
+          <a:xfrm>
+            <a:off x="2016591" y="4205977"/>
+            <a:ext cx="1666555" cy="197028"/>
+          </a:xfrm>
+          <a:prstGeom prst="rect">
+            <a:avLst/>
+          </a:prstGeom>
+          <a:noFill/>
+        </p:spPr>
+        <p:txBody>
+          <a:bodyPr wrap="none" lIns="0" tIns="0" rIns="0" bIns="0" rtlCol="0">
+            <a:noAutofit/>
+          </a:bodyPr>
+          <a:lstStyle/>
+          <a:p>
+            <a:pPr defTabSz="228600">
+              <a:spcAft>
+                <a:spcPts val="1200"/>
+              </a:spcAft>
+            </a:pPr>
+            <a:r>
+              <a:rPr lang="de-DE" sz="700" dirty="0"/>
+              <a:t>priv.pay.blacklist.state.v1</a:t>
+            </a:r>
+          </a:p>
+        </p:txBody>
+      </p:sp>
+      <p:cxnSp>
+        <p:nvCxnSpPr>
+          <p:cNvPr id="52" name="Straight Arrow Connector 47">
+            <a:extLst>
+              <a:ext uri="{FF2B5EF4-FFF2-40B4-BE49-F238E27FC236}">
+                <a16:creationId xmlns:a16="http://schemas.microsoft.com/office/drawing/2014/main" id="{BC08F210-C1C0-8FA1-14E5-EAC6B206287F}"/>
+              </a:ext>
+            </a:extLst>
+          </p:cNvPr>
+          <p:cNvCxnSpPr>
+            <a:cxnSpLocks/>
+            <a:stCxn id="6" idx="3"/>
+            <a:endCxn id="40" idx="3"/>
+          </p:cNvCxnSpPr>
+          <p:nvPr/>
+        </p:nvCxnSpPr>
+        <p:spPr>
+          <a:xfrm>
+            <a:off x="860725" y="3922994"/>
+            <a:ext cx="1228385" cy="12700"/>
+          </a:xfrm>
+          <a:prstGeom prst="curvedConnector3">
+            <a:avLst>
+              <a:gd name="adj1" fmla="val 50000"/>
+            </a:avLst>
+          </a:prstGeom>
+          <a:ln>
+            <a:solidFill>
+              <a:srgbClr val="5A00D2"/>
+            </a:solidFill>
+            <a:tailEnd type="triangle"/>
+          </a:ln>
+        </p:spPr>
+        <p:style>
+          <a:lnRef idx="1">
+            <a:schemeClr val="accent1"/>
+          </a:lnRef>
+          <a:fillRef idx="0">
+            <a:schemeClr val="accent1"/>
+          </a:fillRef>
+          <a:effectRef idx="0">
+            <a:schemeClr val="accent1"/>
+          </a:effectRef>
+          <a:fontRef idx="minor">
+            <a:schemeClr val="tx1"/>
+          </a:fontRef>
+        </p:style>
+      </p:cxnSp>
+      <p:sp>
+        <p:nvSpPr>
+          <p:cNvPr id="57" name="Can 56">
+            <a:extLst>
+              <a:ext uri="{FF2B5EF4-FFF2-40B4-BE49-F238E27FC236}">
+                <a16:creationId xmlns:a16="http://schemas.microsoft.com/office/drawing/2014/main" id="{66AD2582-8373-E448-5FC6-873A347AD9CC}"/>
+              </a:ext>
+            </a:extLst>
+          </p:cNvPr>
+          <p:cNvSpPr/>
+          <p:nvPr/>
+        </p:nvSpPr>
+        <p:spPr>
+          <a:xfrm rot="5400000">
+            <a:off x="4681255" y="3465330"/>
+            <a:ext cx="310669" cy="915333"/>
+          </a:xfrm>
+          <a:prstGeom prst="can">
+            <a:avLst/>
+          </a:prstGeom>
+          <a:solidFill>
+            <a:schemeClr val="bg1">
+              <a:lumMod val="85000"/>
+            </a:schemeClr>
+          </a:solidFill>
+          <a:ln>
+            <a:solidFill>
+              <a:schemeClr val="bg1"/>
+            </a:solidFill>
+          </a:ln>
+        </p:spPr>
+        <p:style>
+          <a:lnRef idx="2">
+            <a:schemeClr val="accent1">
+              <a:shade val="50000"/>
+            </a:schemeClr>
+          </a:lnRef>
+          <a:fillRef idx="1">
+            <a:schemeClr val="accent1"/>
+          </a:fillRef>
+          <a:effectRef idx="0">
+            <a:schemeClr val="accent1"/>
+          </a:effectRef>
+          <a:fontRef idx="minor">
+            <a:schemeClr val="lt1"/>
+          </a:fontRef>
+        </p:style>
+        <p:txBody>
+          <a:bodyPr rtlCol="0" anchor="ctr"/>
+          <a:lstStyle/>
+          <a:p>
+            <a:pPr algn="ctr"/>
+            <a:endParaRPr lang="en-US">
+              <a:solidFill>
+                <a:srgbClr val="5A00D2"/>
+              </a:solidFill>
+            </a:endParaRPr>
+          </a:p>
+        </p:txBody>
+      </p:sp>
+      <p:sp>
+        <p:nvSpPr>
+          <p:cNvPr id="58" name="Rounded Rectangle 57">
+            <a:extLst>
+              <a:ext uri="{FF2B5EF4-FFF2-40B4-BE49-F238E27FC236}">
+                <a16:creationId xmlns:a16="http://schemas.microsoft.com/office/drawing/2014/main" id="{13C1A0AF-EA8A-6F26-BC22-236B86488DFF}"/>
+              </a:ext>
+            </a:extLst>
+          </p:cNvPr>
+          <p:cNvSpPr/>
+          <p:nvPr/>
+        </p:nvSpPr>
+        <p:spPr>
+          <a:xfrm>
+            <a:off x="4512402" y="3835786"/>
+            <a:ext cx="192024" cy="187452"/>
+          </a:xfrm>
+          <a:prstGeom prst="roundRect">
+            <a:avLst/>
+          </a:prstGeom>
+          <a:solidFill>
+            <a:srgbClr val="9600FF"/>
+          </a:solidFill>
+          <a:ln>
+            <a:noFill/>
+          </a:ln>
+        </p:spPr>
+        <p:style>
+          <a:lnRef idx="2">
+            <a:schemeClr val="accent1">
+              <a:shade val="50000"/>
+            </a:schemeClr>
+          </a:lnRef>
+          <a:fillRef idx="1">
+            <a:schemeClr val="accent1"/>
+          </a:fillRef>
+          <a:effectRef idx="0">
+            <a:schemeClr val="accent1"/>
+          </a:effectRef>
+          <a:fontRef idx="minor">
+            <a:schemeClr val="lt1"/>
+          </a:fontRef>
+        </p:style>
+        <p:txBody>
+          <a:bodyPr rtlCol="0" anchor="ctr"/>
+          <a:lstStyle/>
+          <a:p>
+            <a:pPr algn="ctr"/>
+            <a:endParaRPr lang="en-US"/>
+          </a:p>
+        </p:txBody>
+      </p:sp>
+      <p:sp>
+        <p:nvSpPr>
+          <p:cNvPr id="59" name="Rounded Rectangle 58">
+            <a:extLst>
+              <a:ext uri="{FF2B5EF4-FFF2-40B4-BE49-F238E27FC236}">
+                <a16:creationId xmlns:a16="http://schemas.microsoft.com/office/drawing/2014/main" id="{A1C0138A-A227-150A-35A4-2EC2021AAAEB}"/>
+              </a:ext>
+            </a:extLst>
+          </p:cNvPr>
+          <p:cNvSpPr/>
+          <p:nvPr/>
+        </p:nvSpPr>
+        <p:spPr>
+          <a:xfrm>
+            <a:off x="4769898" y="3835786"/>
+            <a:ext cx="192024" cy="187452"/>
+          </a:xfrm>
+          <a:prstGeom prst="roundRect">
+            <a:avLst/>
+          </a:prstGeom>
+          <a:solidFill>
+            <a:srgbClr val="9600FF"/>
+          </a:solidFill>
+          <a:ln>
+            <a:noFill/>
+          </a:ln>
+        </p:spPr>
+        <p:style>
+          <a:lnRef idx="2">
+            <a:schemeClr val="accent1">
+              <a:shade val="50000"/>
+            </a:schemeClr>
+          </a:lnRef>
+          <a:fillRef idx="1">
+            <a:schemeClr val="accent1"/>
+          </a:fillRef>
+          <a:effectRef idx="0">
+            <a:schemeClr val="accent1"/>
+          </a:effectRef>
+          <a:fontRef idx="minor">
+            <a:schemeClr val="lt1"/>
+          </a:fontRef>
+        </p:style>
+        <p:txBody>
+          <a:bodyPr rtlCol="0" anchor="ctr"/>
+          <a:lstStyle/>
+          <a:p>
+            <a:pPr algn="ctr"/>
+            <a:endParaRPr lang="en-US"/>
+          </a:p>
+        </p:txBody>
+      </p:sp>
+      <p:sp>
+        <p:nvSpPr>
+          <p:cNvPr id="60" name="TextBox 59">
+            <a:extLst>
+              <a:ext uri="{FF2B5EF4-FFF2-40B4-BE49-F238E27FC236}">
+                <a16:creationId xmlns:a16="http://schemas.microsoft.com/office/drawing/2014/main" id="{C7BBBF6D-B46B-9D6C-AF53-61DBFB92B2A5}"/>
+              </a:ext>
+            </a:extLst>
+          </p:cNvPr>
+          <p:cNvSpPr txBox="1"/>
+          <p:nvPr/>
+        </p:nvSpPr>
+        <p:spPr>
+          <a:xfrm>
+            <a:off x="5392929" y="4072422"/>
+            <a:ext cx="0" cy="0"/>
+          </a:xfrm>
+          <a:prstGeom prst="rect">
+            <a:avLst/>
+          </a:prstGeom>
+          <a:noFill/>
+        </p:spPr>
+        <p:txBody>
+          <a:bodyPr wrap="none" lIns="0" tIns="0" rIns="0" bIns="0" rtlCol="0">
+            <a:noAutofit/>
+          </a:bodyPr>
+          <a:lstStyle/>
+          <a:p>
+            <a:pPr defTabSz="228600">
+              <a:spcAft>
+                <a:spcPts val="1200"/>
+              </a:spcAft>
+            </a:pPr>
+            <a:endParaRPr lang="de-DE" dirty="0"/>
+          </a:p>
+        </p:txBody>
+      </p:sp>
+      <p:sp>
+        <p:nvSpPr>
+          <p:cNvPr id="61" name="TextBox 60">
+            <a:extLst>
+              <a:ext uri="{FF2B5EF4-FFF2-40B4-BE49-F238E27FC236}">
+                <a16:creationId xmlns:a16="http://schemas.microsoft.com/office/drawing/2014/main" id="{C6299DA0-40EE-748F-46C3-D86FB8F2133A}"/>
+              </a:ext>
+            </a:extLst>
+          </p:cNvPr>
+          <p:cNvSpPr txBox="1"/>
+          <p:nvPr/>
+        </p:nvSpPr>
+        <p:spPr>
+          <a:xfrm>
+            <a:off x="4097137" y="3617478"/>
+            <a:ext cx="1666555" cy="197028"/>
+          </a:xfrm>
+          <a:prstGeom prst="rect">
+            <a:avLst/>
+          </a:prstGeom>
+          <a:noFill/>
+        </p:spPr>
+        <p:txBody>
+          <a:bodyPr wrap="none" lIns="0" tIns="0" rIns="0" bIns="0" rtlCol="0">
+            <a:noAutofit/>
+          </a:bodyPr>
+          <a:lstStyle/>
+          <a:p>
+            <a:pPr defTabSz="228600">
+              <a:spcAft>
+                <a:spcPts val="1200"/>
+              </a:spcAft>
+            </a:pPr>
+            <a:r>
+              <a:rPr lang="de-DE" sz="700" dirty="0"/>
+              <a:t>priv.pay.transaction-flagged.delta.v1</a:t>
+            </a:r>
+          </a:p>
+        </p:txBody>
+      </p:sp>
+      <p:cxnSp>
+        <p:nvCxnSpPr>
+          <p:cNvPr id="62" name="Straight Arrow Connector 47">
+            <a:extLst>
+              <a:ext uri="{FF2B5EF4-FFF2-40B4-BE49-F238E27FC236}">
+                <a16:creationId xmlns:a16="http://schemas.microsoft.com/office/drawing/2014/main" id="{782ABFAD-BC67-47AD-3604-EBDE7C6226E2}"/>
+              </a:ext>
+            </a:extLst>
+          </p:cNvPr>
+          <p:cNvCxnSpPr>
+            <a:cxnSpLocks/>
+            <a:stCxn id="40" idx="1"/>
+            <a:endCxn id="44" idx="1"/>
+          </p:cNvCxnSpPr>
+          <p:nvPr/>
+        </p:nvCxnSpPr>
+        <p:spPr>
+          <a:xfrm>
+            <a:off x="3004445" y="3922996"/>
+            <a:ext cx="408255" cy="155"/>
+          </a:xfrm>
+          <a:prstGeom prst="curvedConnector3">
+            <a:avLst>
+              <a:gd name="adj1" fmla="val 50000"/>
+            </a:avLst>
+          </a:prstGeom>
+          <a:ln>
+            <a:solidFill>
+              <a:srgbClr val="5A00D2"/>
+            </a:solidFill>
+            <a:tailEnd type="triangle"/>
+          </a:ln>
+        </p:spPr>
+        <p:style>
+          <a:lnRef idx="1">
+            <a:schemeClr val="accent1"/>
+          </a:lnRef>
+          <a:fillRef idx="0">
+            <a:schemeClr val="accent1"/>
+          </a:fillRef>
+          <a:effectRef idx="0">
+            <a:schemeClr val="accent1"/>
+          </a:effectRef>
+          <a:fontRef idx="minor">
+            <a:schemeClr val="tx1"/>
+          </a:fontRef>
+        </p:style>
+      </p:cxnSp>
+      <p:cxnSp>
+        <p:nvCxnSpPr>
+          <p:cNvPr id="65" name="Straight Arrow Connector 47">
+            <a:extLst>
+              <a:ext uri="{FF2B5EF4-FFF2-40B4-BE49-F238E27FC236}">
+                <a16:creationId xmlns:a16="http://schemas.microsoft.com/office/drawing/2014/main" id="{3929E785-94E8-6803-6BD9-C686B3DEC06F}"/>
+              </a:ext>
+            </a:extLst>
+          </p:cNvPr>
+          <p:cNvCxnSpPr>
+            <a:cxnSpLocks/>
+            <a:stCxn id="44" idx="3"/>
+            <a:endCxn id="57" idx="3"/>
+          </p:cNvCxnSpPr>
+          <p:nvPr/>
+        </p:nvCxnSpPr>
+        <p:spPr>
+          <a:xfrm flipV="1">
+            <a:off x="4071778" y="3922995"/>
+            <a:ext cx="307145" cy="154"/>
+          </a:xfrm>
+          <a:prstGeom prst="curvedConnector3">
+            <a:avLst>
+              <a:gd name="adj1" fmla="val 50000"/>
+            </a:avLst>
+          </a:prstGeom>
+          <a:ln>
+            <a:solidFill>
+              <a:srgbClr val="5A00D2"/>
+            </a:solidFill>
+            <a:tailEnd type="triangle"/>
+          </a:ln>
+        </p:spPr>
+        <p:style>
+          <a:lnRef idx="1">
+            <a:schemeClr val="accent1"/>
+          </a:lnRef>
+          <a:fillRef idx="0">
+            <a:schemeClr val="accent1"/>
+          </a:fillRef>
+          <a:effectRef idx="0">
+            <a:schemeClr val="accent1"/>
+          </a:effectRef>
+          <a:fontRef idx="minor">
+            <a:schemeClr val="tx1"/>
+          </a:fontRef>
+        </p:style>
+      </p:cxnSp>
+      <p:sp>
+        <p:nvSpPr>
+          <p:cNvPr id="68" name="Rounded Rectangle 67">
+            <a:extLst>
+              <a:ext uri="{FF2B5EF4-FFF2-40B4-BE49-F238E27FC236}">
+                <a16:creationId xmlns:a16="http://schemas.microsoft.com/office/drawing/2014/main" id="{80E63F01-F5C0-5E17-2BB3-D88B6923041E}"/>
+              </a:ext>
+            </a:extLst>
+          </p:cNvPr>
+          <p:cNvSpPr/>
+          <p:nvPr/>
+        </p:nvSpPr>
+        <p:spPr>
+          <a:xfrm>
+            <a:off x="5764659" y="3825226"/>
+            <a:ext cx="659078" cy="206150"/>
+          </a:xfrm>
+          <a:prstGeom prst="roundRect">
+            <a:avLst/>
+          </a:prstGeom>
+          <a:solidFill>
+            <a:schemeClr val="accent3">
+              <a:lumMod val="60000"/>
+              <a:lumOff val="40000"/>
+            </a:schemeClr>
+          </a:solidFill>
+          <a:ln>
+            <a:solidFill>
+              <a:schemeClr val="accent1"/>
+            </a:solidFill>
+          </a:ln>
+        </p:spPr>
+        <p:style>
+          <a:lnRef idx="2">
+            <a:schemeClr val="accent1">
+              <a:shade val="50000"/>
+            </a:schemeClr>
+          </a:lnRef>
+          <a:fillRef idx="1">
+            <a:schemeClr val="accent1"/>
+          </a:fillRef>
+          <a:effectRef idx="0">
+            <a:schemeClr val="accent1"/>
+          </a:effectRef>
+          <a:fontRef idx="minor">
+            <a:schemeClr val="lt1"/>
+          </a:fontRef>
+        </p:style>
+        <p:txBody>
+          <a:bodyPr rtlCol="0" anchor="ctr"/>
+          <a:lstStyle/>
+          <a:p>
+            <a:pPr algn="ctr"/>
+            <a:r>
+              <a:rPr lang="en-US" sz="700" b="1" dirty="0"/>
+              <a:t>Enricher</a:t>
+            </a:r>
+          </a:p>
+        </p:txBody>
+      </p:sp>
+      <p:sp>
+        <p:nvSpPr>
+          <p:cNvPr id="69" name="TextBox 68">
+            <a:extLst>
+              <a:ext uri="{FF2B5EF4-FFF2-40B4-BE49-F238E27FC236}">
+                <a16:creationId xmlns:a16="http://schemas.microsoft.com/office/drawing/2014/main" id="{5BFE1E99-219C-79F9-9B2E-98F12C24B8FB}"/>
+              </a:ext>
+            </a:extLst>
+          </p:cNvPr>
+          <p:cNvSpPr txBox="1"/>
+          <p:nvPr/>
+        </p:nvSpPr>
+        <p:spPr>
+          <a:xfrm>
+            <a:off x="3140200" y="5246277"/>
+            <a:ext cx="0" cy="0"/>
+          </a:xfrm>
+          <a:prstGeom prst="rect">
+            <a:avLst/>
+          </a:prstGeom>
+          <a:noFill/>
+        </p:spPr>
+        <p:txBody>
+          <a:bodyPr wrap="none" lIns="0" tIns="0" rIns="0" bIns="0" rtlCol="0">
+            <a:noAutofit/>
+          </a:bodyPr>
+          <a:lstStyle/>
+          <a:p>
+            <a:pPr defTabSz="228600">
+              <a:spcAft>
+                <a:spcPts val="1200"/>
+              </a:spcAft>
+            </a:pPr>
+            <a:endParaRPr lang="de-DE" dirty="0"/>
+          </a:p>
+        </p:txBody>
+      </p:sp>
+      <p:sp>
+        <p:nvSpPr>
+          <p:cNvPr id="70" name="Can 69">
+            <a:extLst>
+              <a:ext uri="{FF2B5EF4-FFF2-40B4-BE49-F238E27FC236}">
+                <a16:creationId xmlns:a16="http://schemas.microsoft.com/office/drawing/2014/main" id="{079A7C93-BAE1-BC58-4B78-5DB29A28A29C}"/>
+              </a:ext>
+            </a:extLst>
+          </p:cNvPr>
+          <p:cNvSpPr/>
+          <p:nvPr/>
+        </p:nvSpPr>
+        <p:spPr>
+          <a:xfrm rot="5400000">
+            <a:off x="4503127" y="5014805"/>
+            <a:ext cx="310669" cy="915333"/>
+          </a:xfrm>
+          <a:prstGeom prst="can">
+            <a:avLst/>
+          </a:prstGeom>
+          <a:solidFill>
+            <a:schemeClr val="bg1">
+              <a:lumMod val="85000"/>
+            </a:schemeClr>
+          </a:solidFill>
+          <a:ln>
+            <a:solidFill>
+              <a:schemeClr val="bg1"/>
+            </a:solidFill>
+          </a:ln>
+        </p:spPr>
+        <p:style>
+          <a:lnRef idx="2">
+            <a:schemeClr val="accent1">
+              <a:shade val="50000"/>
+            </a:schemeClr>
+          </a:lnRef>
+          <a:fillRef idx="1">
+            <a:schemeClr val="accent1"/>
+          </a:fillRef>
+          <a:effectRef idx="0">
+            <a:schemeClr val="accent1"/>
+          </a:effectRef>
+          <a:fontRef idx="minor">
+            <a:schemeClr val="lt1"/>
+          </a:fontRef>
+        </p:style>
+        <p:txBody>
+          <a:bodyPr rtlCol="0" anchor="ctr"/>
+          <a:lstStyle/>
+          <a:p>
+            <a:pPr algn="ctr"/>
+            <a:endParaRPr lang="en-US">
+              <a:solidFill>
+                <a:srgbClr val="5A00D2"/>
+              </a:solidFill>
+            </a:endParaRPr>
+          </a:p>
+        </p:txBody>
+      </p:sp>
+      <p:sp>
+        <p:nvSpPr>
+          <p:cNvPr id="71" name="Rounded Rectangle 70">
+            <a:extLst>
+              <a:ext uri="{FF2B5EF4-FFF2-40B4-BE49-F238E27FC236}">
+                <a16:creationId xmlns:a16="http://schemas.microsoft.com/office/drawing/2014/main" id="{24FCC49C-DC72-315F-2272-E976FF1A5BE0}"/>
+              </a:ext>
+            </a:extLst>
+          </p:cNvPr>
+          <p:cNvSpPr/>
+          <p:nvPr/>
+        </p:nvSpPr>
+        <p:spPr>
+          <a:xfrm>
+            <a:off x="4334274" y="5385262"/>
+            <a:ext cx="192024" cy="187452"/>
+          </a:xfrm>
+          <a:prstGeom prst="roundRect">
+            <a:avLst/>
+          </a:prstGeom>
+          <a:solidFill>
+            <a:srgbClr val="9600FF"/>
+          </a:solidFill>
+          <a:ln>
+            <a:noFill/>
+          </a:ln>
+        </p:spPr>
+        <p:style>
+          <a:lnRef idx="2">
+            <a:schemeClr val="accent1">
+              <a:shade val="50000"/>
+            </a:schemeClr>
+          </a:lnRef>
+          <a:fillRef idx="1">
+            <a:schemeClr val="accent1"/>
+          </a:fillRef>
+          <a:effectRef idx="0">
+            <a:schemeClr val="accent1"/>
+          </a:effectRef>
+          <a:fontRef idx="minor">
+            <a:schemeClr val="lt1"/>
+          </a:fontRef>
+        </p:style>
+        <p:txBody>
+          <a:bodyPr rtlCol="0" anchor="ctr"/>
+          <a:lstStyle/>
+          <a:p>
+            <a:pPr algn="ctr"/>
+            <a:endParaRPr lang="en-US"/>
+          </a:p>
+        </p:txBody>
+      </p:sp>
+      <p:sp>
+        <p:nvSpPr>
+          <p:cNvPr id="72" name="Rounded Rectangle 71">
+            <a:extLst>
+              <a:ext uri="{FF2B5EF4-FFF2-40B4-BE49-F238E27FC236}">
+                <a16:creationId xmlns:a16="http://schemas.microsoft.com/office/drawing/2014/main" id="{897F6C37-304B-3308-CECB-A7F90DE7AD05}"/>
+              </a:ext>
+            </a:extLst>
+          </p:cNvPr>
+          <p:cNvSpPr/>
+          <p:nvPr/>
+        </p:nvSpPr>
+        <p:spPr>
+          <a:xfrm>
+            <a:off x="4591770" y="5385262"/>
+            <a:ext cx="192024" cy="187452"/>
+          </a:xfrm>
+          <a:prstGeom prst="roundRect">
+            <a:avLst/>
+          </a:prstGeom>
+          <a:solidFill>
+            <a:srgbClr val="9600FF"/>
+          </a:solidFill>
+          <a:ln>
+            <a:noFill/>
+          </a:ln>
+        </p:spPr>
+        <p:style>
+          <a:lnRef idx="2">
+            <a:schemeClr val="accent1">
+              <a:shade val="50000"/>
+            </a:schemeClr>
+          </a:lnRef>
+          <a:fillRef idx="1">
+            <a:schemeClr val="accent1"/>
+          </a:fillRef>
+          <a:effectRef idx="0">
+            <a:schemeClr val="accent1"/>
+          </a:effectRef>
+          <a:fontRef idx="minor">
+            <a:schemeClr val="lt1"/>
+          </a:fontRef>
+        </p:style>
+        <p:txBody>
+          <a:bodyPr rtlCol="0" anchor="ctr"/>
+          <a:lstStyle/>
+          <a:p>
+            <a:pPr algn="ctr"/>
+            <a:endParaRPr lang="en-US"/>
+          </a:p>
+        </p:txBody>
+      </p:sp>
+      <p:sp>
+        <p:nvSpPr>
+          <p:cNvPr id="73" name="TextBox 72">
+            <a:extLst>
+              <a:ext uri="{FF2B5EF4-FFF2-40B4-BE49-F238E27FC236}">
+                <a16:creationId xmlns:a16="http://schemas.microsoft.com/office/drawing/2014/main" id="{9AB4C2F6-8BA3-A098-8E21-314D95A6539D}"/>
+              </a:ext>
+            </a:extLst>
+          </p:cNvPr>
+          <p:cNvSpPr txBox="1"/>
+          <p:nvPr/>
+        </p:nvSpPr>
+        <p:spPr>
+          <a:xfrm>
+            <a:off x="5214801" y="5621898"/>
+            <a:ext cx="0" cy="0"/>
+          </a:xfrm>
+          <a:prstGeom prst="rect">
+            <a:avLst/>
+          </a:prstGeom>
+          <a:noFill/>
+        </p:spPr>
+        <p:txBody>
+          <a:bodyPr wrap="none" lIns="0" tIns="0" rIns="0" bIns="0" rtlCol="0">
+            <a:noAutofit/>
+          </a:bodyPr>
+          <a:lstStyle/>
+          <a:p>
+            <a:pPr defTabSz="228600">
+              <a:spcAft>
+                <a:spcPts val="1200"/>
+              </a:spcAft>
+            </a:pPr>
+            <a:endParaRPr lang="de-DE" dirty="0"/>
+          </a:p>
+        </p:txBody>
+      </p:sp>
+      <p:sp>
+        <p:nvSpPr>
+          <p:cNvPr id="74" name="TextBox 73">
+            <a:extLst>
+              <a:ext uri="{FF2B5EF4-FFF2-40B4-BE49-F238E27FC236}">
+                <a16:creationId xmlns:a16="http://schemas.microsoft.com/office/drawing/2014/main" id="{42781F50-A816-903D-4BD9-44D5A2FB93EA}"/>
+              </a:ext>
+            </a:extLst>
+          </p:cNvPr>
+          <p:cNvSpPr txBox="1"/>
+          <p:nvPr/>
+        </p:nvSpPr>
+        <p:spPr>
+          <a:xfrm>
+            <a:off x="4200795" y="5188234"/>
+            <a:ext cx="1666555" cy="197028"/>
+          </a:xfrm>
+          <a:prstGeom prst="rect">
+            <a:avLst/>
+          </a:prstGeom>
+          <a:noFill/>
+        </p:spPr>
+        <p:txBody>
+          <a:bodyPr wrap="none" lIns="0" tIns="0" rIns="0" bIns="0" rtlCol="0">
+            <a:noAutofit/>
+          </a:bodyPr>
+          <a:lstStyle/>
+          <a:p>
+            <a:pPr defTabSz="228600">
+              <a:spcAft>
+                <a:spcPts val="1200"/>
+              </a:spcAft>
+            </a:pPr>
+            <a:r>
+              <a:rPr lang="de-DE" sz="700" dirty="0"/>
+              <a:t>priv.ref.merchant.state.v1</a:t>
+            </a:r>
+          </a:p>
+        </p:txBody>
+      </p:sp>
+      <p:cxnSp>
+        <p:nvCxnSpPr>
+          <p:cNvPr id="75" name="Straight Arrow Connector 47">
+            <a:extLst>
+              <a:ext uri="{FF2B5EF4-FFF2-40B4-BE49-F238E27FC236}">
+                <a16:creationId xmlns:a16="http://schemas.microsoft.com/office/drawing/2014/main" id="{D2E13821-94B5-DBE5-3A68-3A7181627642}"/>
+              </a:ext>
+            </a:extLst>
+          </p:cNvPr>
+          <p:cNvCxnSpPr>
+            <a:cxnSpLocks/>
+            <a:stCxn id="6" idx="3"/>
+            <a:endCxn id="2" idx="2"/>
+          </p:cNvCxnSpPr>
+          <p:nvPr/>
+        </p:nvCxnSpPr>
+        <p:spPr>
+          <a:xfrm>
+            <a:off x="860725" y="3922996"/>
+            <a:ext cx="1349250" cy="1551846"/>
+          </a:xfrm>
+          <a:prstGeom prst="curvedConnector3">
+            <a:avLst>
+              <a:gd name="adj1" fmla="val 50000"/>
+            </a:avLst>
+          </a:prstGeom>
+          <a:ln>
+            <a:solidFill>
+              <a:srgbClr val="5A00D2"/>
+            </a:solidFill>
+            <a:tailEnd type="triangle"/>
+          </a:ln>
+        </p:spPr>
+        <p:style>
+          <a:lnRef idx="1">
+            <a:schemeClr val="accent1"/>
+          </a:lnRef>
+          <a:fillRef idx="0">
+            <a:schemeClr val="accent1"/>
+          </a:fillRef>
+          <a:effectRef idx="0">
+            <a:schemeClr val="accent1"/>
+          </a:effectRef>
+          <a:fontRef idx="minor">
+            <a:schemeClr val="tx1"/>
+          </a:fontRef>
+        </p:style>
+      </p:cxnSp>
+      <p:cxnSp>
+        <p:nvCxnSpPr>
+          <p:cNvPr id="78" name="Straight Arrow Connector 47">
+            <a:extLst>
+              <a:ext uri="{FF2B5EF4-FFF2-40B4-BE49-F238E27FC236}">
+                <a16:creationId xmlns:a16="http://schemas.microsoft.com/office/drawing/2014/main" id="{68551DA4-39FC-D625-6096-7270C1BFE806}"/>
+              </a:ext>
+            </a:extLst>
+          </p:cNvPr>
+          <p:cNvCxnSpPr>
+            <a:cxnSpLocks/>
+            <a:stCxn id="57" idx="1"/>
+            <a:endCxn id="68" idx="1"/>
+          </p:cNvCxnSpPr>
+          <p:nvPr/>
+        </p:nvCxnSpPr>
+        <p:spPr>
+          <a:xfrm>
+            <a:off x="5294256" y="3922995"/>
+            <a:ext cx="470405" cy="5306"/>
+          </a:xfrm>
+          <a:prstGeom prst="curvedConnector3">
+            <a:avLst>
+              <a:gd name="adj1" fmla="val 50000"/>
+            </a:avLst>
+          </a:prstGeom>
+          <a:ln>
+            <a:solidFill>
+              <a:srgbClr val="5A00D2"/>
+            </a:solidFill>
+            <a:tailEnd type="triangle"/>
+          </a:ln>
+        </p:spPr>
+        <p:style>
+          <a:lnRef idx="1">
+            <a:schemeClr val="accent1"/>
+          </a:lnRef>
+          <a:fillRef idx="0">
+            <a:schemeClr val="accent1"/>
+          </a:fillRef>
+          <a:effectRef idx="0">
+            <a:schemeClr val="accent1"/>
+          </a:effectRef>
+          <a:fontRef idx="minor">
+            <a:schemeClr val="tx1"/>
+          </a:fontRef>
+        </p:style>
+      </p:cxnSp>
+      <p:cxnSp>
+        <p:nvCxnSpPr>
+          <p:cNvPr id="81" name="Straight Arrow Connector 47">
+            <a:extLst>
+              <a:ext uri="{FF2B5EF4-FFF2-40B4-BE49-F238E27FC236}">
+                <a16:creationId xmlns:a16="http://schemas.microsoft.com/office/drawing/2014/main" id="{1120203F-AA6E-57AE-A103-F73482F76224}"/>
+              </a:ext>
+            </a:extLst>
+          </p:cNvPr>
+          <p:cNvCxnSpPr>
+            <a:cxnSpLocks/>
+            <a:stCxn id="70" idx="1"/>
+            <a:endCxn id="44" idx="1"/>
+          </p:cNvCxnSpPr>
+          <p:nvPr/>
+        </p:nvCxnSpPr>
+        <p:spPr>
+          <a:xfrm flipH="1" flipV="1">
+            <a:off x="3412698" y="3923149"/>
+            <a:ext cx="1703430" cy="1549323"/>
+          </a:xfrm>
+          <a:prstGeom prst="curvedConnector5">
+            <a:avLst>
+              <a:gd name="adj1" fmla="val -13420"/>
+              <a:gd name="adj2" fmla="val 64470"/>
+              <a:gd name="adj3" fmla="val 109291"/>
+            </a:avLst>
+          </a:prstGeom>
+          <a:ln>
+            <a:solidFill>
+              <a:srgbClr val="5A00D2"/>
+            </a:solidFill>
+            <a:tailEnd type="triangle"/>
+          </a:ln>
+        </p:spPr>
+        <p:style>
+          <a:lnRef idx="1">
+            <a:schemeClr val="accent1"/>
+          </a:lnRef>
+          <a:fillRef idx="0">
+            <a:schemeClr val="accent1"/>
+          </a:fillRef>
+          <a:effectRef idx="0">
+            <a:schemeClr val="accent1"/>
+          </a:effectRef>
+          <a:fontRef idx="minor">
+            <a:schemeClr val="tx1"/>
+          </a:fontRef>
+        </p:style>
+      </p:cxnSp>
+      <p:sp>
+        <p:nvSpPr>
+          <p:cNvPr id="85" name="Can 84">
+            <a:extLst>
+              <a:ext uri="{FF2B5EF4-FFF2-40B4-BE49-F238E27FC236}">
+                <a16:creationId xmlns:a16="http://schemas.microsoft.com/office/drawing/2014/main" id="{A028AF79-2261-7BA1-E903-EC48F5786720}"/>
+              </a:ext>
+            </a:extLst>
+          </p:cNvPr>
+          <p:cNvSpPr/>
+          <p:nvPr/>
+        </p:nvSpPr>
+        <p:spPr>
+          <a:xfrm rot="5400000">
+            <a:off x="7117946" y="3470607"/>
+            <a:ext cx="310669" cy="915333"/>
+          </a:xfrm>
+          <a:prstGeom prst="can">
+            <a:avLst/>
+          </a:prstGeom>
+          <a:solidFill>
+            <a:schemeClr val="bg1">
+              <a:lumMod val="85000"/>
+            </a:schemeClr>
+          </a:solidFill>
+          <a:ln>
+            <a:solidFill>
+              <a:schemeClr val="bg1"/>
+            </a:solidFill>
+          </a:ln>
+        </p:spPr>
+        <p:style>
+          <a:lnRef idx="2">
+            <a:schemeClr val="accent1">
+              <a:shade val="50000"/>
+            </a:schemeClr>
+          </a:lnRef>
+          <a:fillRef idx="1">
+            <a:schemeClr val="accent1"/>
+          </a:fillRef>
+          <a:effectRef idx="0">
+            <a:schemeClr val="accent1"/>
+          </a:effectRef>
+          <a:fontRef idx="minor">
+            <a:schemeClr val="lt1"/>
+          </a:fontRef>
+        </p:style>
+        <p:txBody>
+          <a:bodyPr rtlCol="0" anchor="ctr"/>
+          <a:lstStyle/>
+          <a:p>
+            <a:pPr algn="ctr"/>
+            <a:endParaRPr lang="en-US">
+              <a:solidFill>
+                <a:srgbClr val="5A00D2"/>
+              </a:solidFill>
+            </a:endParaRPr>
+          </a:p>
+        </p:txBody>
+      </p:sp>
+      <p:sp>
+        <p:nvSpPr>
+          <p:cNvPr id="86" name="Rounded Rectangle 85">
+            <a:extLst>
+              <a:ext uri="{FF2B5EF4-FFF2-40B4-BE49-F238E27FC236}">
+                <a16:creationId xmlns:a16="http://schemas.microsoft.com/office/drawing/2014/main" id="{FB4909B4-9E30-51F7-AD61-E7A21884FB5B}"/>
+              </a:ext>
+            </a:extLst>
+          </p:cNvPr>
+          <p:cNvSpPr/>
+          <p:nvPr/>
+        </p:nvSpPr>
+        <p:spPr>
+          <a:xfrm>
+            <a:off x="6949093" y="3841063"/>
+            <a:ext cx="192024" cy="187452"/>
+          </a:xfrm>
+          <a:prstGeom prst="roundRect">
+            <a:avLst/>
+          </a:prstGeom>
+          <a:solidFill>
+            <a:srgbClr val="9600FF"/>
+          </a:solidFill>
+          <a:ln>
+            <a:noFill/>
+          </a:ln>
+        </p:spPr>
+        <p:style>
+          <a:lnRef idx="2">
+            <a:schemeClr val="accent1">
+              <a:shade val="50000"/>
+            </a:schemeClr>
+          </a:lnRef>
+          <a:fillRef idx="1">
+            <a:schemeClr val="accent1"/>
+          </a:fillRef>
+          <a:effectRef idx="0">
+            <a:schemeClr val="accent1"/>
+          </a:effectRef>
+          <a:fontRef idx="minor">
+            <a:schemeClr val="lt1"/>
+          </a:fontRef>
+        </p:style>
+        <p:txBody>
+          <a:bodyPr rtlCol="0" anchor="ctr"/>
+          <a:lstStyle/>
+          <a:p>
+            <a:pPr algn="ctr"/>
+            <a:endParaRPr lang="en-US"/>
+          </a:p>
+        </p:txBody>
+      </p:sp>
+      <p:sp>
+        <p:nvSpPr>
+          <p:cNvPr id="87" name="Rounded Rectangle 86">
+            <a:extLst>
+              <a:ext uri="{FF2B5EF4-FFF2-40B4-BE49-F238E27FC236}">
+                <a16:creationId xmlns:a16="http://schemas.microsoft.com/office/drawing/2014/main" id="{86417DAA-D623-2EDE-54EE-9423B6604486}"/>
+              </a:ext>
+            </a:extLst>
+          </p:cNvPr>
+          <p:cNvSpPr/>
+          <p:nvPr/>
+        </p:nvSpPr>
+        <p:spPr>
+          <a:xfrm>
+            <a:off x="7206589" y="3841063"/>
+            <a:ext cx="192024" cy="187452"/>
+          </a:xfrm>
+          <a:prstGeom prst="roundRect">
+            <a:avLst/>
+          </a:prstGeom>
+          <a:solidFill>
+            <a:srgbClr val="9600FF"/>
+          </a:solidFill>
+          <a:ln>
+            <a:noFill/>
+          </a:ln>
+        </p:spPr>
+        <p:style>
+          <a:lnRef idx="2">
+            <a:schemeClr val="accent1">
+              <a:shade val="50000"/>
+            </a:schemeClr>
+          </a:lnRef>
+          <a:fillRef idx="1">
+            <a:schemeClr val="accent1"/>
+          </a:fillRef>
+          <a:effectRef idx="0">
+            <a:schemeClr val="accent1"/>
+          </a:effectRef>
+          <a:fontRef idx="minor">
+            <a:schemeClr val="lt1"/>
+          </a:fontRef>
+        </p:style>
+        <p:txBody>
+          <a:bodyPr rtlCol="0" anchor="ctr"/>
+          <a:lstStyle/>
+          <a:p>
+            <a:pPr algn="ctr"/>
+            <a:endParaRPr lang="en-US"/>
+          </a:p>
+        </p:txBody>
+      </p:sp>
+      <p:sp>
+        <p:nvSpPr>
+          <p:cNvPr id="88" name="TextBox 87">
+            <a:extLst>
+              <a:ext uri="{FF2B5EF4-FFF2-40B4-BE49-F238E27FC236}">
+                <a16:creationId xmlns:a16="http://schemas.microsoft.com/office/drawing/2014/main" id="{C4844579-8C63-A7CA-085B-7A784E00B47D}"/>
+              </a:ext>
+            </a:extLst>
+          </p:cNvPr>
+          <p:cNvSpPr txBox="1"/>
+          <p:nvPr/>
+        </p:nvSpPr>
+        <p:spPr>
+          <a:xfrm>
+            <a:off x="7829620" y="4077699"/>
+            <a:ext cx="0" cy="0"/>
+          </a:xfrm>
+          <a:prstGeom prst="rect">
+            <a:avLst/>
+          </a:prstGeom>
+          <a:noFill/>
+        </p:spPr>
+        <p:txBody>
+          <a:bodyPr wrap="none" lIns="0" tIns="0" rIns="0" bIns="0" rtlCol="0">
+            <a:noAutofit/>
+          </a:bodyPr>
+          <a:lstStyle/>
+          <a:p>
+            <a:pPr defTabSz="228600">
+              <a:spcAft>
+                <a:spcPts val="1200"/>
+              </a:spcAft>
+            </a:pPr>
+            <a:endParaRPr lang="de-DE" dirty="0"/>
+          </a:p>
+        </p:txBody>
+      </p:sp>
+      <p:sp>
+        <p:nvSpPr>
+          <p:cNvPr id="89" name="TextBox 88">
+            <a:extLst>
+              <a:ext uri="{FF2B5EF4-FFF2-40B4-BE49-F238E27FC236}">
+                <a16:creationId xmlns:a16="http://schemas.microsoft.com/office/drawing/2014/main" id="{36287444-9D57-0E6B-F538-BC3355151BA2}"/>
+              </a:ext>
+            </a:extLst>
+          </p:cNvPr>
+          <p:cNvSpPr txBox="1"/>
+          <p:nvPr/>
+        </p:nvSpPr>
+        <p:spPr>
+          <a:xfrm>
+            <a:off x="6533828" y="3622755"/>
+            <a:ext cx="1666555" cy="197028"/>
+          </a:xfrm>
+          <a:prstGeom prst="rect">
+            <a:avLst/>
+          </a:prstGeom>
+          <a:noFill/>
+        </p:spPr>
+        <p:txBody>
+          <a:bodyPr wrap="none" lIns="0" tIns="0" rIns="0" bIns="0" rtlCol="0">
+            <a:noAutofit/>
+          </a:bodyPr>
+          <a:lstStyle/>
+          <a:p>
+            <a:pPr defTabSz="228600">
+              <a:spcAft>
+                <a:spcPts val="1200"/>
+              </a:spcAft>
+            </a:pPr>
+            <a:r>
+              <a:rPr lang="de-DE" sz="700" dirty="0"/>
+              <a:t>priv.pay.transaction-flagged-enriched.delta.v1</a:t>
+            </a:r>
+          </a:p>
+        </p:txBody>
+      </p:sp>
+      <p:cxnSp>
+        <p:nvCxnSpPr>
+          <p:cNvPr id="90" name="Straight Arrow Connector 47">
+            <a:extLst>
+              <a:ext uri="{FF2B5EF4-FFF2-40B4-BE49-F238E27FC236}">
+                <a16:creationId xmlns:a16="http://schemas.microsoft.com/office/drawing/2014/main" id="{7B5F46C3-7DF0-1008-7344-8E6F2A2DAF99}"/>
+              </a:ext>
+            </a:extLst>
+          </p:cNvPr>
+          <p:cNvCxnSpPr>
+            <a:cxnSpLocks/>
+            <a:stCxn id="68" idx="3"/>
+            <a:endCxn id="85" idx="3"/>
+          </p:cNvCxnSpPr>
+          <p:nvPr/>
+        </p:nvCxnSpPr>
+        <p:spPr>
+          <a:xfrm flipV="1">
+            <a:off x="6423739" y="3928274"/>
+            <a:ext cx="391875" cy="29"/>
+          </a:xfrm>
+          <a:prstGeom prst="curvedConnector3">
+            <a:avLst>
+              <a:gd name="adj1" fmla="val 50000"/>
+            </a:avLst>
+          </a:prstGeom>
+          <a:ln>
+            <a:solidFill>
+              <a:srgbClr val="5A00D2"/>
+            </a:solidFill>
+            <a:tailEnd type="triangle"/>
+          </a:ln>
+        </p:spPr>
+        <p:style>
+          <a:lnRef idx="1">
+            <a:schemeClr val="accent1"/>
+          </a:lnRef>
+          <a:fillRef idx="0">
+            <a:schemeClr val="accent1"/>
+          </a:fillRef>
+          <a:effectRef idx="0">
+            <a:schemeClr val="accent1"/>
+          </a:effectRef>
+          <a:fontRef idx="minor">
+            <a:schemeClr val="tx1"/>
+          </a:fontRef>
+        </p:style>
+      </p:cxnSp>
+      <p:cxnSp>
+        <p:nvCxnSpPr>
+          <p:cNvPr id="91" name="Straight Arrow Connector 47">
+            <a:extLst>
+              <a:ext uri="{FF2B5EF4-FFF2-40B4-BE49-F238E27FC236}">
+                <a16:creationId xmlns:a16="http://schemas.microsoft.com/office/drawing/2014/main" id="{12E434F5-CB46-ED0A-BB93-453EA26009ED}"/>
+              </a:ext>
+            </a:extLst>
+          </p:cNvPr>
+          <p:cNvCxnSpPr>
+            <a:cxnSpLocks/>
+            <a:stCxn id="85" idx="1"/>
+            <a:endCxn id="112" idx="1"/>
+          </p:cNvCxnSpPr>
+          <p:nvPr/>
+        </p:nvCxnSpPr>
+        <p:spPr>
+          <a:xfrm flipV="1">
+            <a:off x="7730947" y="3927797"/>
+            <a:ext cx="2624072" cy="477"/>
+          </a:xfrm>
+          <a:prstGeom prst="curvedConnector3">
+            <a:avLst>
+              <a:gd name="adj1" fmla="val 50000"/>
+            </a:avLst>
+          </a:prstGeom>
+          <a:ln>
+            <a:solidFill>
+              <a:srgbClr val="5A00D2"/>
+            </a:solidFill>
+            <a:tailEnd type="triangle"/>
+          </a:ln>
+        </p:spPr>
+        <p:style>
+          <a:lnRef idx="1">
+            <a:schemeClr val="accent1"/>
+          </a:lnRef>
+          <a:fillRef idx="0">
+            <a:schemeClr val="accent1"/>
+          </a:fillRef>
+          <a:effectRef idx="0">
+            <a:schemeClr val="accent1"/>
+          </a:effectRef>
+          <a:fontRef idx="minor">
+            <a:schemeClr val="tx1"/>
+          </a:fontRef>
+        </p:style>
+      </p:cxnSp>
+      <p:cxnSp>
+        <p:nvCxnSpPr>
+          <p:cNvPr id="96" name="Straight Arrow Connector 47">
+            <a:extLst>
+              <a:ext uri="{FF2B5EF4-FFF2-40B4-BE49-F238E27FC236}">
+                <a16:creationId xmlns:a16="http://schemas.microsoft.com/office/drawing/2014/main" id="{48B3B30F-9495-C278-7973-C8BDA2D18B5D}"/>
+              </a:ext>
+            </a:extLst>
+          </p:cNvPr>
+          <p:cNvCxnSpPr>
+            <a:cxnSpLocks/>
+            <a:stCxn id="47" idx="1"/>
+            <a:endCxn id="44" idx="1"/>
+          </p:cNvCxnSpPr>
+          <p:nvPr/>
+        </p:nvCxnSpPr>
+        <p:spPr>
+          <a:xfrm flipV="1">
+            <a:off x="3004445" y="3923149"/>
+            <a:ext cx="408255" cy="601806"/>
+          </a:xfrm>
+          <a:prstGeom prst="curvedConnector3">
+            <a:avLst>
+              <a:gd name="adj1" fmla="val 50000"/>
+            </a:avLst>
+          </a:prstGeom>
+          <a:ln>
+            <a:solidFill>
+              <a:srgbClr val="5A00D2"/>
+            </a:solidFill>
+            <a:tailEnd type="triangle"/>
+          </a:ln>
+        </p:spPr>
+        <p:style>
+          <a:lnRef idx="1">
+            <a:schemeClr val="accent1"/>
+          </a:lnRef>
+          <a:fillRef idx="0">
+            <a:schemeClr val="accent1"/>
+          </a:fillRef>
+          <a:effectRef idx="0">
+            <a:schemeClr val="accent1"/>
+          </a:effectRef>
+          <a:fontRef idx="minor">
+            <a:schemeClr val="tx1"/>
+          </a:fontRef>
+        </p:style>
+      </p:cxnSp>
+      <p:sp>
+        <p:nvSpPr>
+          <p:cNvPr id="112" name="Rounded Rectangle 111">
+            <a:extLst>
+              <a:ext uri="{FF2B5EF4-FFF2-40B4-BE49-F238E27FC236}">
+                <a16:creationId xmlns:a16="http://schemas.microsoft.com/office/drawing/2014/main" id="{0CA5A5D0-6AF6-B8F9-33A5-565DF54E0C12}"/>
+              </a:ext>
+            </a:extLst>
+          </p:cNvPr>
+          <p:cNvSpPr/>
+          <p:nvPr/>
+        </p:nvSpPr>
+        <p:spPr>
+          <a:xfrm>
+            <a:off x="10355019" y="3824722"/>
+            <a:ext cx="659078" cy="206150"/>
+          </a:xfrm>
+          <a:prstGeom prst="roundRect">
+            <a:avLst/>
+          </a:prstGeom>
+          <a:solidFill>
+            <a:schemeClr val="accent3">
+              <a:lumMod val="60000"/>
+              <a:lumOff val="40000"/>
+            </a:schemeClr>
+          </a:solidFill>
+          <a:ln>
+            <a:solidFill>
+              <a:schemeClr val="accent1"/>
+            </a:solidFill>
+          </a:ln>
+        </p:spPr>
+        <p:style>
+          <a:lnRef idx="2">
+            <a:schemeClr val="accent1">
+              <a:shade val="50000"/>
+            </a:schemeClr>
+          </a:lnRef>
+          <a:fillRef idx="1">
+            <a:schemeClr val="accent1"/>
+          </a:fillRef>
+          <a:effectRef idx="0">
+            <a:schemeClr val="accent1"/>
+          </a:effectRef>
+          <a:fontRef idx="minor">
+            <a:schemeClr val="lt1"/>
+          </a:fontRef>
+        </p:style>
+        <p:txBody>
           <a:bodyPr lIns="0" tIns="0" rIns="0" bIns="0" rtlCol="0" anchor="ctr"/>
           <a:lstStyle/>
           <a:p>
             <a:pPr algn="ctr"/>
             <a:r>
               <a:rPr lang="en-US" sz="700" b="1" dirty="0"/>
-              <a:t>File to Kafka</a:t>
-            </a:r>
-          </a:p>
-        </p:txBody>
-      </p:sp>
+              <a:t>Iceberg Sink</a:t>
+            </a:r>
+          </a:p>
+        </p:txBody>
+      </p:sp>
+      <p:sp>
+        <p:nvSpPr>
+          <p:cNvPr id="113" name="Rounded Rectangle 112">
+            <a:extLst>
+              <a:ext uri="{FF2B5EF4-FFF2-40B4-BE49-F238E27FC236}">
+                <a16:creationId xmlns:a16="http://schemas.microsoft.com/office/drawing/2014/main" id="{8AA18822-C3BA-51BA-E9E7-95C26D1F59B2}"/>
+              </a:ext>
+            </a:extLst>
+          </p:cNvPr>
+          <p:cNvSpPr/>
+          <p:nvPr/>
+        </p:nvSpPr>
+        <p:spPr>
+          <a:xfrm>
+            <a:off x="10355019" y="1439424"/>
+            <a:ext cx="659078" cy="206150"/>
+          </a:xfrm>
+          <a:prstGeom prst="roundRect">
+            <a:avLst/>
+          </a:prstGeom>
+          <a:solidFill>
+            <a:schemeClr val="accent3">
+              <a:lumMod val="60000"/>
+              <a:lumOff val="40000"/>
+            </a:schemeClr>
+          </a:solidFill>
+          <a:ln>
+            <a:solidFill>
+              <a:schemeClr val="accent1"/>
+            </a:solidFill>
+          </a:ln>
+        </p:spPr>
+        <p:style>
+          <a:lnRef idx="2">
+            <a:schemeClr val="accent1">
+              <a:shade val="50000"/>
+            </a:schemeClr>
+          </a:lnRef>
+          <a:fillRef idx="1">
+            <a:schemeClr val="accent1"/>
+          </a:fillRef>
+          <a:effectRef idx="0">
+            <a:schemeClr val="accent1"/>
+          </a:effectRef>
+          <a:fontRef idx="minor">
+            <a:schemeClr val="lt1"/>
+          </a:fontRef>
+        </p:style>
+        <p:txBody>
+          <a:bodyPr lIns="0" tIns="0" rIns="0" bIns="0" rtlCol="0" anchor="ctr"/>
+          <a:lstStyle/>
+          <a:p>
+            <a:pPr algn="ctr"/>
+            <a:r>
+              <a:rPr lang="en-US" sz="700" b="1" dirty="0"/>
+              <a:t>Iceberg Sink</a:t>
+            </a:r>
+          </a:p>
+        </p:txBody>
+      </p:sp>
+      <p:cxnSp>
+        <p:nvCxnSpPr>
+          <p:cNvPr id="114" name="Straight Arrow Connector 47">
+            <a:extLst>
+              <a:ext uri="{FF2B5EF4-FFF2-40B4-BE49-F238E27FC236}">
+                <a16:creationId xmlns:a16="http://schemas.microsoft.com/office/drawing/2014/main" id="{AE20E13C-661B-063A-4F3F-09BFE92DFB48}"/>
+              </a:ext>
+            </a:extLst>
+          </p:cNvPr>
+          <p:cNvCxnSpPr>
+            <a:cxnSpLocks/>
+            <a:stCxn id="8" idx="1"/>
+            <a:endCxn id="113" idx="1"/>
+          </p:cNvCxnSpPr>
+          <p:nvPr/>
+        </p:nvCxnSpPr>
+        <p:spPr>
+          <a:xfrm flipV="1">
+            <a:off x="4378921" y="1542501"/>
+            <a:ext cx="5976098" cy="6433"/>
+          </a:xfrm>
+          <a:prstGeom prst="curvedConnector3">
+            <a:avLst>
+              <a:gd name="adj1" fmla="val 50000"/>
+            </a:avLst>
+          </a:prstGeom>
+          <a:ln>
+            <a:solidFill>
+              <a:srgbClr val="5A00D2"/>
+            </a:solidFill>
+            <a:tailEnd type="triangle"/>
+          </a:ln>
+        </p:spPr>
+        <p:style>
+          <a:lnRef idx="1">
+            <a:schemeClr val="accent1"/>
+          </a:lnRef>
+          <a:fillRef idx="0">
+            <a:schemeClr val="accent1"/>
+          </a:fillRef>
+          <a:effectRef idx="0">
+            <a:schemeClr val="accent1"/>
+          </a:effectRef>
+          <a:fontRef idx="minor">
+            <a:schemeClr val="tx1"/>
+          </a:fontRef>
+        </p:style>
+      </p:cxnSp>
       <p:pic>
         <p:nvPicPr>
-          <p:cNvPr id="1130" name="Graphic 1129" descr="Paper outline">
-            <a:extLst>
-              <a:ext uri="{FF2B5EF4-FFF2-40B4-BE49-F238E27FC236}">
-                <a16:creationId xmlns:a16="http://schemas.microsoft.com/office/drawing/2014/main" id="{5B0D81CB-2580-68D2-AE71-CE135599C2B8}"/>
+          <p:cNvPr id="123" name="Graphic 122" descr="Table outline">
+            <a:extLst>
+              <a:ext uri="{FF2B5EF4-FFF2-40B4-BE49-F238E27FC236}">
+                <a16:creationId xmlns:a16="http://schemas.microsoft.com/office/drawing/2014/main" id="{583D8B0D-341D-0B23-8970-91095DF8F5B2}"/>
               </a:ext>
             </a:extLst>
           </p:cNvPr>
@@ -44336,7 +47227,7 @@
           <a:blip>
             <a:extLst>
               <a:ext uri="{96DAC541-7B7A-43D3-8B79-37D633B846F1}">
-                <asvg:svgBlip xmlns:asvg="http://schemas.microsoft.com/office/drawing/2016/SVG/main" r:embed="rId4"/>
+                <asvg:svgBlip xmlns:asvg="http://schemas.microsoft.com/office/drawing/2016/SVG/main" r:embed="rId2"/>
               </a:ext>
             </a:extLst>
           </a:blip>
@@ -44346,7 +47237,2916 @@
         </p:blipFill>
         <p:spPr>
           <a:xfrm>
-            <a:off x="4417530" y="6245589"/>
+            <a:off x="11416364" y="1293794"/>
+            <a:ext cx="481251" cy="481251"/>
+          </a:xfrm>
+          <a:prstGeom prst="rect">
+            <a:avLst/>
+          </a:prstGeom>
+        </p:spPr>
+      </p:pic>
+      <p:pic>
+        <p:nvPicPr>
+          <p:cNvPr id="126" name="Graphic 125" descr="Table outline">
+            <a:extLst>
+              <a:ext uri="{FF2B5EF4-FFF2-40B4-BE49-F238E27FC236}">
+                <a16:creationId xmlns:a16="http://schemas.microsoft.com/office/drawing/2014/main" id="{2AE2F29F-0DF8-7FA8-26AE-E950326B5181}"/>
+              </a:ext>
+            </a:extLst>
+          </p:cNvPr>
+          <p:cNvPicPr>
+            <a:picLocks noChangeAspect="1"/>
+          </p:cNvPicPr>
+          <p:nvPr/>
+        </p:nvPicPr>
+        <p:blipFill>
+          <a:blip>
+            <a:extLst>
+              <a:ext uri="{96DAC541-7B7A-43D3-8B79-37D633B846F1}">
+                <asvg:svgBlip xmlns:asvg="http://schemas.microsoft.com/office/drawing/2016/SVG/main" r:embed="rId2"/>
+              </a:ext>
+            </a:extLst>
+          </a:blip>
+          <a:stretch>
+            <a:fillRect/>
+          </a:stretch>
+        </p:blipFill>
+        <p:spPr>
+          <a:xfrm>
+            <a:off x="11416364" y="3686462"/>
+            <a:ext cx="481251" cy="481251"/>
+          </a:xfrm>
+          <a:prstGeom prst="rect">
+            <a:avLst/>
+          </a:prstGeom>
+        </p:spPr>
+      </p:pic>
+      <p:sp>
+        <p:nvSpPr>
+          <p:cNvPr id="127" name="Rounded Rectangle 126">
+            <a:extLst>
+              <a:ext uri="{FF2B5EF4-FFF2-40B4-BE49-F238E27FC236}">
+                <a16:creationId xmlns:a16="http://schemas.microsoft.com/office/drawing/2014/main" id="{0A561DB0-4BB6-6904-DBBB-1F14A1C8509C}"/>
+              </a:ext>
+            </a:extLst>
+          </p:cNvPr>
+          <p:cNvSpPr/>
+          <p:nvPr/>
+        </p:nvSpPr>
+        <p:spPr>
+          <a:xfrm>
+            <a:off x="12719472" y="1423946"/>
+            <a:ext cx="659078" cy="206150"/>
+          </a:xfrm>
+          <a:prstGeom prst="roundRect">
+            <a:avLst/>
+          </a:prstGeom>
+          <a:solidFill>
+            <a:schemeClr val="accent3">
+              <a:lumMod val="60000"/>
+              <a:lumOff val="40000"/>
+            </a:schemeClr>
+          </a:solidFill>
+          <a:ln>
+            <a:solidFill>
+              <a:schemeClr val="accent1"/>
+            </a:solidFill>
+          </a:ln>
+        </p:spPr>
+        <p:style>
+          <a:lnRef idx="2">
+            <a:schemeClr val="accent1">
+              <a:shade val="50000"/>
+            </a:schemeClr>
+          </a:lnRef>
+          <a:fillRef idx="1">
+            <a:schemeClr val="accent1"/>
+          </a:fillRef>
+          <a:effectRef idx="0">
+            <a:schemeClr val="accent1"/>
+          </a:effectRef>
+          <a:fontRef idx="minor">
+            <a:schemeClr val="lt1"/>
+          </a:fontRef>
+        </p:style>
+        <p:txBody>
+          <a:bodyPr lIns="0" tIns="0" rIns="0" bIns="0" rtlCol="0" anchor="ctr"/>
+          <a:lstStyle/>
+          <a:p>
+            <a:pPr algn="ctr"/>
+            <a:r>
+              <a:rPr lang="en-US" sz="700" b="1" dirty="0"/>
+              <a:t>Normalizer</a:t>
+            </a:r>
+          </a:p>
+        </p:txBody>
+      </p:sp>
+      <p:pic>
+        <p:nvPicPr>
+          <p:cNvPr id="128" name="Graphic 127" descr="Table outline">
+            <a:extLst>
+              <a:ext uri="{FF2B5EF4-FFF2-40B4-BE49-F238E27FC236}">
+                <a16:creationId xmlns:a16="http://schemas.microsoft.com/office/drawing/2014/main" id="{0EF0C1D4-E297-C903-EBA2-F60487FC323D}"/>
+              </a:ext>
+            </a:extLst>
+          </p:cNvPr>
+          <p:cNvPicPr>
+            <a:picLocks noChangeAspect="1"/>
+          </p:cNvPicPr>
+          <p:nvPr/>
+        </p:nvPicPr>
+        <p:blipFill>
+          <a:blip>
+            <a:extLst>
+              <a:ext uri="{96DAC541-7B7A-43D3-8B79-37D633B846F1}">
+                <asvg:svgBlip xmlns:asvg="http://schemas.microsoft.com/office/drawing/2016/SVG/main" r:embed="rId2"/>
+              </a:ext>
+            </a:extLst>
+          </a:blip>
+          <a:stretch>
+            <a:fillRect/>
+          </a:stretch>
+        </p:blipFill>
+        <p:spPr>
+          <a:xfrm>
+            <a:off x="13990364" y="711181"/>
+            <a:ext cx="481251" cy="481251"/>
+          </a:xfrm>
+          <a:prstGeom prst="rect">
+            <a:avLst/>
+          </a:prstGeom>
+        </p:spPr>
+      </p:pic>
+      <p:pic>
+        <p:nvPicPr>
+          <p:cNvPr id="129" name="Graphic 128" descr="Table outline">
+            <a:extLst>
+              <a:ext uri="{FF2B5EF4-FFF2-40B4-BE49-F238E27FC236}">
+                <a16:creationId xmlns:a16="http://schemas.microsoft.com/office/drawing/2014/main" id="{CCA7591B-B6AF-58FC-0E56-37BE2B3A189C}"/>
+              </a:ext>
+            </a:extLst>
+          </p:cNvPr>
+          <p:cNvPicPr>
+            <a:picLocks noChangeAspect="1"/>
+          </p:cNvPicPr>
+          <p:nvPr/>
+        </p:nvPicPr>
+        <p:blipFill>
+          <a:blip>
+            <a:extLst>
+              <a:ext uri="{96DAC541-7B7A-43D3-8B79-37D633B846F1}">
+                <asvg:svgBlip xmlns:asvg="http://schemas.microsoft.com/office/drawing/2016/SVG/main" r:embed="rId2"/>
+              </a:ext>
+            </a:extLst>
+          </a:blip>
+          <a:stretch>
+            <a:fillRect/>
+          </a:stretch>
+        </p:blipFill>
+        <p:spPr>
+          <a:xfrm>
+            <a:off x="13990363" y="1873076"/>
+            <a:ext cx="481251" cy="481251"/>
+          </a:xfrm>
+          <a:prstGeom prst="rect">
+            <a:avLst/>
+          </a:prstGeom>
+        </p:spPr>
+      </p:pic>
+      <p:pic>
+        <p:nvPicPr>
+          <p:cNvPr id="130" name="Graphic 129" descr="Table outline">
+            <a:extLst>
+              <a:ext uri="{FF2B5EF4-FFF2-40B4-BE49-F238E27FC236}">
+                <a16:creationId xmlns:a16="http://schemas.microsoft.com/office/drawing/2014/main" id="{03A996E0-91AB-BA85-DB78-18E112D40135}"/>
+              </a:ext>
+            </a:extLst>
+          </p:cNvPr>
+          <p:cNvPicPr>
+            <a:picLocks noChangeAspect="1"/>
+          </p:cNvPicPr>
+          <p:nvPr/>
+        </p:nvPicPr>
+        <p:blipFill>
+          <a:blip>
+            <a:extLst>
+              <a:ext uri="{96DAC541-7B7A-43D3-8B79-37D633B846F1}">
+                <asvg:svgBlip xmlns:asvg="http://schemas.microsoft.com/office/drawing/2016/SVG/main" r:embed="rId2"/>
+              </a:ext>
+            </a:extLst>
+          </a:blip>
+          <a:stretch>
+            <a:fillRect/>
+          </a:stretch>
+        </p:blipFill>
+        <p:spPr>
+          <a:xfrm>
+            <a:off x="13990363" y="1289820"/>
+            <a:ext cx="481251" cy="481251"/>
+          </a:xfrm>
+          <a:prstGeom prst="rect">
+            <a:avLst/>
+          </a:prstGeom>
+        </p:spPr>
+      </p:pic>
+      <p:pic>
+        <p:nvPicPr>
+          <p:cNvPr id="131" name="Graphic 130" descr="Table outline">
+            <a:extLst>
+              <a:ext uri="{FF2B5EF4-FFF2-40B4-BE49-F238E27FC236}">
+                <a16:creationId xmlns:a16="http://schemas.microsoft.com/office/drawing/2014/main" id="{31CB647E-C000-CB31-D97D-1509D6A8C28C}"/>
+              </a:ext>
+            </a:extLst>
+          </p:cNvPr>
+          <p:cNvPicPr>
+            <a:picLocks noChangeAspect="1"/>
+          </p:cNvPicPr>
+          <p:nvPr/>
+        </p:nvPicPr>
+        <p:blipFill>
+          <a:blip>
+            <a:extLst>
+              <a:ext uri="{96DAC541-7B7A-43D3-8B79-37D633B846F1}">
+                <asvg:svgBlip xmlns:asvg="http://schemas.microsoft.com/office/drawing/2016/SVG/main" r:embed="rId2"/>
+              </a:ext>
+            </a:extLst>
+          </a:blip>
+          <a:stretch>
+            <a:fillRect/>
+          </a:stretch>
+        </p:blipFill>
+        <p:spPr>
+          <a:xfrm>
+            <a:off x="14207134" y="3007072"/>
+            <a:ext cx="481251" cy="481251"/>
+          </a:xfrm>
+          <a:prstGeom prst="rect">
+            <a:avLst/>
+          </a:prstGeom>
+        </p:spPr>
+      </p:pic>
+      <p:cxnSp>
+        <p:nvCxnSpPr>
+          <p:cNvPr id="132" name="Straight Arrow Connector 47">
+            <a:extLst>
+              <a:ext uri="{FF2B5EF4-FFF2-40B4-BE49-F238E27FC236}">
+                <a16:creationId xmlns:a16="http://schemas.microsoft.com/office/drawing/2014/main" id="{30ED2ED0-0511-9989-54F9-B9CAE61EA135}"/>
+              </a:ext>
+            </a:extLst>
+          </p:cNvPr>
+          <p:cNvCxnSpPr>
+            <a:cxnSpLocks/>
+            <a:stCxn id="113" idx="3"/>
+            <a:endCxn id="123" idx="1"/>
+          </p:cNvCxnSpPr>
+          <p:nvPr/>
+        </p:nvCxnSpPr>
+        <p:spPr>
+          <a:xfrm flipV="1">
+            <a:off x="11014099" y="1534420"/>
+            <a:ext cx="402265" cy="8081"/>
+          </a:xfrm>
+          <a:prstGeom prst="curvedConnector3">
+            <a:avLst>
+              <a:gd name="adj1" fmla="val 50000"/>
+            </a:avLst>
+          </a:prstGeom>
+          <a:ln>
+            <a:solidFill>
+              <a:srgbClr val="5A00D2"/>
+            </a:solidFill>
+            <a:tailEnd type="triangle"/>
+          </a:ln>
+        </p:spPr>
+        <p:style>
+          <a:lnRef idx="1">
+            <a:schemeClr val="accent1"/>
+          </a:lnRef>
+          <a:fillRef idx="0">
+            <a:schemeClr val="accent1"/>
+          </a:fillRef>
+          <a:effectRef idx="0">
+            <a:schemeClr val="accent1"/>
+          </a:effectRef>
+          <a:fontRef idx="minor">
+            <a:schemeClr val="tx1"/>
+          </a:fontRef>
+        </p:style>
+      </p:cxnSp>
+      <p:cxnSp>
+        <p:nvCxnSpPr>
+          <p:cNvPr id="135" name="Straight Arrow Connector 47">
+            <a:extLst>
+              <a:ext uri="{FF2B5EF4-FFF2-40B4-BE49-F238E27FC236}">
+                <a16:creationId xmlns:a16="http://schemas.microsoft.com/office/drawing/2014/main" id="{FE78D063-E601-4EB6-1C45-F0001F8DE121}"/>
+              </a:ext>
+            </a:extLst>
+          </p:cNvPr>
+          <p:cNvCxnSpPr>
+            <a:cxnSpLocks/>
+            <a:stCxn id="123" idx="3"/>
+            <a:endCxn id="127" idx="1"/>
+          </p:cNvCxnSpPr>
+          <p:nvPr/>
+        </p:nvCxnSpPr>
+        <p:spPr>
+          <a:xfrm flipV="1">
+            <a:off x="11897615" y="1527023"/>
+            <a:ext cx="821859" cy="7397"/>
+          </a:xfrm>
+          <a:prstGeom prst="curvedConnector3">
+            <a:avLst>
+              <a:gd name="adj1" fmla="val 50000"/>
+            </a:avLst>
+          </a:prstGeom>
+          <a:ln>
+            <a:solidFill>
+              <a:srgbClr val="5A00D2"/>
+            </a:solidFill>
+            <a:tailEnd type="triangle"/>
+          </a:ln>
+        </p:spPr>
+        <p:style>
+          <a:lnRef idx="1">
+            <a:schemeClr val="accent1"/>
+          </a:lnRef>
+          <a:fillRef idx="0">
+            <a:schemeClr val="accent1"/>
+          </a:fillRef>
+          <a:effectRef idx="0">
+            <a:schemeClr val="accent1"/>
+          </a:effectRef>
+          <a:fontRef idx="minor">
+            <a:schemeClr val="tx1"/>
+          </a:fontRef>
+        </p:style>
+      </p:cxnSp>
+      <p:pic>
+        <p:nvPicPr>
+          <p:cNvPr id="1026" name="Picture 2" descr="bucket Icon - Free PNG &amp; SVG 394460 - Noun Project">
+            <a:extLst>
+              <a:ext uri="{FF2B5EF4-FFF2-40B4-BE49-F238E27FC236}">
+                <a16:creationId xmlns:a16="http://schemas.microsoft.com/office/drawing/2014/main" id="{8BA31AF5-0591-1E3D-E376-84400805EC66}"/>
+              </a:ext>
+            </a:extLst>
+          </p:cNvPr>
+          <p:cNvPicPr>
+            <a:picLocks noChangeAspect="1" noChangeArrowheads="1"/>
+          </p:cNvPicPr>
+          <p:nvPr/>
+        </p:nvPicPr>
+        <p:blipFill>
+          <a:blip r:embed="rId3">
+            <a:extLst>
+              <a:ext uri="{28A0092B-C50C-407E-A947-70E740481C1C}">
+                <a14:useLocalDpi xmlns:a14="http://schemas.microsoft.com/office/drawing/2010/main" val="0"/>
+              </a:ext>
+            </a:extLst>
+          </a:blip>
+          <a:srcRect/>
+          <a:stretch>
+            <a:fillRect/>
+          </a:stretch>
+        </p:blipFill>
+        <p:spPr bwMode="auto">
+          <a:xfrm>
+            <a:off x="11415490" y="1523984"/>
+            <a:ext cx="198421" cy="198421"/>
+          </a:xfrm>
+          <a:prstGeom prst="rect">
+            <a:avLst/>
+          </a:prstGeom>
+          <a:solidFill>
+            <a:schemeClr val="bg1"/>
+          </a:solidFill>
+        </p:spPr>
+      </p:pic>
+      <p:pic>
+        <p:nvPicPr>
+          <p:cNvPr id="138" name="Picture 2" descr="bucket Icon - Free PNG &amp; SVG 394460 - Noun Project">
+            <a:extLst>
+              <a:ext uri="{FF2B5EF4-FFF2-40B4-BE49-F238E27FC236}">
+                <a16:creationId xmlns:a16="http://schemas.microsoft.com/office/drawing/2014/main" id="{C1E28E9A-493E-5F09-620C-A388210EE80F}"/>
+              </a:ext>
+            </a:extLst>
+          </p:cNvPr>
+          <p:cNvPicPr>
+            <a:picLocks noChangeAspect="1" noChangeArrowheads="1"/>
+          </p:cNvPicPr>
+          <p:nvPr/>
+        </p:nvPicPr>
+        <p:blipFill>
+          <a:blip r:embed="rId3">
+            <a:extLst>
+              <a:ext uri="{28A0092B-C50C-407E-A947-70E740481C1C}">
+                <a14:useLocalDpi xmlns:a14="http://schemas.microsoft.com/office/drawing/2010/main" val="0"/>
+              </a:ext>
+            </a:extLst>
+          </a:blip>
+          <a:srcRect/>
+          <a:stretch>
+            <a:fillRect/>
+          </a:stretch>
+        </p:blipFill>
+        <p:spPr bwMode="auto">
+          <a:xfrm>
+            <a:off x="11382624" y="3935168"/>
+            <a:ext cx="198421" cy="198421"/>
+          </a:xfrm>
+          <a:prstGeom prst="rect">
+            <a:avLst/>
+          </a:prstGeom>
+          <a:solidFill>
+            <a:schemeClr val="bg1"/>
+          </a:solidFill>
+        </p:spPr>
+      </p:pic>
+      <p:pic>
+        <p:nvPicPr>
+          <p:cNvPr id="139" name="Picture 2" descr="bucket Icon - Free PNG &amp; SVG 394460 - Noun Project">
+            <a:extLst>
+              <a:ext uri="{FF2B5EF4-FFF2-40B4-BE49-F238E27FC236}">
+                <a16:creationId xmlns:a16="http://schemas.microsoft.com/office/drawing/2014/main" id="{0C5FD7B8-9777-B3F8-B7BC-2178F60E77DD}"/>
+              </a:ext>
+            </a:extLst>
+          </p:cNvPr>
+          <p:cNvPicPr>
+            <a:picLocks noChangeAspect="1" noChangeArrowheads="1"/>
+          </p:cNvPicPr>
+          <p:nvPr/>
+        </p:nvPicPr>
+        <p:blipFill>
+          <a:blip r:embed="rId3">
+            <a:extLst>
+              <a:ext uri="{28A0092B-C50C-407E-A947-70E740481C1C}">
+                <a14:useLocalDpi xmlns:a14="http://schemas.microsoft.com/office/drawing/2010/main" val="0"/>
+              </a:ext>
+            </a:extLst>
+          </a:blip>
+          <a:srcRect/>
+          <a:stretch>
+            <a:fillRect/>
+          </a:stretch>
+        </p:blipFill>
+        <p:spPr bwMode="auto">
+          <a:xfrm>
+            <a:off x="13968228" y="981219"/>
+            <a:ext cx="198421" cy="198421"/>
+          </a:xfrm>
+          <a:prstGeom prst="rect">
+            <a:avLst/>
+          </a:prstGeom>
+          <a:solidFill>
+            <a:schemeClr val="bg1"/>
+          </a:solidFill>
+        </p:spPr>
+      </p:pic>
+      <p:pic>
+        <p:nvPicPr>
+          <p:cNvPr id="140" name="Picture 2" descr="bucket Icon - Free PNG &amp; SVG 394460 - Noun Project">
+            <a:extLst>
+              <a:ext uri="{FF2B5EF4-FFF2-40B4-BE49-F238E27FC236}">
+                <a16:creationId xmlns:a16="http://schemas.microsoft.com/office/drawing/2014/main" id="{43E2D626-564B-FB59-AA93-DED62929DAFB}"/>
+              </a:ext>
+            </a:extLst>
+          </p:cNvPr>
+          <p:cNvPicPr>
+            <a:picLocks noChangeAspect="1" noChangeArrowheads="1"/>
+          </p:cNvPicPr>
+          <p:nvPr/>
+        </p:nvPicPr>
+        <p:blipFill>
+          <a:blip r:embed="rId3">
+            <a:extLst>
+              <a:ext uri="{28A0092B-C50C-407E-A947-70E740481C1C}">
+                <a14:useLocalDpi xmlns:a14="http://schemas.microsoft.com/office/drawing/2010/main" val="0"/>
+              </a:ext>
+            </a:extLst>
+          </a:blip>
+          <a:srcRect/>
+          <a:stretch>
+            <a:fillRect/>
+          </a:stretch>
+        </p:blipFill>
+        <p:spPr bwMode="auto">
+          <a:xfrm>
+            <a:off x="13960792" y="1552783"/>
+            <a:ext cx="198421" cy="198421"/>
+          </a:xfrm>
+          <a:prstGeom prst="rect">
+            <a:avLst/>
+          </a:prstGeom>
+          <a:solidFill>
+            <a:schemeClr val="bg1"/>
+          </a:solidFill>
+        </p:spPr>
+      </p:pic>
+      <p:pic>
+        <p:nvPicPr>
+          <p:cNvPr id="141" name="Picture 2" descr="bucket Icon - Free PNG &amp; SVG 394460 - Noun Project">
+            <a:extLst>
+              <a:ext uri="{FF2B5EF4-FFF2-40B4-BE49-F238E27FC236}">
+                <a16:creationId xmlns:a16="http://schemas.microsoft.com/office/drawing/2014/main" id="{6302E5D6-1C90-6582-0D21-532E6CD82201}"/>
+              </a:ext>
+            </a:extLst>
+          </p:cNvPr>
+          <p:cNvPicPr>
+            <a:picLocks noChangeAspect="1" noChangeArrowheads="1"/>
+          </p:cNvPicPr>
+          <p:nvPr/>
+        </p:nvPicPr>
+        <p:blipFill>
+          <a:blip r:embed="rId3">
+            <a:extLst>
+              <a:ext uri="{28A0092B-C50C-407E-A947-70E740481C1C}">
+                <a14:useLocalDpi xmlns:a14="http://schemas.microsoft.com/office/drawing/2010/main" val="0"/>
+              </a:ext>
+            </a:extLst>
+          </a:blip>
+          <a:srcRect/>
+          <a:stretch>
+            <a:fillRect/>
+          </a:stretch>
+        </p:blipFill>
+        <p:spPr bwMode="auto">
+          <a:xfrm>
+            <a:off x="13960792" y="2131422"/>
+            <a:ext cx="198421" cy="198421"/>
+          </a:xfrm>
+          <a:prstGeom prst="rect">
+            <a:avLst/>
+          </a:prstGeom>
+          <a:solidFill>
+            <a:schemeClr val="bg1"/>
+          </a:solidFill>
+        </p:spPr>
+      </p:pic>
+      <p:pic>
+        <p:nvPicPr>
+          <p:cNvPr id="142" name="Picture 2" descr="bucket Icon - Free PNG &amp; SVG 394460 - Noun Project">
+            <a:extLst>
+              <a:ext uri="{FF2B5EF4-FFF2-40B4-BE49-F238E27FC236}">
+                <a16:creationId xmlns:a16="http://schemas.microsoft.com/office/drawing/2014/main" id="{66F6E0A5-9514-344A-A95B-8D81471AD06E}"/>
+              </a:ext>
+            </a:extLst>
+          </p:cNvPr>
+          <p:cNvPicPr>
+            <a:picLocks noChangeAspect="1" noChangeArrowheads="1"/>
+          </p:cNvPicPr>
+          <p:nvPr/>
+        </p:nvPicPr>
+        <p:blipFill>
+          <a:blip r:embed="rId3">
+            <a:extLst>
+              <a:ext uri="{28A0092B-C50C-407E-A947-70E740481C1C}">
+                <a14:useLocalDpi xmlns:a14="http://schemas.microsoft.com/office/drawing/2010/main" val="0"/>
+              </a:ext>
+            </a:extLst>
+          </a:blip>
+          <a:srcRect/>
+          <a:stretch>
+            <a:fillRect/>
+          </a:stretch>
+        </p:blipFill>
+        <p:spPr bwMode="auto">
+          <a:xfrm>
+            <a:off x="14178399" y="3285285"/>
+            <a:ext cx="198421" cy="198421"/>
+          </a:xfrm>
+          <a:prstGeom prst="rect">
+            <a:avLst/>
+          </a:prstGeom>
+          <a:solidFill>
+            <a:schemeClr val="bg1"/>
+          </a:solidFill>
+        </p:spPr>
+      </p:pic>
+      <p:cxnSp>
+        <p:nvCxnSpPr>
+          <p:cNvPr id="143" name="Straight Arrow Connector 47">
+            <a:extLst>
+              <a:ext uri="{FF2B5EF4-FFF2-40B4-BE49-F238E27FC236}">
+                <a16:creationId xmlns:a16="http://schemas.microsoft.com/office/drawing/2014/main" id="{A7024DD0-CAA5-87E8-9A10-682DE1341086}"/>
+              </a:ext>
+            </a:extLst>
+          </p:cNvPr>
+          <p:cNvCxnSpPr>
+            <a:cxnSpLocks/>
+            <a:stCxn id="112" idx="3"/>
+            <a:endCxn id="126" idx="1"/>
+          </p:cNvCxnSpPr>
+          <p:nvPr/>
+        </p:nvCxnSpPr>
+        <p:spPr>
+          <a:xfrm flipV="1">
+            <a:off x="11014099" y="3927088"/>
+            <a:ext cx="402265" cy="711"/>
+          </a:xfrm>
+          <a:prstGeom prst="curvedConnector3">
+            <a:avLst>
+              <a:gd name="adj1" fmla="val 50000"/>
+            </a:avLst>
+          </a:prstGeom>
+          <a:ln>
+            <a:solidFill>
+              <a:srgbClr val="5A00D2"/>
+            </a:solidFill>
+            <a:tailEnd type="triangle"/>
+          </a:ln>
+        </p:spPr>
+        <p:style>
+          <a:lnRef idx="1">
+            <a:schemeClr val="accent1"/>
+          </a:lnRef>
+          <a:fillRef idx="0">
+            <a:schemeClr val="accent1"/>
+          </a:fillRef>
+          <a:effectRef idx="0">
+            <a:schemeClr val="accent1"/>
+          </a:effectRef>
+          <a:fontRef idx="minor">
+            <a:schemeClr val="tx1"/>
+          </a:fontRef>
+        </p:style>
+      </p:cxnSp>
+      <p:sp>
+        <p:nvSpPr>
+          <p:cNvPr id="146" name="Rounded Rectangle 145">
+            <a:extLst>
+              <a:ext uri="{FF2B5EF4-FFF2-40B4-BE49-F238E27FC236}">
+                <a16:creationId xmlns:a16="http://schemas.microsoft.com/office/drawing/2014/main" id="{EE9FEE0A-032E-1ED4-AD31-94A5A03A887F}"/>
+              </a:ext>
+            </a:extLst>
+          </p:cNvPr>
+          <p:cNvSpPr/>
+          <p:nvPr/>
+        </p:nvSpPr>
+        <p:spPr>
+          <a:xfrm>
+            <a:off x="10355019" y="3144348"/>
+            <a:ext cx="659078" cy="206150"/>
+          </a:xfrm>
+          <a:prstGeom prst="roundRect">
+            <a:avLst/>
+          </a:prstGeom>
+          <a:solidFill>
+            <a:schemeClr val="accent3">
+              <a:lumMod val="60000"/>
+              <a:lumOff val="40000"/>
+            </a:schemeClr>
+          </a:solidFill>
+          <a:ln>
+            <a:solidFill>
+              <a:schemeClr val="accent1"/>
+            </a:solidFill>
+          </a:ln>
+        </p:spPr>
+        <p:style>
+          <a:lnRef idx="2">
+            <a:schemeClr val="accent1">
+              <a:shade val="50000"/>
+            </a:schemeClr>
+          </a:lnRef>
+          <a:fillRef idx="1">
+            <a:schemeClr val="accent1"/>
+          </a:fillRef>
+          <a:effectRef idx="0">
+            <a:schemeClr val="accent1"/>
+          </a:effectRef>
+          <a:fontRef idx="minor">
+            <a:schemeClr val="lt1"/>
+          </a:fontRef>
+        </p:style>
+        <p:txBody>
+          <a:bodyPr lIns="0" tIns="0" rIns="0" bIns="0" rtlCol="0" anchor="ctr"/>
+          <a:lstStyle/>
+          <a:p>
+            <a:pPr algn="ctr"/>
+            <a:r>
+              <a:rPr lang="en-US" sz="700" b="1" dirty="0"/>
+              <a:t>Iceberg Sink</a:t>
+            </a:r>
+          </a:p>
+        </p:txBody>
+      </p:sp>
+      <p:pic>
+        <p:nvPicPr>
+          <p:cNvPr id="147" name="Graphic 146" descr="Table outline">
+            <a:extLst>
+              <a:ext uri="{FF2B5EF4-FFF2-40B4-BE49-F238E27FC236}">
+                <a16:creationId xmlns:a16="http://schemas.microsoft.com/office/drawing/2014/main" id="{A020A03F-01B9-4705-5D55-AC7DF8F7ADE7}"/>
+              </a:ext>
+            </a:extLst>
+          </p:cNvPr>
+          <p:cNvPicPr>
+            <a:picLocks noChangeAspect="1"/>
+          </p:cNvPicPr>
+          <p:nvPr/>
+        </p:nvPicPr>
+        <p:blipFill>
+          <a:blip>
+            <a:extLst>
+              <a:ext uri="{96DAC541-7B7A-43D3-8B79-37D633B846F1}">
+                <asvg:svgBlip xmlns:asvg="http://schemas.microsoft.com/office/drawing/2016/SVG/main" r:embed="rId2"/>
+              </a:ext>
+            </a:extLst>
+          </a:blip>
+          <a:stretch>
+            <a:fillRect/>
+          </a:stretch>
+        </p:blipFill>
+        <p:spPr>
+          <a:xfrm>
+            <a:off x="11431027" y="3004147"/>
+            <a:ext cx="481251" cy="481251"/>
+          </a:xfrm>
+          <a:prstGeom prst="rect">
+            <a:avLst/>
+          </a:prstGeom>
+        </p:spPr>
+      </p:pic>
+      <p:pic>
+        <p:nvPicPr>
+          <p:cNvPr id="148" name="Picture 2" descr="bucket Icon - Free PNG &amp; SVG 394460 - Noun Project">
+            <a:extLst>
+              <a:ext uri="{FF2B5EF4-FFF2-40B4-BE49-F238E27FC236}">
+                <a16:creationId xmlns:a16="http://schemas.microsoft.com/office/drawing/2014/main" id="{214C2FCF-811D-8F44-1037-F061CB45CF7E}"/>
+              </a:ext>
+            </a:extLst>
+          </p:cNvPr>
+          <p:cNvPicPr>
+            <a:picLocks noChangeAspect="1" noChangeArrowheads="1"/>
+          </p:cNvPicPr>
+          <p:nvPr/>
+        </p:nvPicPr>
+        <p:blipFill>
+          <a:blip r:embed="rId3">
+            <a:extLst>
+              <a:ext uri="{28A0092B-C50C-407E-A947-70E740481C1C}">
+                <a14:useLocalDpi xmlns:a14="http://schemas.microsoft.com/office/drawing/2010/main" val="0"/>
+              </a:ext>
+            </a:extLst>
+          </a:blip>
+          <a:srcRect/>
+          <a:stretch>
+            <a:fillRect/>
+          </a:stretch>
+        </p:blipFill>
+        <p:spPr bwMode="auto">
+          <a:xfrm>
+            <a:off x="11397287" y="3260053"/>
+            <a:ext cx="198421" cy="198421"/>
+          </a:xfrm>
+          <a:prstGeom prst="rect">
+            <a:avLst/>
+          </a:prstGeom>
+          <a:solidFill>
+            <a:schemeClr val="bg1"/>
+          </a:solidFill>
+        </p:spPr>
+      </p:pic>
+      <p:cxnSp>
+        <p:nvCxnSpPr>
+          <p:cNvPr id="149" name="Straight Arrow Connector 47">
+            <a:extLst>
+              <a:ext uri="{FF2B5EF4-FFF2-40B4-BE49-F238E27FC236}">
+                <a16:creationId xmlns:a16="http://schemas.microsoft.com/office/drawing/2014/main" id="{B018246B-43CF-BC4B-0A67-1CE0167C3BF2}"/>
+              </a:ext>
+            </a:extLst>
+          </p:cNvPr>
+          <p:cNvCxnSpPr>
+            <a:cxnSpLocks/>
+            <a:stCxn id="146" idx="3"/>
+            <a:endCxn id="147" idx="1"/>
+          </p:cNvCxnSpPr>
+          <p:nvPr/>
+        </p:nvCxnSpPr>
+        <p:spPr>
+          <a:xfrm flipV="1">
+            <a:off x="11014097" y="3244771"/>
+            <a:ext cx="416928" cy="2652"/>
+          </a:xfrm>
+          <a:prstGeom prst="curvedConnector3">
+            <a:avLst>
+              <a:gd name="adj1" fmla="val 50000"/>
+            </a:avLst>
+          </a:prstGeom>
+          <a:ln>
+            <a:solidFill>
+              <a:srgbClr val="5A00D2"/>
+            </a:solidFill>
+            <a:tailEnd type="triangle"/>
+          </a:ln>
+        </p:spPr>
+        <p:style>
+          <a:lnRef idx="1">
+            <a:schemeClr val="accent1"/>
+          </a:lnRef>
+          <a:fillRef idx="0">
+            <a:schemeClr val="accent1"/>
+          </a:fillRef>
+          <a:effectRef idx="0">
+            <a:schemeClr val="accent1"/>
+          </a:effectRef>
+          <a:fontRef idx="minor">
+            <a:schemeClr val="tx1"/>
+          </a:fontRef>
+        </p:style>
+      </p:cxnSp>
+      <p:cxnSp>
+        <p:nvCxnSpPr>
+          <p:cNvPr id="151" name="Straight Arrow Connector 47">
+            <a:extLst>
+              <a:ext uri="{FF2B5EF4-FFF2-40B4-BE49-F238E27FC236}">
+                <a16:creationId xmlns:a16="http://schemas.microsoft.com/office/drawing/2014/main" id="{B97482FF-D00B-D99C-E615-7DBA176BCA71}"/>
+              </a:ext>
+            </a:extLst>
+          </p:cNvPr>
+          <p:cNvCxnSpPr>
+            <a:cxnSpLocks/>
+            <a:stCxn id="40" idx="1"/>
+            <a:endCxn id="146" idx="1"/>
+          </p:cNvCxnSpPr>
+          <p:nvPr/>
+        </p:nvCxnSpPr>
+        <p:spPr>
+          <a:xfrm flipV="1">
+            <a:off x="3004443" y="3247425"/>
+            <a:ext cx="7350576" cy="675571"/>
+          </a:xfrm>
+          <a:prstGeom prst="curvedConnector3">
+            <a:avLst>
+              <a:gd name="adj1" fmla="val 4844"/>
+            </a:avLst>
+          </a:prstGeom>
+          <a:ln>
+            <a:solidFill>
+              <a:srgbClr val="5A00D2"/>
+            </a:solidFill>
+            <a:tailEnd type="triangle"/>
+          </a:ln>
+        </p:spPr>
+        <p:style>
+          <a:lnRef idx="1">
+            <a:schemeClr val="accent1"/>
+          </a:lnRef>
+          <a:fillRef idx="0">
+            <a:schemeClr val="accent1"/>
+          </a:fillRef>
+          <a:effectRef idx="0">
+            <a:schemeClr val="accent1"/>
+          </a:effectRef>
+          <a:fontRef idx="minor">
+            <a:schemeClr val="tx1"/>
+          </a:fontRef>
+        </p:style>
+      </p:cxnSp>
+      <p:sp>
+        <p:nvSpPr>
+          <p:cNvPr id="155" name="TextBox 154">
+            <a:extLst>
+              <a:ext uri="{FF2B5EF4-FFF2-40B4-BE49-F238E27FC236}">
+                <a16:creationId xmlns:a16="http://schemas.microsoft.com/office/drawing/2014/main" id="{16095FBB-BEA3-95C3-E5BC-34138DDAE6F7}"/>
+              </a:ext>
+            </a:extLst>
+          </p:cNvPr>
+          <p:cNvSpPr txBox="1"/>
+          <p:nvPr/>
+        </p:nvSpPr>
+        <p:spPr>
+          <a:xfrm>
+            <a:off x="11365583" y="2935070"/>
+            <a:ext cx="812569" cy="197028"/>
+          </a:xfrm>
+          <a:prstGeom prst="rect">
+            <a:avLst/>
+          </a:prstGeom>
+          <a:noFill/>
+        </p:spPr>
+        <p:txBody>
+          <a:bodyPr wrap="none" lIns="0" tIns="0" rIns="0" bIns="0" rtlCol="0">
+            <a:noAutofit/>
+          </a:bodyPr>
+          <a:lstStyle/>
+          <a:p>
+            <a:pPr defTabSz="228600">
+              <a:spcAft>
+                <a:spcPts val="1200"/>
+              </a:spcAft>
+            </a:pPr>
+            <a:r>
+              <a:rPr lang="de-DE" sz="700" dirty="0" err="1"/>
+              <a:t>raw_transaction_t</a:t>
+            </a:r>
+            <a:endParaRPr lang="de-DE" sz="700" dirty="0"/>
+          </a:p>
+        </p:txBody>
+      </p:sp>
+      <p:sp>
+        <p:nvSpPr>
+          <p:cNvPr id="156" name="TextBox 155">
+            <a:extLst>
+              <a:ext uri="{FF2B5EF4-FFF2-40B4-BE49-F238E27FC236}">
+                <a16:creationId xmlns:a16="http://schemas.microsoft.com/office/drawing/2014/main" id="{B6659AF2-C1CD-51D3-9EBA-4D92B1A348A1}"/>
+              </a:ext>
+            </a:extLst>
+          </p:cNvPr>
+          <p:cNvSpPr txBox="1"/>
+          <p:nvPr/>
+        </p:nvSpPr>
+        <p:spPr>
+          <a:xfrm>
+            <a:off x="11240374" y="3607852"/>
+            <a:ext cx="1666555" cy="197028"/>
+          </a:xfrm>
+          <a:prstGeom prst="rect">
+            <a:avLst/>
+          </a:prstGeom>
+          <a:noFill/>
+        </p:spPr>
+        <p:txBody>
+          <a:bodyPr wrap="none" lIns="0" tIns="0" rIns="0" bIns="0" rtlCol="0">
+            <a:noAutofit/>
+          </a:bodyPr>
+          <a:lstStyle/>
+          <a:p>
+            <a:pPr defTabSz="228600">
+              <a:spcAft>
+                <a:spcPts val="1200"/>
+              </a:spcAft>
+            </a:pPr>
+            <a:r>
+              <a:rPr lang="de-DE" sz="700" dirty="0" err="1"/>
+              <a:t>raw_transaction_flagged_t</a:t>
+            </a:r>
+            <a:endParaRPr lang="de-DE" sz="700" dirty="0"/>
+          </a:p>
+        </p:txBody>
+      </p:sp>
+      <p:sp>
+        <p:nvSpPr>
+          <p:cNvPr id="157" name="TextBox 156">
+            <a:extLst>
+              <a:ext uri="{FF2B5EF4-FFF2-40B4-BE49-F238E27FC236}">
+                <a16:creationId xmlns:a16="http://schemas.microsoft.com/office/drawing/2014/main" id="{3B9460DB-3533-7BAB-7092-81E5389A9119}"/>
+              </a:ext>
+            </a:extLst>
+          </p:cNvPr>
+          <p:cNvSpPr txBox="1"/>
+          <p:nvPr/>
+        </p:nvSpPr>
+        <p:spPr>
+          <a:xfrm>
+            <a:off x="11269575" y="1213562"/>
+            <a:ext cx="812569" cy="197028"/>
+          </a:xfrm>
+          <a:prstGeom prst="rect">
+            <a:avLst/>
+          </a:prstGeom>
+          <a:noFill/>
+        </p:spPr>
+        <p:txBody>
+          <a:bodyPr wrap="none" lIns="0" tIns="0" rIns="0" bIns="0" rtlCol="0">
+            <a:noAutofit/>
+          </a:bodyPr>
+          <a:lstStyle/>
+          <a:p>
+            <a:pPr defTabSz="228600">
+              <a:spcAft>
+                <a:spcPts val="1200"/>
+              </a:spcAft>
+            </a:pPr>
+            <a:r>
+              <a:rPr lang="de-DE" sz="700" dirty="0" err="1"/>
+              <a:t>raw_cardholder_t</a:t>
+            </a:r>
+            <a:endParaRPr lang="de-DE" sz="700" dirty="0"/>
+          </a:p>
+        </p:txBody>
+      </p:sp>
+      <p:sp>
+        <p:nvSpPr>
+          <p:cNvPr id="158" name="TextBox 157">
+            <a:extLst>
+              <a:ext uri="{FF2B5EF4-FFF2-40B4-BE49-F238E27FC236}">
+                <a16:creationId xmlns:a16="http://schemas.microsoft.com/office/drawing/2014/main" id="{1A752C45-149B-4076-4283-341FBED2E4EC}"/>
+              </a:ext>
+            </a:extLst>
+          </p:cNvPr>
+          <p:cNvSpPr txBox="1"/>
+          <p:nvPr/>
+        </p:nvSpPr>
+        <p:spPr>
+          <a:xfrm>
+            <a:off x="13990362" y="656407"/>
+            <a:ext cx="812569" cy="197028"/>
+          </a:xfrm>
+          <a:prstGeom prst="rect">
+            <a:avLst/>
+          </a:prstGeom>
+          <a:noFill/>
+        </p:spPr>
+        <p:txBody>
+          <a:bodyPr wrap="none" lIns="0" tIns="0" rIns="0" bIns="0" rtlCol="0">
+            <a:noAutofit/>
+          </a:bodyPr>
+          <a:lstStyle/>
+          <a:p>
+            <a:pPr defTabSz="228600">
+              <a:spcAft>
+                <a:spcPts val="1200"/>
+              </a:spcAft>
+            </a:pPr>
+            <a:r>
+              <a:rPr lang="de-DE" sz="700" dirty="0" err="1"/>
+              <a:t>cur_person_t</a:t>
+            </a:r>
+            <a:endParaRPr lang="de-DE" sz="700" dirty="0"/>
+          </a:p>
+        </p:txBody>
+      </p:sp>
+      <p:sp>
+        <p:nvSpPr>
+          <p:cNvPr id="159" name="TextBox 158">
+            <a:extLst>
+              <a:ext uri="{FF2B5EF4-FFF2-40B4-BE49-F238E27FC236}">
+                <a16:creationId xmlns:a16="http://schemas.microsoft.com/office/drawing/2014/main" id="{2D3B3839-88BE-A047-FBDB-70796C14F706}"/>
+              </a:ext>
+            </a:extLst>
+          </p:cNvPr>
+          <p:cNvSpPr txBox="1"/>
+          <p:nvPr/>
+        </p:nvSpPr>
+        <p:spPr>
+          <a:xfrm>
+            <a:off x="13973321" y="1232932"/>
+            <a:ext cx="812569" cy="197028"/>
+          </a:xfrm>
+          <a:prstGeom prst="rect">
+            <a:avLst/>
+          </a:prstGeom>
+          <a:noFill/>
+        </p:spPr>
+        <p:txBody>
+          <a:bodyPr wrap="none" lIns="0" tIns="0" rIns="0" bIns="0" rtlCol="0">
+            <a:noAutofit/>
+          </a:bodyPr>
+          <a:lstStyle/>
+          <a:p>
+            <a:pPr defTabSz="228600">
+              <a:spcAft>
+                <a:spcPts val="1200"/>
+              </a:spcAft>
+            </a:pPr>
+            <a:r>
+              <a:rPr lang="de-DE" sz="700" dirty="0" err="1"/>
+              <a:t>cur_address_t</a:t>
+            </a:r>
+            <a:endParaRPr lang="de-DE" sz="700" dirty="0"/>
+          </a:p>
+        </p:txBody>
+      </p:sp>
+      <p:sp>
+        <p:nvSpPr>
+          <p:cNvPr id="160" name="TextBox 159">
+            <a:extLst>
+              <a:ext uri="{FF2B5EF4-FFF2-40B4-BE49-F238E27FC236}">
+                <a16:creationId xmlns:a16="http://schemas.microsoft.com/office/drawing/2014/main" id="{D6CC2D47-A39A-C77B-C76B-74E91F133B61}"/>
+              </a:ext>
+            </a:extLst>
+          </p:cNvPr>
+          <p:cNvSpPr txBox="1"/>
+          <p:nvPr/>
+        </p:nvSpPr>
+        <p:spPr>
+          <a:xfrm>
+            <a:off x="13960792" y="1824331"/>
+            <a:ext cx="812569" cy="197028"/>
+          </a:xfrm>
+          <a:prstGeom prst="rect">
+            <a:avLst/>
+          </a:prstGeom>
+          <a:noFill/>
+        </p:spPr>
+        <p:txBody>
+          <a:bodyPr wrap="none" lIns="0" tIns="0" rIns="0" bIns="0" rtlCol="0">
+            <a:noAutofit/>
+          </a:bodyPr>
+          <a:lstStyle/>
+          <a:p>
+            <a:pPr defTabSz="228600">
+              <a:spcAft>
+                <a:spcPts val="1200"/>
+              </a:spcAft>
+            </a:pPr>
+            <a:r>
+              <a:rPr lang="de-DE" sz="700" dirty="0" err="1"/>
+              <a:t>cur_card_t</a:t>
+            </a:r>
+            <a:endParaRPr lang="de-DE" sz="700" dirty="0"/>
+          </a:p>
+        </p:txBody>
+      </p:sp>
+      <p:cxnSp>
+        <p:nvCxnSpPr>
+          <p:cNvPr id="161" name="Straight Arrow Connector 47">
+            <a:extLst>
+              <a:ext uri="{FF2B5EF4-FFF2-40B4-BE49-F238E27FC236}">
+                <a16:creationId xmlns:a16="http://schemas.microsoft.com/office/drawing/2014/main" id="{29E71422-EF4E-72AF-40CE-7188FFDC4F34}"/>
+              </a:ext>
+            </a:extLst>
+          </p:cNvPr>
+          <p:cNvCxnSpPr>
+            <a:cxnSpLocks/>
+            <a:stCxn id="127" idx="3"/>
+            <a:endCxn id="128" idx="1"/>
+          </p:cNvCxnSpPr>
+          <p:nvPr/>
+        </p:nvCxnSpPr>
+        <p:spPr>
+          <a:xfrm flipV="1">
+            <a:off x="13378550" y="951805"/>
+            <a:ext cx="611812" cy="575216"/>
+          </a:xfrm>
+          <a:prstGeom prst="curvedConnector3">
+            <a:avLst>
+              <a:gd name="adj1" fmla="val 50000"/>
+            </a:avLst>
+          </a:prstGeom>
+          <a:ln>
+            <a:solidFill>
+              <a:srgbClr val="5A00D2"/>
+            </a:solidFill>
+            <a:tailEnd type="triangle"/>
+          </a:ln>
+        </p:spPr>
+        <p:style>
+          <a:lnRef idx="1">
+            <a:schemeClr val="accent1"/>
+          </a:lnRef>
+          <a:fillRef idx="0">
+            <a:schemeClr val="accent1"/>
+          </a:fillRef>
+          <a:effectRef idx="0">
+            <a:schemeClr val="accent1"/>
+          </a:effectRef>
+          <a:fontRef idx="minor">
+            <a:schemeClr val="tx1"/>
+          </a:fontRef>
+        </p:style>
+      </p:cxnSp>
+      <p:cxnSp>
+        <p:nvCxnSpPr>
+          <p:cNvPr id="164" name="Straight Arrow Connector 47">
+            <a:extLst>
+              <a:ext uri="{FF2B5EF4-FFF2-40B4-BE49-F238E27FC236}">
+                <a16:creationId xmlns:a16="http://schemas.microsoft.com/office/drawing/2014/main" id="{664BB990-333C-650D-BA9E-C3FDA6A5760B}"/>
+              </a:ext>
+            </a:extLst>
+          </p:cNvPr>
+          <p:cNvCxnSpPr>
+            <a:cxnSpLocks/>
+            <a:stCxn id="127" idx="3"/>
+            <a:endCxn id="130" idx="1"/>
+          </p:cNvCxnSpPr>
+          <p:nvPr/>
+        </p:nvCxnSpPr>
+        <p:spPr>
+          <a:xfrm>
+            <a:off x="13378552" y="1527023"/>
+            <a:ext cx="611811" cy="3423"/>
+          </a:xfrm>
+          <a:prstGeom prst="curvedConnector3">
+            <a:avLst>
+              <a:gd name="adj1" fmla="val 50000"/>
+            </a:avLst>
+          </a:prstGeom>
+          <a:ln>
+            <a:solidFill>
+              <a:srgbClr val="5A00D2"/>
+            </a:solidFill>
+            <a:tailEnd type="triangle"/>
+          </a:ln>
+        </p:spPr>
+        <p:style>
+          <a:lnRef idx="1">
+            <a:schemeClr val="accent1"/>
+          </a:lnRef>
+          <a:fillRef idx="0">
+            <a:schemeClr val="accent1"/>
+          </a:fillRef>
+          <a:effectRef idx="0">
+            <a:schemeClr val="accent1"/>
+          </a:effectRef>
+          <a:fontRef idx="minor">
+            <a:schemeClr val="tx1"/>
+          </a:fontRef>
+        </p:style>
+      </p:cxnSp>
+      <p:cxnSp>
+        <p:nvCxnSpPr>
+          <p:cNvPr id="167" name="Straight Arrow Connector 47">
+            <a:extLst>
+              <a:ext uri="{FF2B5EF4-FFF2-40B4-BE49-F238E27FC236}">
+                <a16:creationId xmlns:a16="http://schemas.microsoft.com/office/drawing/2014/main" id="{FB8C736F-A58E-14E5-6597-C095BF1CD1B6}"/>
+              </a:ext>
+            </a:extLst>
+          </p:cNvPr>
+          <p:cNvCxnSpPr>
+            <a:cxnSpLocks/>
+            <a:stCxn id="127" idx="3"/>
+          </p:cNvCxnSpPr>
+          <p:nvPr/>
+        </p:nvCxnSpPr>
+        <p:spPr>
+          <a:xfrm>
+            <a:off x="13378552" y="1527023"/>
+            <a:ext cx="611811" cy="586367"/>
+          </a:xfrm>
+          <a:prstGeom prst="curvedConnector3">
+            <a:avLst>
+              <a:gd name="adj1" fmla="val 50000"/>
+            </a:avLst>
+          </a:prstGeom>
+          <a:ln>
+            <a:solidFill>
+              <a:srgbClr val="5A00D2"/>
+            </a:solidFill>
+            <a:tailEnd type="triangle"/>
+          </a:ln>
+        </p:spPr>
+        <p:style>
+          <a:lnRef idx="1">
+            <a:schemeClr val="accent1"/>
+          </a:lnRef>
+          <a:fillRef idx="0">
+            <a:schemeClr val="accent1"/>
+          </a:fillRef>
+          <a:effectRef idx="0">
+            <a:schemeClr val="accent1"/>
+          </a:effectRef>
+          <a:fontRef idx="minor">
+            <a:schemeClr val="tx1"/>
+          </a:fontRef>
+        </p:style>
+      </p:cxnSp>
+      <p:pic>
+        <p:nvPicPr>
+          <p:cNvPr id="170" name="Graphic 169" descr="Table outline">
+            <a:extLst>
+              <a:ext uri="{FF2B5EF4-FFF2-40B4-BE49-F238E27FC236}">
+                <a16:creationId xmlns:a16="http://schemas.microsoft.com/office/drawing/2014/main" id="{7F902850-8543-DD7C-DADB-B72DB1A957C0}"/>
+              </a:ext>
+            </a:extLst>
+          </p:cNvPr>
+          <p:cNvPicPr>
+            <a:picLocks noChangeAspect="1"/>
+          </p:cNvPicPr>
+          <p:nvPr/>
+        </p:nvPicPr>
+        <p:blipFill>
+          <a:blip>
+            <a:extLst>
+              <a:ext uri="{96DAC541-7B7A-43D3-8B79-37D633B846F1}">
+                <asvg:svgBlip xmlns:asvg="http://schemas.microsoft.com/office/drawing/2016/SVG/main" r:embed="rId2"/>
+              </a:ext>
+            </a:extLst>
+          </a:blip>
+          <a:stretch>
+            <a:fillRect/>
+          </a:stretch>
+        </p:blipFill>
+        <p:spPr>
+          <a:xfrm>
+            <a:off x="11392164" y="5220152"/>
+            <a:ext cx="481251" cy="481251"/>
+          </a:xfrm>
+          <a:prstGeom prst="rect">
+            <a:avLst/>
+          </a:prstGeom>
+        </p:spPr>
+      </p:pic>
+      <p:pic>
+        <p:nvPicPr>
+          <p:cNvPr id="171" name="Picture 2" descr="bucket Icon - Free PNG &amp; SVG 394460 - Noun Project">
+            <a:extLst>
+              <a:ext uri="{FF2B5EF4-FFF2-40B4-BE49-F238E27FC236}">
+                <a16:creationId xmlns:a16="http://schemas.microsoft.com/office/drawing/2014/main" id="{89158734-A062-89ED-F4C9-73FE1E0FD3A6}"/>
+              </a:ext>
+            </a:extLst>
+          </p:cNvPr>
+          <p:cNvPicPr>
+            <a:picLocks noChangeAspect="1" noChangeArrowheads="1"/>
+          </p:cNvPicPr>
+          <p:nvPr/>
+        </p:nvPicPr>
+        <p:blipFill>
+          <a:blip r:embed="rId3">
+            <a:extLst>
+              <a:ext uri="{28A0092B-C50C-407E-A947-70E740481C1C}">
+                <a14:useLocalDpi xmlns:a14="http://schemas.microsoft.com/office/drawing/2010/main" val="0"/>
+              </a:ext>
+            </a:extLst>
+          </a:blip>
+          <a:srcRect/>
+          <a:stretch>
+            <a:fillRect/>
+          </a:stretch>
+        </p:blipFill>
+        <p:spPr bwMode="auto">
+          <a:xfrm>
+            <a:off x="11363429" y="5498365"/>
+            <a:ext cx="198421" cy="198421"/>
+          </a:xfrm>
+          <a:prstGeom prst="rect">
+            <a:avLst/>
+          </a:prstGeom>
+          <a:solidFill>
+            <a:schemeClr val="bg1"/>
+          </a:solidFill>
+        </p:spPr>
+      </p:pic>
+      <p:sp>
+        <p:nvSpPr>
+          <p:cNvPr id="172" name="Rounded Rectangle 171">
+            <a:extLst>
+              <a:ext uri="{FF2B5EF4-FFF2-40B4-BE49-F238E27FC236}">
+                <a16:creationId xmlns:a16="http://schemas.microsoft.com/office/drawing/2014/main" id="{81931C3A-D3B6-0634-7CEC-A05AC79C2BD8}"/>
+              </a:ext>
+            </a:extLst>
+          </p:cNvPr>
+          <p:cNvSpPr/>
+          <p:nvPr/>
+        </p:nvSpPr>
+        <p:spPr>
+          <a:xfrm>
+            <a:off x="10392101" y="5359400"/>
+            <a:ext cx="659078" cy="206150"/>
+          </a:xfrm>
+          <a:prstGeom prst="roundRect">
+            <a:avLst/>
+          </a:prstGeom>
+          <a:solidFill>
+            <a:schemeClr val="accent3">
+              <a:lumMod val="60000"/>
+              <a:lumOff val="40000"/>
+            </a:schemeClr>
+          </a:solidFill>
+          <a:ln>
+            <a:solidFill>
+              <a:schemeClr val="accent1"/>
+            </a:solidFill>
+          </a:ln>
+        </p:spPr>
+        <p:style>
+          <a:lnRef idx="2">
+            <a:schemeClr val="accent1">
+              <a:shade val="50000"/>
+            </a:schemeClr>
+          </a:lnRef>
+          <a:fillRef idx="1">
+            <a:schemeClr val="accent1"/>
+          </a:fillRef>
+          <a:effectRef idx="0">
+            <a:schemeClr val="accent1"/>
+          </a:effectRef>
+          <a:fontRef idx="minor">
+            <a:schemeClr val="lt1"/>
+          </a:fontRef>
+        </p:style>
+        <p:txBody>
+          <a:bodyPr lIns="0" tIns="0" rIns="0" bIns="0" rtlCol="0" anchor="ctr"/>
+          <a:lstStyle/>
+          <a:p>
+            <a:pPr algn="ctr"/>
+            <a:r>
+              <a:rPr lang="en-US" sz="700" b="1" dirty="0"/>
+              <a:t>Iceberg Sink</a:t>
+            </a:r>
+          </a:p>
+        </p:txBody>
+      </p:sp>
+      <p:cxnSp>
+        <p:nvCxnSpPr>
+          <p:cNvPr id="173" name="Straight Arrow Connector 47">
+            <a:extLst>
+              <a:ext uri="{FF2B5EF4-FFF2-40B4-BE49-F238E27FC236}">
+                <a16:creationId xmlns:a16="http://schemas.microsoft.com/office/drawing/2014/main" id="{06BA1C3E-155F-A02E-4CA4-E2645C1CD753}"/>
+              </a:ext>
+            </a:extLst>
+          </p:cNvPr>
+          <p:cNvCxnSpPr>
+            <a:cxnSpLocks/>
+            <a:stCxn id="70" idx="1"/>
+            <a:endCxn id="172" idx="1"/>
+          </p:cNvCxnSpPr>
+          <p:nvPr/>
+        </p:nvCxnSpPr>
+        <p:spPr>
+          <a:xfrm flipV="1">
+            <a:off x="5116128" y="5462475"/>
+            <a:ext cx="5275973" cy="9997"/>
+          </a:xfrm>
+          <a:prstGeom prst="curvedConnector3">
+            <a:avLst>
+              <a:gd name="adj1" fmla="val 50000"/>
+            </a:avLst>
+          </a:prstGeom>
+          <a:ln>
+            <a:solidFill>
+              <a:srgbClr val="5A00D2"/>
+            </a:solidFill>
+            <a:tailEnd type="triangle"/>
+          </a:ln>
+        </p:spPr>
+        <p:style>
+          <a:lnRef idx="1">
+            <a:schemeClr val="accent1"/>
+          </a:lnRef>
+          <a:fillRef idx="0">
+            <a:schemeClr val="accent1"/>
+          </a:fillRef>
+          <a:effectRef idx="0">
+            <a:schemeClr val="accent1"/>
+          </a:effectRef>
+          <a:fontRef idx="minor">
+            <a:schemeClr val="tx1"/>
+          </a:fontRef>
+        </p:style>
+      </p:cxnSp>
+      <p:cxnSp>
+        <p:nvCxnSpPr>
+          <p:cNvPr id="177" name="Straight Arrow Connector 47">
+            <a:extLst>
+              <a:ext uri="{FF2B5EF4-FFF2-40B4-BE49-F238E27FC236}">
+                <a16:creationId xmlns:a16="http://schemas.microsoft.com/office/drawing/2014/main" id="{2766415D-3750-B398-256F-4F0320AF98FF}"/>
+              </a:ext>
+            </a:extLst>
+          </p:cNvPr>
+          <p:cNvCxnSpPr>
+            <a:cxnSpLocks/>
+            <a:stCxn id="172" idx="3"/>
+            <a:endCxn id="170" idx="1"/>
+          </p:cNvCxnSpPr>
+          <p:nvPr/>
+        </p:nvCxnSpPr>
+        <p:spPr>
+          <a:xfrm flipV="1">
+            <a:off x="11051179" y="5460778"/>
+            <a:ext cx="340985" cy="1697"/>
+          </a:xfrm>
+          <a:prstGeom prst="curvedConnector3">
+            <a:avLst>
+              <a:gd name="adj1" fmla="val 50000"/>
+            </a:avLst>
+          </a:prstGeom>
+          <a:ln>
+            <a:solidFill>
+              <a:srgbClr val="5A00D2"/>
+            </a:solidFill>
+            <a:tailEnd type="triangle"/>
+          </a:ln>
+        </p:spPr>
+        <p:style>
+          <a:lnRef idx="1">
+            <a:schemeClr val="accent1"/>
+          </a:lnRef>
+          <a:fillRef idx="0">
+            <a:schemeClr val="accent1"/>
+          </a:fillRef>
+          <a:effectRef idx="0">
+            <a:schemeClr val="accent1"/>
+          </a:effectRef>
+          <a:fontRef idx="minor">
+            <a:schemeClr val="tx1"/>
+          </a:fontRef>
+        </p:style>
+      </p:cxnSp>
+      <p:sp>
+        <p:nvSpPr>
+          <p:cNvPr id="181" name="TextBox 180">
+            <a:extLst>
+              <a:ext uri="{FF2B5EF4-FFF2-40B4-BE49-F238E27FC236}">
+                <a16:creationId xmlns:a16="http://schemas.microsoft.com/office/drawing/2014/main" id="{C31DBC59-8A14-D4C0-A01C-00C82171FE1B}"/>
+              </a:ext>
+            </a:extLst>
+          </p:cNvPr>
+          <p:cNvSpPr txBox="1"/>
+          <p:nvPr/>
+        </p:nvSpPr>
+        <p:spPr>
+          <a:xfrm>
+            <a:off x="11287786" y="4535765"/>
+            <a:ext cx="812569" cy="197028"/>
+          </a:xfrm>
+          <a:prstGeom prst="rect">
+            <a:avLst/>
+          </a:prstGeom>
+          <a:noFill/>
+        </p:spPr>
+        <p:txBody>
+          <a:bodyPr wrap="none" lIns="0" tIns="0" rIns="0" bIns="0" rtlCol="0">
+            <a:noAutofit/>
+          </a:bodyPr>
+          <a:lstStyle/>
+          <a:p>
+            <a:pPr defTabSz="228600">
+              <a:spcAft>
+                <a:spcPts val="1200"/>
+              </a:spcAft>
+            </a:pPr>
+            <a:r>
+              <a:rPr lang="de-DE" sz="700" dirty="0" err="1"/>
+              <a:t>raw_merchant_t</a:t>
+            </a:r>
+            <a:endParaRPr lang="de-DE" sz="700" dirty="0"/>
+          </a:p>
+        </p:txBody>
+      </p:sp>
+      <p:sp>
+        <p:nvSpPr>
+          <p:cNvPr id="184" name="TextBox 183">
+            <a:extLst>
+              <a:ext uri="{FF2B5EF4-FFF2-40B4-BE49-F238E27FC236}">
+                <a16:creationId xmlns:a16="http://schemas.microsoft.com/office/drawing/2014/main" id="{69DB6D64-B27C-429A-AE59-6C0E469271D3}"/>
+              </a:ext>
+            </a:extLst>
+          </p:cNvPr>
+          <p:cNvSpPr txBox="1"/>
+          <p:nvPr/>
+        </p:nvSpPr>
+        <p:spPr>
+          <a:xfrm>
+            <a:off x="13855107" y="2927231"/>
+            <a:ext cx="1666555" cy="197028"/>
+          </a:xfrm>
+          <a:prstGeom prst="rect">
+            <a:avLst/>
+          </a:prstGeom>
+          <a:noFill/>
+        </p:spPr>
+        <p:txBody>
+          <a:bodyPr wrap="none" lIns="0" tIns="0" rIns="0" bIns="0" rtlCol="0">
+            <a:noAutofit/>
+          </a:bodyPr>
+          <a:lstStyle/>
+          <a:p>
+            <a:pPr defTabSz="228600">
+              <a:spcAft>
+                <a:spcPts val="1200"/>
+              </a:spcAft>
+            </a:pPr>
+            <a:r>
+              <a:rPr lang="de-DE" sz="700" dirty="0" err="1"/>
+              <a:t>cur_transaction_with_merchant_t</a:t>
+            </a:r>
+            <a:endParaRPr lang="de-DE" sz="700" dirty="0"/>
+          </a:p>
+        </p:txBody>
+      </p:sp>
+      <p:cxnSp>
+        <p:nvCxnSpPr>
+          <p:cNvPr id="185" name="Straight Arrow Connector 47">
+            <a:extLst>
+              <a:ext uri="{FF2B5EF4-FFF2-40B4-BE49-F238E27FC236}">
+                <a16:creationId xmlns:a16="http://schemas.microsoft.com/office/drawing/2014/main" id="{AA978FCB-B32A-A8CA-0A12-1B9A59EE9EB4}"/>
+              </a:ext>
+            </a:extLst>
+          </p:cNvPr>
+          <p:cNvCxnSpPr>
+            <a:cxnSpLocks/>
+            <a:endCxn id="186" idx="1"/>
+          </p:cNvCxnSpPr>
+          <p:nvPr/>
+        </p:nvCxnSpPr>
+        <p:spPr>
+          <a:xfrm>
+            <a:off x="11933289" y="3239529"/>
+            <a:ext cx="781488" cy="6122"/>
+          </a:xfrm>
+          <a:prstGeom prst="curvedConnector3">
+            <a:avLst>
+              <a:gd name="adj1" fmla="val 50000"/>
+            </a:avLst>
+          </a:prstGeom>
+          <a:ln>
+            <a:solidFill>
+              <a:srgbClr val="5A00D2"/>
+            </a:solidFill>
+            <a:tailEnd type="triangle"/>
+          </a:ln>
+        </p:spPr>
+        <p:style>
+          <a:lnRef idx="1">
+            <a:schemeClr val="accent1"/>
+          </a:lnRef>
+          <a:fillRef idx="0">
+            <a:schemeClr val="accent1"/>
+          </a:fillRef>
+          <a:effectRef idx="0">
+            <a:schemeClr val="accent1"/>
+          </a:effectRef>
+          <a:fontRef idx="minor">
+            <a:schemeClr val="tx1"/>
+          </a:fontRef>
+        </p:style>
+      </p:cxnSp>
+      <p:sp>
+        <p:nvSpPr>
+          <p:cNvPr id="186" name="Rounded Rectangle 185">
+            <a:extLst>
+              <a:ext uri="{FF2B5EF4-FFF2-40B4-BE49-F238E27FC236}">
+                <a16:creationId xmlns:a16="http://schemas.microsoft.com/office/drawing/2014/main" id="{6C6DE6A0-3262-2B17-4377-A1D64202389E}"/>
+              </a:ext>
+            </a:extLst>
+          </p:cNvPr>
+          <p:cNvSpPr/>
+          <p:nvPr/>
+        </p:nvSpPr>
+        <p:spPr>
+          <a:xfrm>
+            <a:off x="12714777" y="3142576"/>
+            <a:ext cx="659078" cy="206150"/>
+          </a:xfrm>
+          <a:prstGeom prst="roundRect">
+            <a:avLst/>
+          </a:prstGeom>
+          <a:solidFill>
+            <a:schemeClr val="accent3">
+              <a:lumMod val="60000"/>
+              <a:lumOff val="40000"/>
+            </a:schemeClr>
+          </a:solidFill>
+          <a:ln>
+            <a:solidFill>
+              <a:schemeClr val="accent1"/>
+            </a:solidFill>
+          </a:ln>
+        </p:spPr>
+        <p:style>
+          <a:lnRef idx="2">
+            <a:schemeClr val="accent1">
+              <a:shade val="50000"/>
+            </a:schemeClr>
+          </a:lnRef>
+          <a:fillRef idx="1">
+            <a:schemeClr val="accent1"/>
+          </a:fillRef>
+          <a:effectRef idx="0">
+            <a:schemeClr val="accent1"/>
+          </a:effectRef>
+          <a:fontRef idx="minor">
+            <a:schemeClr val="lt1"/>
+          </a:fontRef>
+        </p:style>
+        <p:txBody>
+          <a:bodyPr lIns="0" tIns="0" rIns="0" bIns="0" rtlCol="0" anchor="ctr"/>
+          <a:lstStyle/>
+          <a:p>
+            <a:pPr algn="ctr"/>
+            <a:r>
+              <a:rPr lang="en-US" sz="700" b="1" dirty="0"/>
+              <a:t>Enricher</a:t>
+            </a:r>
+          </a:p>
+        </p:txBody>
+      </p:sp>
+      <p:cxnSp>
+        <p:nvCxnSpPr>
+          <p:cNvPr id="188" name="Straight Arrow Connector 47">
+            <a:extLst>
+              <a:ext uri="{FF2B5EF4-FFF2-40B4-BE49-F238E27FC236}">
+                <a16:creationId xmlns:a16="http://schemas.microsoft.com/office/drawing/2014/main" id="{407411C2-ADA0-17B3-6E0C-6B9CC5ED2CB6}"/>
+              </a:ext>
+            </a:extLst>
+          </p:cNvPr>
+          <p:cNvCxnSpPr>
+            <a:cxnSpLocks/>
+            <a:stCxn id="186" idx="3"/>
+            <a:endCxn id="131" idx="1"/>
+          </p:cNvCxnSpPr>
+          <p:nvPr/>
+        </p:nvCxnSpPr>
+        <p:spPr>
+          <a:xfrm>
+            <a:off x="13373857" y="3245653"/>
+            <a:ext cx="833277" cy="2045"/>
+          </a:xfrm>
+          <a:prstGeom prst="curvedConnector3">
+            <a:avLst>
+              <a:gd name="adj1" fmla="val 50000"/>
+            </a:avLst>
+          </a:prstGeom>
+          <a:ln>
+            <a:solidFill>
+              <a:srgbClr val="5A00D2"/>
+            </a:solidFill>
+            <a:tailEnd type="triangle"/>
+          </a:ln>
+        </p:spPr>
+        <p:style>
+          <a:lnRef idx="1">
+            <a:schemeClr val="accent1"/>
+          </a:lnRef>
+          <a:fillRef idx="0">
+            <a:schemeClr val="accent1"/>
+          </a:fillRef>
+          <a:effectRef idx="0">
+            <a:schemeClr val="accent1"/>
+          </a:effectRef>
+          <a:fontRef idx="minor">
+            <a:schemeClr val="tx1"/>
+          </a:fontRef>
+        </p:style>
+      </p:cxnSp>
+      <p:cxnSp>
+        <p:nvCxnSpPr>
+          <p:cNvPr id="191" name="Straight Arrow Connector 47">
+            <a:extLst>
+              <a:ext uri="{FF2B5EF4-FFF2-40B4-BE49-F238E27FC236}">
+                <a16:creationId xmlns:a16="http://schemas.microsoft.com/office/drawing/2014/main" id="{8A559700-DDCE-6494-90EF-5CD31FDED5A6}"/>
+              </a:ext>
+            </a:extLst>
+          </p:cNvPr>
+          <p:cNvCxnSpPr>
+            <a:cxnSpLocks/>
+            <a:stCxn id="170" idx="3"/>
+            <a:endCxn id="186" idx="1"/>
+          </p:cNvCxnSpPr>
+          <p:nvPr/>
+        </p:nvCxnSpPr>
+        <p:spPr>
+          <a:xfrm flipV="1">
+            <a:off x="11873415" y="3245651"/>
+            <a:ext cx="841362" cy="2215127"/>
+          </a:xfrm>
+          <a:prstGeom prst="curvedConnector3">
+            <a:avLst>
+              <a:gd name="adj1" fmla="val 50000"/>
+            </a:avLst>
+          </a:prstGeom>
+          <a:ln>
+            <a:solidFill>
+              <a:srgbClr val="5A00D2"/>
+            </a:solidFill>
+            <a:tailEnd type="triangle"/>
+          </a:ln>
+        </p:spPr>
+        <p:style>
+          <a:lnRef idx="1">
+            <a:schemeClr val="accent1"/>
+          </a:lnRef>
+          <a:fillRef idx="0">
+            <a:schemeClr val="accent1"/>
+          </a:fillRef>
+          <a:effectRef idx="0">
+            <a:schemeClr val="accent1"/>
+          </a:effectRef>
+          <a:fontRef idx="minor">
+            <a:schemeClr val="tx1"/>
+          </a:fontRef>
+        </p:style>
+      </p:cxnSp>
+      <p:sp>
+        <p:nvSpPr>
+          <p:cNvPr id="1030" name="Rounded Rectangle 1029">
+            <a:extLst>
+              <a:ext uri="{FF2B5EF4-FFF2-40B4-BE49-F238E27FC236}">
+                <a16:creationId xmlns:a16="http://schemas.microsoft.com/office/drawing/2014/main" id="{7685466A-F812-EF2B-6D64-2AD76A938C85}"/>
+              </a:ext>
+            </a:extLst>
+          </p:cNvPr>
+          <p:cNvSpPr/>
+          <p:nvPr/>
+        </p:nvSpPr>
+        <p:spPr>
+          <a:xfrm>
+            <a:off x="15548404" y="3144620"/>
+            <a:ext cx="659078" cy="206150"/>
+          </a:xfrm>
+          <a:prstGeom prst="roundRect">
+            <a:avLst/>
+          </a:prstGeom>
+          <a:solidFill>
+            <a:schemeClr val="accent3">
+              <a:lumMod val="60000"/>
+              <a:lumOff val="40000"/>
+            </a:schemeClr>
+          </a:solidFill>
+          <a:ln>
+            <a:solidFill>
+              <a:schemeClr val="accent1"/>
+            </a:solidFill>
+          </a:ln>
+        </p:spPr>
+        <p:style>
+          <a:lnRef idx="2">
+            <a:schemeClr val="accent1">
+              <a:shade val="50000"/>
+            </a:schemeClr>
+          </a:lnRef>
+          <a:fillRef idx="1">
+            <a:schemeClr val="accent1"/>
+          </a:fillRef>
+          <a:effectRef idx="0">
+            <a:schemeClr val="accent1"/>
+          </a:effectRef>
+          <a:fontRef idx="minor">
+            <a:schemeClr val="lt1"/>
+          </a:fontRef>
+        </p:style>
+        <p:txBody>
+          <a:bodyPr lIns="0" tIns="0" rIns="0" bIns="0" rtlCol="0" anchor="ctr"/>
+          <a:lstStyle/>
+          <a:p>
+            <a:pPr algn="ctr"/>
+            <a:r>
+              <a:rPr lang="en-US" sz="700" b="1" dirty="0"/>
+              <a:t>Enricher</a:t>
+            </a:r>
+          </a:p>
+        </p:txBody>
+      </p:sp>
+      <p:cxnSp>
+        <p:nvCxnSpPr>
+          <p:cNvPr id="1031" name="Straight Arrow Connector 47">
+            <a:extLst>
+              <a:ext uri="{FF2B5EF4-FFF2-40B4-BE49-F238E27FC236}">
+                <a16:creationId xmlns:a16="http://schemas.microsoft.com/office/drawing/2014/main" id="{9594B6B7-C9F5-384A-1B52-C6415F03E652}"/>
+              </a:ext>
+            </a:extLst>
+          </p:cNvPr>
+          <p:cNvCxnSpPr>
+            <a:cxnSpLocks/>
+            <a:stCxn id="131" idx="3"/>
+            <a:endCxn id="1030" idx="1"/>
+          </p:cNvCxnSpPr>
+          <p:nvPr/>
+        </p:nvCxnSpPr>
+        <p:spPr>
+          <a:xfrm flipV="1">
+            <a:off x="14688385" y="3247697"/>
+            <a:ext cx="860021" cy="1"/>
+          </a:xfrm>
+          <a:prstGeom prst="curvedConnector3">
+            <a:avLst>
+              <a:gd name="adj1" fmla="val 50000"/>
+            </a:avLst>
+          </a:prstGeom>
+          <a:ln>
+            <a:solidFill>
+              <a:srgbClr val="5A00D2"/>
+            </a:solidFill>
+            <a:tailEnd type="triangle"/>
+          </a:ln>
+        </p:spPr>
+        <p:style>
+          <a:lnRef idx="1">
+            <a:schemeClr val="accent1"/>
+          </a:lnRef>
+          <a:fillRef idx="0">
+            <a:schemeClr val="accent1"/>
+          </a:fillRef>
+          <a:effectRef idx="0">
+            <a:schemeClr val="accent1"/>
+          </a:effectRef>
+          <a:fontRef idx="minor">
+            <a:schemeClr val="tx1"/>
+          </a:fontRef>
+        </p:style>
+      </p:cxnSp>
+      <p:cxnSp>
+        <p:nvCxnSpPr>
+          <p:cNvPr id="1034" name="Straight Arrow Connector 47">
+            <a:extLst>
+              <a:ext uri="{FF2B5EF4-FFF2-40B4-BE49-F238E27FC236}">
+                <a16:creationId xmlns:a16="http://schemas.microsoft.com/office/drawing/2014/main" id="{2AF56AF3-8858-21FD-6537-73E167213113}"/>
+              </a:ext>
+            </a:extLst>
+          </p:cNvPr>
+          <p:cNvCxnSpPr>
+            <a:cxnSpLocks/>
+            <a:stCxn id="128" idx="3"/>
+            <a:endCxn id="1030" idx="1"/>
+          </p:cNvCxnSpPr>
+          <p:nvPr/>
+        </p:nvCxnSpPr>
+        <p:spPr>
+          <a:xfrm>
+            <a:off x="14471615" y="951805"/>
+            <a:ext cx="1076791" cy="2295890"/>
+          </a:xfrm>
+          <a:prstGeom prst="curvedConnector3">
+            <a:avLst>
+              <a:gd name="adj1" fmla="val 50000"/>
+            </a:avLst>
+          </a:prstGeom>
+          <a:ln>
+            <a:solidFill>
+              <a:srgbClr val="5A00D2"/>
+            </a:solidFill>
+            <a:tailEnd type="triangle"/>
+          </a:ln>
+        </p:spPr>
+        <p:style>
+          <a:lnRef idx="1">
+            <a:schemeClr val="accent1"/>
+          </a:lnRef>
+          <a:fillRef idx="0">
+            <a:schemeClr val="accent1"/>
+          </a:fillRef>
+          <a:effectRef idx="0">
+            <a:schemeClr val="accent1"/>
+          </a:effectRef>
+          <a:fontRef idx="minor">
+            <a:schemeClr val="tx1"/>
+          </a:fontRef>
+        </p:style>
+      </p:cxnSp>
+      <p:pic>
+        <p:nvPicPr>
+          <p:cNvPr id="1037" name="Graphic 1036" descr="Table outline">
+            <a:extLst>
+              <a:ext uri="{FF2B5EF4-FFF2-40B4-BE49-F238E27FC236}">
+                <a16:creationId xmlns:a16="http://schemas.microsoft.com/office/drawing/2014/main" id="{D4D3535F-1EF9-8D30-1B56-853F8A85C7FF}"/>
+              </a:ext>
+            </a:extLst>
+          </p:cNvPr>
+          <p:cNvPicPr>
+            <a:picLocks noChangeAspect="1"/>
+          </p:cNvPicPr>
+          <p:nvPr/>
+        </p:nvPicPr>
+        <p:blipFill>
+          <a:blip>
+            <a:extLst>
+              <a:ext uri="{96DAC541-7B7A-43D3-8B79-37D633B846F1}">
+                <asvg:svgBlip xmlns:asvg="http://schemas.microsoft.com/office/drawing/2016/SVG/main" r:embed="rId2"/>
+              </a:ext>
+            </a:extLst>
+          </a:blip>
+          <a:stretch>
+            <a:fillRect/>
+          </a:stretch>
+        </p:blipFill>
+        <p:spPr>
+          <a:xfrm>
+            <a:off x="16615641" y="3009166"/>
+            <a:ext cx="481251" cy="481251"/>
+          </a:xfrm>
+          <a:prstGeom prst="rect">
+            <a:avLst/>
+          </a:prstGeom>
+        </p:spPr>
+      </p:pic>
+      <p:pic>
+        <p:nvPicPr>
+          <p:cNvPr id="1038" name="Picture 2" descr="bucket Icon - Free PNG &amp; SVG 394460 - Noun Project">
+            <a:extLst>
+              <a:ext uri="{FF2B5EF4-FFF2-40B4-BE49-F238E27FC236}">
+                <a16:creationId xmlns:a16="http://schemas.microsoft.com/office/drawing/2014/main" id="{70C952CE-FBAA-7D92-FFA1-F25CCD774839}"/>
+              </a:ext>
+            </a:extLst>
+          </p:cNvPr>
+          <p:cNvPicPr>
+            <a:picLocks noChangeAspect="1" noChangeArrowheads="1"/>
+          </p:cNvPicPr>
+          <p:nvPr/>
+        </p:nvPicPr>
+        <p:blipFill>
+          <a:blip r:embed="rId3">
+            <a:extLst>
+              <a:ext uri="{28A0092B-C50C-407E-A947-70E740481C1C}">
+                <a14:useLocalDpi xmlns:a14="http://schemas.microsoft.com/office/drawing/2010/main" val="0"/>
+              </a:ext>
+            </a:extLst>
+          </a:blip>
+          <a:srcRect/>
+          <a:stretch>
+            <a:fillRect/>
+          </a:stretch>
+        </p:blipFill>
+        <p:spPr bwMode="auto">
+          <a:xfrm>
+            <a:off x="16586906" y="3287379"/>
+            <a:ext cx="198421" cy="198421"/>
+          </a:xfrm>
+          <a:prstGeom prst="rect">
+            <a:avLst/>
+          </a:prstGeom>
+          <a:solidFill>
+            <a:schemeClr val="bg1"/>
+          </a:solidFill>
+        </p:spPr>
+      </p:pic>
+      <p:cxnSp>
+        <p:nvCxnSpPr>
+          <p:cNvPr id="1039" name="Straight Arrow Connector 47">
+            <a:extLst>
+              <a:ext uri="{FF2B5EF4-FFF2-40B4-BE49-F238E27FC236}">
+                <a16:creationId xmlns:a16="http://schemas.microsoft.com/office/drawing/2014/main" id="{7C903215-C3D7-7281-E182-8901D41E14F5}"/>
+              </a:ext>
+            </a:extLst>
+          </p:cNvPr>
+          <p:cNvCxnSpPr>
+            <a:cxnSpLocks/>
+            <a:stCxn id="1030" idx="3"/>
+            <a:endCxn id="1037" idx="1"/>
+          </p:cNvCxnSpPr>
+          <p:nvPr/>
+        </p:nvCxnSpPr>
+        <p:spPr>
+          <a:xfrm>
+            <a:off x="16207484" y="3247697"/>
+            <a:ext cx="408157" cy="2095"/>
+          </a:xfrm>
+          <a:prstGeom prst="curvedConnector3">
+            <a:avLst>
+              <a:gd name="adj1" fmla="val 50000"/>
+            </a:avLst>
+          </a:prstGeom>
+          <a:ln>
+            <a:solidFill>
+              <a:srgbClr val="5A00D2"/>
+            </a:solidFill>
+            <a:tailEnd type="triangle"/>
+          </a:ln>
+        </p:spPr>
+        <p:style>
+          <a:lnRef idx="1">
+            <a:schemeClr val="accent1"/>
+          </a:lnRef>
+          <a:fillRef idx="0">
+            <a:schemeClr val="accent1"/>
+          </a:fillRef>
+          <a:effectRef idx="0">
+            <a:schemeClr val="accent1"/>
+          </a:effectRef>
+          <a:fontRef idx="minor">
+            <a:schemeClr val="tx1"/>
+          </a:fontRef>
+        </p:style>
+      </p:cxnSp>
+      <p:sp>
+        <p:nvSpPr>
+          <p:cNvPr id="1099" name="Rounded Rectangle 1098">
+            <a:extLst>
+              <a:ext uri="{FF2B5EF4-FFF2-40B4-BE49-F238E27FC236}">
+                <a16:creationId xmlns:a16="http://schemas.microsoft.com/office/drawing/2014/main" id="{A7325B50-3907-135A-1E3C-2FDE77296315}"/>
+              </a:ext>
+            </a:extLst>
+          </p:cNvPr>
+          <p:cNvSpPr/>
+          <p:nvPr/>
+        </p:nvSpPr>
+        <p:spPr>
+          <a:xfrm>
+            <a:off x="1810646" y="2744474"/>
+            <a:ext cx="15774704" cy="2096084"/>
+          </a:xfrm>
+          <a:prstGeom prst="roundRect">
+            <a:avLst/>
+          </a:prstGeom>
+          <a:noFill/>
+          <a:ln>
+            <a:solidFill>
+              <a:schemeClr val="accent1"/>
+            </a:solidFill>
+          </a:ln>
+        </p:spPr>
+        <p:style>
+          <a:lnRef idx="2">
+            <a:schemeClr val="accent1">
+              <a:shade val="50000"/>
+            </a:schemeClr>
+          </a:lnRef>
+          <a:fillRef idx="1">
+            <a:schemeClr val="accent1"/>
+          </a:fillRef>
+          <a:effectRef idx="0">
+            <a:schemeClr val="accent1"/>
+          </a:effectRef>
+          <a:fontRef idx="minor">
+            <a:schemeClr val="lt1"/>
+          </a:fontRef>
+        </p:style>
+        <p:txBody>
+          <a:bodyPr rtlCol="0" anchor="ctr"/>
+          <a:lstStyle/>
+          <a:p>
+            <a:pPr algn="ctr"/>
+            <a:endParaRPr lang="en-US"/>
+          </a:p>
+        </p:txBody>
+      </p:sp>
+      <p:sp>
+        <p:nvSpPr>
+          <p:cNvPr id="1100" name="Rounded Rectangle 1099">
+            <a:extLst>
+              <a:ext uri="{FF2B5EF4-FFF2-40B4-BE49-F238E27FC236}">
+                <a16:creationId xmlns:a16="http://schemas.microsoft.com/office/drawing/2014/main" id="{2C1406DC-8BDB-89D2-54AF-7F20F3312354}"/>
+              </a:ext>
+            </a:extLst>
+          </p:cNvPr>
+          <p:cNvSpPr/>
+          <p:nvPr/>
+        </p:nvSpPr>
+        <p:spPr>
+          <a:xfrm>
+            <a:off x="2084390" y="2645128"/>
+            <a:ext cx="983419" cy="187561"/>
+          </a:xfrm>
+          <a:prstGeom prst="roundRect">
+            <a:avLst/>
+          </a:prstGeom>
+          <a:solidFill>
+            <a:srgbClr val="EB55F5"/>
+          </a:solidFill>
+          <a:ln>
+            <a:noFill/>
+          </a:ln>
+        </p:spPr>
+        <p:style>
+          <a:lnRef idx="2">
+            <a:schemeClr val="accent1">
+              <a:shade val="50000"/>
+            </a:schemeClr>
+          </a:lnRef>
+          <a:fillRef idx="1">
+            <a:schemeClr val="accent1"/>
+          </a:fillRef>
+          <a:effectRef idx="0">
+            <a:schemeClr val="accent1"/>
+          </a:effectRef>
+          <a:fontRef idx="minor">
+            <a:schemeClr val="lt1"/>
+          </a:fontRef>
+        </p:style>
+        <p:txBody>
+          <a:bodyPr lIns="0" rIns="0" rtlCol="0" anchor="ctr"/>
+          <a:lstStyle/>
+          <a:p>
+            <a:pPr algn="ctr"/>
+            <a:r>
+              <a:rPr lang="en-US" sz="800" b="1" dirty="0">
+                <a:solidFill>
+                  <a:schemeClr val="bg1"/>
+                </a:solidFill>
+              </a:rPr>
+              <a:t>Payment</a:t>
+            </a:r>
+          </a:p>
+        </p:txBody>
+      </p:sp>
+      <p:sp>
+        <p:nvSpPr>
+          <p:cNvPr id="1101" name="Rounded Rectangle 1100">
+            <a:extLst>
+              <a:ext uri="{FF2B5EF4-FFF2-40B4-BE49-F238E27FC236}">
+                <a16:creationId xmlns:a16="http://schemas.microsoft.com/office/drawing/2014/main" id="{6F54B2F2-6722-66AE-17ED-08DC68550E9D}"/>
+              </a:ext>
+            </a:extLst>
+          </p:cNvPr>
+          <p:cNvSpPr/>
+          <p:nvPr/>
+        </p:nvSpPr>
+        <p:spPr>
+          <a:xfrm>
+            <a:off x="1810646" y="5135002"/>
+            <a:ext cx="10872586" cy="1661698"/>
+          </a:xfrm>
+          <a:prstGeom prst="roundRect">
+            <a:avLst/>
+          </a:prstGeom>
+          <a:noFill/>
+          <a:ln>
+            <a:solidFill>
+              <a:schemeClr val="accent1"/>
+            </a:solidFill>
+          </a:ln>
+        </p:spPr>
+        <p:style>
+          <a:lnRef idx="2">
+            <a:schemeClr val="accent1">
+              <a:shade val="50000"/>
+            </a:schemeClr>
+          </a:lnRef>
+          <a:fillRef idx="1">
+            <a:schemeClr val="accent1"/>
+          </a:fillRef>
+          <a:effectRef idx="0">
+            <a:schemeClr val="accent1"/>
+          </a:effectRef>
+          <a:fontRef idx="minor">
+            <a:schemeClr val="lt1"/>
+          </a:fontRef>
+        </p:style>
+        <p:txBody>
+          <a:bodyPr rtlCol="0" anchor="ctr"/>
+          <a:lstStyle/>
+          <a:p>
+            <a:pPr algn="ctr"/>
+            <a:endParaRPr lang="en-US"/>
+          </a:p>
+        </p:txBody>
+      </p:sp>
+      <p:sp>
+        <p:nvSpPr>
+          <p:cNvPr id="1102" name="Rounded Rectangle 1101">
+            <a:extLst>
+              <a:ext uri="{FF2B5EF4-FFF2-40B4-BE49-F238E27FC236}">
+                <a16:creationId xmlns:a16="http://schemas.microsoft.com/office/drawing/2014/main" id="{31F78C2C-ED62-D903-5296-438B5D244DE5}"/>
+              </a:ext>
+            </a:extLst>
+          </p:cNvPr>
+          <p:cNvSpPr/>
+          <p:nvPr/>
+        </p:nvSpPr>
+        <p:spPr>
+          <a:xfrm>
+            <a:off x="2121472" y="5025318"/>
+            <a:ext cx="983419" cy="187561"/>
+          </a:xfrm>
+          <a:prstGeom prst="roundRect">
+            <a:avLst/>
+          </a:prstGeom>
+          <a:solidFill>
+            <a:srgbClr val="EB55F5"/>
+          </a:solidFill>
+          <a:ln>
+            <a:noFill/>
+          </a:ln>
+        </p:spPr>
+        <p:style>
+          <a:lnRef idx="2">
+            <a:schemeClr val="accent1">
+              <a:shade val="50000"/>
+            </a:schemeClr>
+          </a:lnRef>
+          <a:fillRef idx="1">
+            <a:schemeClr val="accent1"/>
+          </a:fillRef>
+          <a:effectRef idx="0">
+            <a:schemeClr val="accent1"/>
+          </a:effectRef>
+          <a:fontRef idx="minor">
+            <a:schemeClr val="lt1"/>
+          </a:fontRef>
+        </p:style>
+        <p:txBody>
+          <a:bodyPr lIns="0" rIns="0" rtlCol="0" anchor="ctr"/>
+          <a:lstStyle/>
+          <a:p>
+            <a:pPr algn="ctr"/>
+            <a:r>
+              <a:rPr lang="en-US" sz="800" b="1" dirty="0">
+                <a:solidFill>
+                  <a:schemeClr val="bg1"/>
+                </a:solidFill>
+              </a:rPr>
+              <a:t>Reference Data</a:t>
+            </a:r>
+          </a:p>
+        </p:txBody>
+      </p:sp>
+      <p:pic>
+        <p:nvPicPr>
+          <p:cNvPr id="1109" name="Graphic 1108" descr="Table outline">
+            <a:extLst>
+              <a:ext uri="{FF2B5EF4-FFF2-40B4-BE49-F238E27FC236}">
+                <a16:creationId xmlns:a16="http://schemas.microsoft.com/office/drawing/2014/main" id="{E4873DE8-434C-AAB8-6D25-B65B8E069210}"/>
+              </a:ext>
+            </a:extLst>
+          </p:cNvPr>
+          <p:cNvPicPr>
+            <a:picLocks noChangeAspect="1"/>
+          </p:cNvPicPr>
+          <p:nvPr/>
+        </p:nvPicPr>
+        <p:blipFill>
+          <a:blip>
+            <a:extLst>
+              <a:ext uri="{96DAC541-7B7A-43D3-8B79-37D633B846F1}">
+                <asvg:svgBlip xmlns:asvg="http://schemas.microsoft.com/office/drawing/2016/SVG/main" r:embed="rId2"/>
+              </a:ext>
+            </a:extLst>
+          </a:blip>
+          <a:stretch>
+            <a:fillRect/>
+          </a:stretch>
+        </p:blipFill>
+        <p:spPr>
+          <a:xfrm>
+            <a:off x="2096647" y="2052787"/>
+            <a:ext cx="368444" cy="368444"/>
+          </a:xfrm>
+          <a:prstGeom prst="rect">
+            <a:avLst/>
+          </a:prstGeom>
+        </p:spPr>
+      </p:pic>
+      <p:pic>
+        <p:nvPicPr>
+          <p:cNvPr id="1110" name="Graphic 1109" descr="Table outline">
+            <a:extLst>
+              <a:ext uri="{FF2B5EF4-FFF2-40B4-BE49-F238E27FC236}">
+                <a16:creationId xmlns:a16="http://schemas.microsoft.com/office/drawing/2014/main" id="{807CB083-B9B0-1D4D-0993-712AF01D11BD}"/>
+              </a:ext>
+            </a:extLst>
+          </p:cNvPr>
+          <p:cNvPicPr>
+            <a:picLocks noChangeAspect="1"/>
+          </p:cNvPicPr>
+          <p:nvPr/>
+        </p:nvPicPr>
+        <p:blipFill>
+          <a:blip>
+            <a:extLst>
+              <a:ext uri="{96DAC541-7B7A-43D3-8B79-37D633B846F1}">
+                <asvg:svgBlip xmlns:asvg="http://schemas.microsoft.com/office/drawing/2016/SVG/main" r:embed="rId2"/>
+              </a:ext>
+            </a:extLst>
+          </a:blip>
+          <a:stretch>
+            <a:fillRect/>
+          </a:stretch>
+        </p:blipFill>
+        <p:spPr>
+          <a:xfrm>
+            <a:off x="2436332" y="2052787"/>
+            <a:ext cx="368444" cy="368444"/>
+          </a:xfrm>
+          <a:prstGeom prst="rect">
+            <a:avLst/>
+          </a:prstGeom>
+        </p:spPr>
+      </p:pic>
+      <p:pic>
+        <p:nvPicPr>
+          <p:cNvPr id="1112" name="Graphic 1111" descr="Table outline">
+            <a:extLst>
+              <a:ext uri="{FF2B5EF4-FFF2-40B4-BE49-F238E27FC236}">
+                <a16:creationId xmlns:a16="http://schemas.microsoft.com/office/drawing/2014/main" id="{7AE2CDA5-DFF5-1AD5-AF01-E16B8C0D09D8}"/>
+              </a:ext>
+            </a:extLst>
+          </p:cNvPr>
+          <p:cNvPicPr>
+            <a:picLocks noChangeAspect="1"/>
+          </p:cNvPicPr>
+          <p:nvPr/>
+        </p:nvPicPr>
+        <p:blipFill>
+          <a:blip>
+            <a:extLst>
+              <a:ext uri="{96DAC541-7B7A-43D3-8B79-37D633B846F1}">
+                <asvg:svgBlip xmlns:asvg="http://schemas.microsoft.com/office/drawing/2016/SVG/main" r:embed="rId2"/>
+              </a:ext>
+            </a:extLst>
+          </a:blip>
+          <a:stretch>
+            <a:fillRect/>
+          </a:stretch>
+        </p:blipFill>
+        <p:spPr>
+          <a:xfrm>
+            <a:off x="2783208" y="2052787"/>
+            <a:ext cx="368444" cy="368444"/>
+          </a:xfrm>
+          <a:prstGeom prst="rect">
+            <a:avLst/>
+          </a:prstGeom>
+        </p:spPr>
+      </p:pic>
+      <p:pic>
+        <p:nvPicPr>
+          <p:cNvPr id="1113" name="Graphic 1112" descr="Table outline">
+            <a:extLst>
+              <a:ext uri="{FF2B5EF4-FFF2-40B4-BE49-F238E27FC236}">
+                <a16:creationId xmlns:a16="http://schemas.microsoft.com/office/drawing/2014/main" id="{89E01556-1E42-F2FD-8AC4-018D73A18C05}"/>
+              </a:ext>
+            </a:extLst>
+          </p:cNvPr>
+          <p:cNvPicPr>
+            <a:picLocks noChangeAspect="1"/>
+          </p:cNvPicPr>
+          <p:nvPr/>
+        </p:nvPicPr>
+        <p:blipFill>
+          <a:blip>
+            <a:extLst>
+              <a:ext uri="{96DAC541-7B7A-43D3-8B79-37D633B846F1}">
+                <asvg:svgBlip xmlns:asvg="http://schemas.microsoft.com/office/drawing/2016/SVG/main" r:embed="rId2"/>
+              </a:ext>
+            </a:extLst>
+          </a:blip>
+          <a:stretch>
+            <a:fillRect/>
+          </a:stretch>
+        </p:blipFill>
+        <p:spPr>
+          <a:xfrm>
+            <a:off x="3132922" y="2052787"/>
+            <a:ext cx="368444" cy="368444"/>
+          </a:xfrm>
+          <a:prstGeom prst="rect">
+            <a:avLst/>
+          </a:prstGeom>
+        </p:spPr>
+      </p:pic>
+      <p:sp>
+        <p:nvSpPr>
+          <p:cNvPr id="1114" name="TextBox 1113">
+            <a:extLst>
+              <a:ext uri="{FF2B5EF4-FFF2-40B4-BE49-F238E27FC236}">
+                <a16:creationId xmlns:a16="http://schemas.microsoft.com/office/drawing/2014/main" id="{8AC46241-8FBE-CD95-737F-05955D1C15FC}"/>
+              </a:ext>
+            </a:extLst>
+          </p:cNvPr>
+          <p:cNvSpPr txBox="1"/>
+          <p:nvPr/>
+        </p:nvSpPr>
+        <p:spPr>
+          <a:xfrm>
+            <a:off x="2149677" y="1997311"/>
+            <a:ext cx="337852" cy="197028"/>
+          </a:xfrm>
+          <a:prstGeom prst="rect">
+            <a:avLst/>
+          </a:prstGeom>
+          <a:noFill/>
+        </p:spPr>
+        <p:txBody>
+          <a:bodyPr wrap="none" lIns="0" tIns="0" rIns="0" bIns="0" rtlCol="0">
+            <a:noAutofit/>
+          </a:bodyPr>
+          <a:lstStyle/>
+          <a:p>
+            <a:pPr defTabSz="228600">
+              <a:spcAft>
+                <a:spcPts val="1200"/>
+              </a:spcAft>
+            </a:pPr>
+            <a:r>
+              <a:rPr lang="de-DE" sz="700" dirty="0" err="1"/>
+              <a:t>person</a:t>
+            </a:r>
+            <a:endParaRPr lang="de-DE" sz="700" dirty="0"/>
+          </a:p>
+        </p:txBody>
+      </p:sp>
+      <p:sp>
+        <p:nvSpPr>
+          <p:cNvPr id="1115" name="TextBox 1114">
+            <a:extLst>
+              <a:ext uri="{FF2B5EF4-FFF2-40B4-BE49-F238E27FC236}">
+                <a16:creationId xmlns:a16="http://schemas.microsoft.com/office/drawing/2014/main" id="{70405244-7F3A-89F9-9741-04E7AE3B12E5}"/>
+              </a:ext>
+            </a:extLst>
+          </p:cNvPr>
+          <p:cNvSpPr txBox="1"/>
+          <p:nvPr/>
+        </p:nvSpPr>
+        <p:spPr>
+          <a:xfrm>
+            <a:off x="2474996" y="2004300"/>
+            <a:ext cx="337852" cy="197028"/>
+          </a:xfrm>
+          <a:prstGeom prst="rect">
+            <a:avLst/>
+          </a:prstGeom>
+          <a:noFill/>
+        </p:spPr>
+        <p:txBody>
+          <a:bodyPr wrap="none" lIns="0" tIns="0" rIns="0" bIns="0" rtlCol="0">
+            <a:noAutofit/>
+          </a:bodyPr>
+          <a:lstStyle/>
+          <a:p>
+            <a:pPr defTabSz="228600">
+              <a:spcAft>
+                <a:spcPts val="1200"/>
+              </a:spcAft>
+            </a:pPr>
+            <a:r>
+              <a:rPr lang="de-DE" sz="700" dirty="0" err="1"/>
+              <a:t>address</a:t>
+            </a:r>
+            <a:endParaRPr lang="de-DE" sz="700" dirty="0"/>
+          </a:p>
+        </p:txBody>
+      </p:sp>
+      <p:sp>
+        <p:nvSpPr>
+          <p:cNvPr id="1116" name="TextBox 1115">
+            <a:extLst>
+              <a:ext uri="{FF2B5EF4-FFF2-40B4-BE49-F238E27FC236}">
+                <a16:creationId xmlns:a16="http://schemas.microsoft.com/office/drawing/2014/main" id="{E0D0935E-0EEE-0676-97D1-17A935487E8A}"/>
+              </a:ext>
+            </a:extLst>
+          </p:cNvPr>
+          <p:cNvSpPr txBox="1"/>
+          <p:nvPr/>
+        </p:nvSpPr>
+        <p:spPr>
+          <a:xfrm>
+            <a:off x="2822792" y="2004861"/>
+            <a:ext cx="337852" cy="197028"/>
+          </a:xfrm>
+          <a:prstGeom prst="rect">
+            <a:avLst/>
+          </a:prstGeom>
+          <a:noFill/>
+        </p:spPr>
+        <p:txBody>
+          <a:bodyPr wrap="none" lIns="0" tIns="0" rIns="0" bIns="0" rtlCol="0">
+            <a:noAutofit/>
+          </a:bodyPr>
+          <a:lstStyle/>
+          <a:p>
+            <a:pPr defTabSz="228600">
+              <a:spcAft>
+                <a:spcPts val="1200"/>
+              </a:spcAft>
+            </a:pPr>
+            <a:r>
+              <a:rPr lang="de-DE" sz="700" dirty="0" err="1"/>
+              <a:t>country</a:t>
+            </a:r>
+            <a:endParaRPr lang="de-DE" sz="700" dirty="0"/>
+          </a:p>
+        </p:txBody>
+      </p:sp>
+      <p:sp>
+        <p:nvSpPr>
+          <p:cNvPr id="1117" name="TextBox 1116">
+            <a:extLst>
+              <a:ext uri="{FF2B5EF4-FFF2-40B4-BE49-F238E27FC236}">
+                <a16:creationId xmlns:a16="http://schemas.microsoft.com/office/drawing/2014/main" id="{D0A2E44F-18CB-5255-ACFC-515A2FA1C2BC}"/>
+              </a:ext>
+            </a:extLst>
+          </p:cNvPr>
+          <p:cNvSpPr txBox="1"/>
+          <p:nvPr/>
+        </p:nvSpPr>
+        <p:spPr>
+          <a:xfrm>
+            <a:off x="3208570" y="1998800"/>
+            <a:ext cx="337852" cy="197028"/>
+          </a:xfrm>
+          <a:prstGeom prst="rect">
+            <a:avLst/>
+          </a:prstGeom>
+          <a:noFill/>
+        </p:spPr>
+        <p:txBody>
+          <a:bodyPr wrap="none" lIns="0" tIns="0" rIns="0" bIns="0" rtlCol="0">
+            <a:noAutofit/>
+          </a:bodyPr>
+          <a:lstStyle/>
+          <a:p>
+            <a:pPr defTabSz="228600">
+              <a:spcAft>
+                <a:spcPts val="1200"/>
+              </a:spcAft>
+            </a:pPr>
+            <a:r>
+              <a:rPr lang="de-DE" sz="700" dirty="0" err="1"/>
+              <a:t>card</a:t>
+            </a:r>
+            <a:endParaRPr lang="de-DE" sz="700" dirty="0"/>
+          </a:p>
+        </p:txBody>
+      </p:sp>
+      <p:sp>
+        <p:nvSpPr>
+          <p:cNvPr id="1121" name="Can 1120">
+            <a:extLst>
+              <a:ext uri="{FF2B5EF4-FFF2-40B4-BE49-F238E27FC236}">
+                <a16:creationId xmlns:a16="http://schemas.microsoft.com/office/drawing/2014/main" id="{9499EAB1-99D2-270A-F9C0-B92CA86D8164}"/>
+              </a:ext>
+            </a:extLst>
+          </p:cNvPr>
+          <p:cNvSpPr/>
+          <p:nvPr/>
+        </p:nvSpPr>
+        <p:spPr>
+          <a:xfrm rot="5400000">
+            <a:off x="2405424" y="5896665"/>
+            <a:ext cx="310669" cy="915333"/>
+          </a:xfrm>
+          <a:prstGeom prst="can">
+            <a:avLst/>
+          </a:prstGeom>
+          <a:solidFill>
+            <a:schemeClr val="bg1">
+              <a:lumMod val="85000"/>
+            </a:schemeClr>
+          </a:solidFill>
+          <a:ln>
+            <a:solidFill>
+              <a:schemeClr val="bg1"/>
+            </a:solidFill>
+          </a:ln>
+        </p:spPr>
+        <p:style>
+          <a:lnRef idx="2">
+            <a:schemeClr val="accent1">
+              <a:shade val="50000"/>
+            </a:schemeClr>
+          </a:lnRef>
+          <a:fillRef idx="1">
+            <a:schemeClr val="accent1"/>
+          </a:fillRef>
+          <a:effectRef idx="0">
+            <a:schemeClr val="accent1"/>
+          </a:effectRef>
+          <a:fontRef idx="minor">
+            <a:schemeClr val="lt1"/>
+          </a:fontRef>
+        </p:style>
+        <p:txBody>
+          <a:bodyPr rtlCol="0" anchor="ctr"/>
+          <a:lstStyle/>
+          <a:p>
+            <a:pPr algn="ctr"/>
+            <a:endParaRPr lang="en-US">
+              <a:solidFill>
+                <a:srgbClr val="5A00D2"/>
+              </a:solidFill>
+            </a:endParaRPr>
+          </a:p>
+        </p:txBody>
+      </p:sp>
+      <p:sp>
+        <p:nvSpPr>
+          <p:cNvPr id="1122" name="Rounded Rectangle 1121">
+            <a:extLst>
+              <a:ext uri="{FF2B5EF4-FFF2-40B4-BE49-F238E27FC236}">
+                <a16:creationId xmlns:a16="http://schemas.microsoft.com/office/drawing/2014/main" id="{92865D4C-2265-B853-9341-48C1B2980CB7}"/>
+              </a:ext>
+            </a:extLst>
+          </p:cNvPr>
+          <p:cNvSpPr/>
+          <p:nvPr/>
+        </p:nvSpPr>
+        <p:spPr>
+          <a:xfrm>
+            <a:off x="2236571" y="6267122"/>
+            <a:ext cx="192024" cy="187452"/>
+          </a:xfrm>
+          <a:prstGeom prst="roundRect">
+            <a:avLst/>
+          </a:prstGeom>
+          <a:solidFill>
+            <a:srgbClr val="9600FF"/>
+          </a:solidFill>
+          <a:ln>
+            <a:noFill/>
+          </a:ln>
+        </p:spPr>
+        <p:style>
+          <a:lnRef idx="2">
+            <a:schemeClr val="accent1">
+              <a:shade val="50000"/>
+            </a:schemeClr>
+          </a:lnRef>
+          <a:fillRef idx="1">
+            <a:schemeClr val="accent1"/>
+          </a:fillRef>
+          <a:effectRef idx="0">
+            <a:schemeClr val="accent1"/>
+          </a:effectRef>
+          <a:fontRef idx="minor">
+            <a:schemeClr val="lt1"/>
+          </a:fontRef>
+        </p:style>
+        <p:txBody>
+          <a:bodyPr rtlCol="0" anchor="ctr"/>
+          <a:lstStyle/>
+          <a:p>
+            <a:pPr algn="ctr"/>
+            <a:endParaRPr lang="en-US"/>
+          </a:p>
+        </p:txBody>
+      </p:sp>
+      <p:sp>
+        <p:nvSpPr>
+          <p:cNvPr id="1123" name="Rounded Rectangle 1122">
+            <a:extLst>
+              <a:ext uri="{FF2B5EF4-FFF2-40B4-BE49-F238E27FC236}">
+                <a16:creationId xmlns:a16="http://schemas.microsoft.com/office/drawing/2014/main" id="{AB32017D-C493-1E2A-25E7-2CB6EAE121FF}"/>
+              </a:ext>
+            </a:extLst>
+          </p:cNvPr>
+          <p:cNvSpPr/>
+          <p:nvPr/>
+        </p:nvSpPr>
+        <p:spPr>
+          <a:xfrm>
+            <a:off x="2494067" y="6267122"/>
+            <a:ext cx="192024" cy="187452"/>
+          </a:xfrm>
+          <a:prstGeom prst="roundRect">
+            <a:avLst/>
+          </a:prstGeom>
+          <a:solidFill>
+            <a:srgbClr val="9600FF"/>
+          </a:solidFill>
+          <a:ln>
+            <a:noFill/>
+          </a:ln>
+        </p:spPr>
+        <p:style>
+          <a:lnRef idx="2">
+            <a:schemeClr val="accent1">
+              <a:shade val="50000"/>
+            </a:schemeClr>
+          </a:lnRef>
+          <a:fillRef idx="1">
+            <a:schemeClr val="accent1"/>
+          </a:fillRef>
+          <a:effectRef idx="0">
+            <a:schemeClr val="accent1"/>
+          </a:effectRef>
+          <a:fontRef idx="minor">
+            <a:schemeClr val="lt1"/>
+          </a:fontRef>
+        </p:style>
+        <p:txBody>
+          <a:bodyPr rtlCol="0" anchor="ctr"/>
+          <a:lstStyle/>
+          <a:p>
+            <a:pPr algn="ctr"/>
+            <a:endParaRPr lang="en-US"/>
+          </a:p>
+        </p:txBody>
+      </p:sp>
+      <p:sp>
+        <p:nvSpPr>
+          <p:cNvPr id="1124" name="TextBox 1123">
+            <a:extLst>
+              <a:ext uri="{FF2B5EF4-FFF2-40B4-BE49-F238E27FC236}">
+                <a16:creationId xmlns:a16="http://schemas.microsoft.com/office/drawing/2014/main" id="{E2FF550B-754C-1F60-041D-0926B06DD87D}"/>
+              </a:ext>
+            </a:extLst>
+          </p:cNvPr>
+          <p:cNvSpPr txBox="1"/>
+          <p:nvPr/>
+        </p:nvSpPr>
+        <p:spPr>
+          <a:xfrm>
+            <a:off x="3117098" y="6503758"/>
+            <a:ext cx="0" cy="0"/>
+          </a:xfrm>
+          <a:prstGeom prst="rect">
+            <a:avLst/>
+          </a:prstGeom>
+          <a:noFill/>
+        </p:spPr>
+        <p:txBody>
+          <a:bodyPr wrap="none" lIns="0" tIns="0" rIns="0" bIns="0" rtlCol="0">
+            <a:noAutofit/>
+          </a:bodyPr>
+          <a:lstStyle/>
+          <a:p>
+            <a:pPr defTabSz="228600">
+              <a:spcAft>
+                <a:spcPts val="1200"/>
+              </a:spcAft>
+            </a:pPr>
+            <a:endParaRPr lang="de-DE" dirty="0"/>
+          </a:p>
+        </p:txBody>
+      </p:sp>
+      <p:sp>
+        <p:nvSpPr>
+          <p:cNvPr id="1125" name="TextBox 1124">
+            <a:extLst>
+              <a:ext uri="{FF2B5EF4-FFF2-40B4-BE49-F238E27FC236}">
+                <a16:creationId xmlns:a16="http://schemas.microsoft.com/office/drawing/2014/main" id="{84B2F201-76EC-F1C1-D2D4-8B71B596D9E2}"/>
+              </a:ext>
+            </a:extLst>
+          </p:cNvPr>
+          <p:cNvSpPr txBox="1"/>
+          <p:nvPr/>
+        </p:nvSpPr>
+        <p:spPr>
+          <a:xfrm>
+            <a:off x="2052790" y="6074876"/>
+            <a:ext cx="1666555" cy="197028"/>
+          </a:xfrm>
+          <a:prstGeom prst="rect">
+            <a:avLst/>
+          </a:prstGeom>
+          <a:noFill/>
+        </p:spPr>
+        <p:txBody>
+          <a:bodyPr wrap="none" lIns="0" tIns="0" rIns="0" bIns="0" rtlCol="0">
+            <a:noAutofit/>
+          </a:bodyPr>
+          <a:lstStyle/>
+          <a:p>
+            <a:pPr defTabSz="228600">
+              <a:spcAft>
+                <a:spcPts val="1200"/>
+              </a:spcAft>
+            </a:pPr>
+            <a:r>
+              <a:rPr lang="de-DE" sz="700" dirty="0"/>
+              <a:t>priv.ref.geonames.state.v1</a:t>
+            </a:r>
+          </a:p>
+        </p:txBody>
+      </p:sp>
+      <p:sp>
+        <p:nvSpPr>
+          <p:cNvPr id="1126" name="Rounded Rectangle 1125">
+            <a:extLst>
+              <a:ext uri="{FF2B5EF4-FFF2-40B4-BE49-F238E27FC236}">
+                <a16:creationId xmlns:a16="http://schemas.microsoft.com/office/drawing/2014/main" id="{A101B5E3-515C-9272-89D1-39D9967557B7}"/>
+              </a:ext>
+            </a:extLst>
+          </p:cNvPr>
+          <p:cNvSpPr/>
+          <p:nvPr/>
+        </p:nvSpPr>
+        <p:spPr>
+          <a:xfrm>
+            <a:off x="3389806" y="6438512"/>
+            <a:ext cx="793882" cy="229853"/>
+          </a:xfrm>
+          <a:prstGeom prst="roundRect">
+            <a:avLst/>
+          </a:prstGeom>
+          <a:solidFill>
+            <a:schemeClr val="accent3">
+              <a:lumMod val="60000"/>
+              <a:lumOff val="40000"/>
+            </a:schemeClr>
+          </a:solidFill>
+          <a:ln>
+            <a:solidFill>
+              <a:schemeClr val="accent1"/>
+            </a:solidFill>
+          </a:ln>
+        </p:spPr>
+        <p:style>
+          <a:lnRef idx="2">
+            <a:schemeClr val="accent1">
+              <a:shade val="50000"/>
+            </a:schemeClr>
+          </a:lnRef>
+          <a:fillRef idx="1">
+            <a:schemeClr val="accent1"/>
+          </a:fillRef>
+          <a:effectRef idx="0">
+            <a:schemeClr val="accent1"/>
+          </a:effectRef>
+          <a:fontRef idx="minor">
+            <a:schemeClr val="lt1"/>
+          </a:fontRef>
+        </p:style>
+        <p:txBody>
+          <a:bodyPr lIns="0" tIns="0" rIns="0" bIns="0" rtlCol="0" anchor="ctr"/>
+          <a:lstStyle/>
+          <a:p>
+            <a:pPr algn="ctr"/>
+            <a:r>
+              <a:rPr lang="en-US" sz="700" b="1" dirty="0"/>
+              <a:t>File to Kafka</a:t>
+            </a:r>
+          </a:p>
+        </p:txBody>
+      </p:sp>
+      <p:pic>
+        <p:nvPicPr>
+          <p:cNvPr id="1130" name="Graphic 1129" descr="Paper outline">
+            <a:extLst>
+              <a:ext uri="{FF2B5EF4-FFF2-40B4-BE49-F238E27FC236}">
+                <a16:creationId xmlns:a16="http://schemas.microsoft.com/office/drawing/2014/main" id="{0BC26872-8F47-87C3-64DE-DB100A77C689}"/>
+              </a:ext>
+            </a:extLst>
+          </p:cNvPr>
+          <p:cNvPicPr>
+            <a:picLocks noChangeAspect="1"/>
+          </p:cNvPicPr>
+          <p:nvPr/>
+        </p:nvPicPr>
+        <p:blipFill>
+          <a:blip>
+            <a:extLst>
+              <a:ext uri="{96DAC541-7B7A-43D3-8B79-37D633B846F1}">
+                <asvg:svgBlip xmlns:asvg="http://schemas.microsoft.com/office/drawing/2016/SVG/main" r:embed="rId4"/>
+              </a:ext>
+            </a:extLst>
+          </a:blip>
+          <a:stretch>
+            <a:fillRect/>
+          </a:stretch>
+        </p:blipFill>
+        <p:spPr>
+          <a:xfrm>
+            <a:off x="4417530" y="6351096"/>
             <a:ext cx="404472" cy="404472"/>
           </a:xfrm>
           <a:prstGeom prst="rect">
@@ -44359,7 +50159,7 @@
           <p:cNvPr id="1131" name="Straight Arrow Connector 47">
             <a:extLst>
               <a:ext uri="{FF2B5EF4-FFF2-40B4-BE49-F238E27FC236}">
-                <a16:creationId xmlns:a16="http://schemas.microsoft.com/office/drawing/2014/main" id="{0C00FC9A-5EBD-DF3B-4DAB-4FE3A7843E2C}"/>
+                <a16:creationId xmlns:a16="http://schemas.microsoft.com/office/drawing/2014/main" id="{70932B0C-8F6A-BB6B-E0B3-EC053BF681BE}"/>
               </a:ext>
             </a:extLst>
           </p:cNvPr>
@@ -44372,13 +50172,13 @@
         </p:nvCxnSpPr>
         <p:spPr>
           <a:xfrm rot="10800000">
-            <a:off x="2103090" y="6131596"/>
-            <a:ext cx="1286716" cy="316337"/>
+            <a:off x="2103092" y="6354333"/>
+            <a:ext cx="1286714" cy="199107"/>
           </a:xfrm>
           <a:prstGeom prst="curvedConnector5">
             <a:avLst>
               <a:gd name="adj1" fmla="val 26180"/>
-              <a:gd name="adj2" fmla="val 1414"/>
+              <a:gd name="adj2" fmla="val -56262"/>
               <a:gd name="adj3" fmla="val 117766"/>
             </a:avLst>
           </a:prstGeom>
@@ -44409,7 +50209,7 @@
           <p:cNvPr id="1137" name="Straight Arrow Connector 47">
             <a:extLst>
               <a:ext uri="{FF2B5EF4-FFF2-40B4-BE49-F238E27FC236}">
-                <a16:creationId xmlns:a16="http://schemas.microsoft.com/office/drawing/2014/main" id="{EE161CBB-5A0F-7DAE-9B3E-74788AEF7E2B}"/>
+                <a16:creationId xmlns:a16="http://schemas.microsoft.com/office/drawing/2014/main" id="{C797ACBB-F68E-A456-7A83-93B85D9C6E42}"/>
               </a:ext>
             </a:extLst>
           </p:cNvPr>
@@ -44422,7 +50222,7 @@
         </p:nvCxnSpPr>
         <p:spPr>
           <a:xfrm rot="10800000" flipV="1">
-            <a:off x="4183688" y="6447826"/>
+            <a:off x="4183688" y="6553333"/>
             <a:ext cx="233842" cy="105"/>
           </a:xfrm>
           <a:prstGeom prst="curvedConnector3">
@@ -44457,7 +50257,7 @@
           <p:cNvPr id="1140" name="TextBox 1139">
             <a:extLst>
               <a:ext uri="{FF2B5EF4-FFF2-40B4-BE49-F238E27FC236}">
-                <a16:creationId xmlns:a16="http://schemas.microsoft.com/office/drawing/2014/main" id="{70FAA4D7-8666-AD82-3B1D-988D8E3BBC96}"/>
+                <a16:creationId xmlns:a16="http://schemas.microsoft.com/office/drawing/2014/main" id="{CDC59D17-2098-B87B-E6F3-C3B8EE425B40}"/>
               </a:ext>
             </a:extLst>
           </p:cNvPr>
@@ -44466,7 +50266,7 @@
         </p:nvSpPr>
         <p:spPr>
           <a:xfrm>
-            <a:off x="4366646" y="6146060"/>
+            <a:off x="4366646" y="6251567"/>
             <a:ext cx="914400" cy="122400"/>
           </a:xfrm>
           <a:prstGeom prst="rect">
@@ -44492,12 +50292,96 @@
           </a:p>
         </p:txBody>
       </p:sp>
-      <p:sp>
-        <p:nvSpPr>
-          <p:cNvPr id="1150" name="Rounded Rectangle 1149">
-            <a:extLst>
-              <a:ext uri="{FF2B5EF4-FFF2-40B4-BE49-F238E27FC236}">
-                <a16:creationId xmlns:a16="http://schemas.microsoft.com/office/drawing/2014/main" id="{3F59B708-14B4-6309-AA43-243E0132764B}"/>
+      <p:cxnSp>
+        <p:nvCxnSpPr>
+          <p:cNvPr id="1151" name="Straight Arrow Connector 47">
+            <a:extLst>
+              <a:ext uri="{FF2B5EF4-FFF2-40B4-BE49-F238E27FC236}">
+                <a16:creationId xmlns:a16="http://schemas.microsoft.com/office/drawing/2014/main" id="{322D2140-0F31-A578-E8DF-6DE7EABD138A}"/>
+              </a:ext>
+            </a:extLst>
+          </p:cNvPr>
+          <p:cNvCxnSpPr>
+            <a:cxnSpLocks/>
+            <a:stCxn id="1121" idx="1"/>
+          </p:cNvCxnSpPr>
+          <p:nvPr/>
+        </p:nvCxnSpPr>
+        <p:spPr>
+          <a:xfrm>
+            <a:off x="3018425" y="6354332"/>
+            <a:ext cx="5011883" cy="12700"/>
+          </a:xfrm>
+          <a:prstGeom prst="curvedConnector3">
+            <a:avLst>
+              <a:gd name="adj1" fmla="val 50000"/>
+            </a:avLst>
+          </a:prstGeom>
+          <a:ln>
+            <a:solidFill>
+              <a:srgbClr val="5A00D2"/>
+            </a:solidFill>
+            <a:tailEnd type="triangle"/>
+          </a:ln>
+        </p:spPr>
+        <p:style>
+          <a:lnRef idx="1">
+            <a:schemeClr val="accent1"/>
+          </a:lnRef>
+          <a:fillRef idx="0">
+            <a:schemeClr val="accent1"/>
+          </a:fillRef>
+          <a:effectRef idx="0">
+            <a:schemeClr val="accent1"/>
+          </a:effectRef>
+          <a:fontRef idx="minor">
+            <a:schemeClr val="tx1"/>
+          </a:fontRef>
+        </p:style>
+      </p:cxnSp>
+      <p:sp>
+        <p:nvSpPr>
+          <p:cNvPr id="1167" name="TextBox 1166">
+            <a:extLst>
+              <a:ext uri="{FF2B5EF4-FFF2-40B4-BE49-F238E27FC236}">
+                <a16:creationId xmlns:a16="http://schemas.microsoft.com/office/drawing/2014/main" id="{BF2DDE25-B3F9-C4A7-BAB5-74EBAEDDE55E}"/>
+              </a:ext>
+            </a:extLst>
+          </p:cNvPr>
+          <p:cNvSpPr txBox="1"/>
+          <p:nvPr/>
+        </p:nvSpPr>
+        <p:spPr>
+          <a:xfrm>
+            <a:off x="13675750" y="5308367"/>
+            <a:ext cx="0" cy="0"/>
+          </a:xfrm>
+          <a:prstGeom prst="rect">
+            <a:avLst/>
+          </a:prstGeom>
+          <a:noFill/>
+        </p:spPr>
+        <p:txBody>
+          <a:bodyPr wrap="none" lIns="0" tIns="0" rIns="0" bIns="0" rtlCol="0">
+            <a:noAutofit/>
+          </a:bodyPr>
+          <a:lstStyle/>
+          <a:p>
+            <a:pPr defTabSz="228600">
+              <a:spcAft>
+                <a:spcPts val="1200"/>
+              </a:spcAft>
+            </a:pPr>
+            <a:endParaRPr lang="de-DE" dirty="0"/>
+          </a:p>
+        </p:txBody>
+      </p:sp>
+      <p:sp>
+        <p:nvSpPr>
+          <p:cNvPr id="2" name="Can 1">
+            <a:extLst>
+              <a:ext uri="{FF2B5EF4-FFF2-40B4-BE49-F238E27FC236}">
+                <a16:creationId xmlns:a16="http://schemas.microsoft.com/office/drawing/2014/main" id="{DF5D74C1-5BE8-25AF-0373-B8188FED763F}"/>
               </a:ext>
             </a:extLst>
           </p:cNvPr>
@@ -44506,22 +50390,17 @@
         </p:nvSpPr>
         <p:spPr>
           <a:xfrm>
-            <a:off x="8244101" y="4199712"/>
-            <a:ext cx="659078" cy="206150"/>
-          </a:xfrm>
-          <a:prstGeom prst="roundRect">
+            <a:off x="2209975" y="5347947"/>
+            <a:ext cx="676093" cy="253790"/>
+          </a:xfrm>
+          <a:prstGeom prst="can">
             <a:avLst/>
           </a:prstGeom>
           <a:solidFill>
-            <a:schemeClr val="accent3">
-              <a:lumMod val="60000"/>
-              <a:lumOff val="40000"/>
-            </a:schemeClr>
+            <a:schemeClr val="accent2"/>
           </a:solidFill>
           <a:ln>
-            <a:solidFill>
-              <a:schemeClr val="accent1"/>
-            </a:solidFill>
+            <a:noFill/>
           </a:ln>
         </p:spPr>
         <p:style>
@@ -44541,37 +50420,175 @@
           </a:fontRef>
         </p:style>
         <p:txBody>
+          <a:bodyPr tIns="91440" bIns="91440" rtlCol="0" anchor="ctr"/>
+          <a:lstStyle/>
+          <a:p>
+            <a:pPr algn="ctr"/>
+            <a:r>
+              <a:rPr lang="en-GB" sz="700" b="1" dirty="0"/>
+              <a:t>RDBMS</a:t>
+            </a:r>
+            <a:endParaRPr lang="en-GB" sz="800" b="1" dirty="0"/>
+          </a:p>
+        </p:txBody>
+      </p:sp>
+      <p:pic>
+        <p:nvPicPr>
+          <p:cNvPr id="10" name="Graphic 9" descr="Table outline">
+            <a:extLst>
+              <a:ext uri="{FF2B5EF4-FFF2-40B4-BE49-F238E27FC236}">
+                <a16:creationId xmlns:a16="http://schemas.microsoft.com/office/drawing/2014/main" id="{BC693D5E-05BE-72A4-6B74-3F8A672E165F}"/>
+              </a:ext>
+            </a:extLst>
+          </p:cNvPr>
+          <p:cNvPicPr>
+            <a:picLocks noChangeAspect="1"/>
+          </p:cNvPicPr>
+          <p:nvPr/>
+        </p:nvPicPr>
+        <p:blipFill>
+          <a:blip>
+            <a:extLst>
+              <a:ext uri="{96DAC541-7B7A-43D3-8B79-37D633B846F1}">
+                <asvg:svgBlip xmlns:asvg="http://schemas.microsoft.com/office/drawing/2016/SVG/main" r:embed="rId2"/>
+              </a:ext>
+            </a:extLst>
+          </a:blip>
+          <a:stretch>
+            <a:fillRect/>
+          </a:stretch>
+        </p:blipFill>
+        <p:spPr>
+          <a:xfrm>
+            <a:off x="2358053" y="5660742"/>
+            <a:ext cx="334949" cy="334949"/>
+          </a:xfrm>
+          <a:prstGeom prst="rect">
+            <a:avLst/>
+          </a:prstGeom>
+        </p:spPr>
+      </p:pic>
+      <p:sp>
+        <p:nvSpPr>
+          <p:cNvPr id="13" name="TextBox 12">
+            <a:extLst>
+              <a:ext uri="{FF2B5EF4-FFF2-40B4-BE49-F238E27FC236}">
+                <a16:creationId xmlns:a16="http://schemas.microsoft.com/office/drawing/2014/main" id="{CABE9D0F-8262-EC36-B19A-9940F6C8768E}"/>
+              </a:ext>
+            </a:extLst>
+          </p:cNvPr>
+          <p:cNvSpPr txBox="1"/>
+          <p:nvPr/>
+        </p:nvSpPr>
+        <p:spPr>
+          <a:xfrm>
+            <a:off x="2368948" y="5607357"/>
+            <a:ext cx="337852" cy="179116"/>
+          </a:xfrm>
+          <a:prstGeom prst="rect">
+            <a:avLst/>
+          </a:prstGeom>
+          <a:noFill/>
+        </p:spPr>
+        <p:txBody>
+          <a:bodyPr wrap="none" lIns="0" tIns="0" rIns="0" bIns="0" rtlCol="0">
+            <a:noAutofit/>
+          </a:bodyPr>
+          <a:lstStyle/>
+          <a:p>
+            <a:pPr defTabSz="228600">
+              <a:spcAft>
+                <a:spcPts val="1200"/>
+              </a:spcAft>
+            </a:pPr>
+            <a:r>
+              <a:rPr lang="de-DE" sz="700" dirty="0" err="1"/>
+              <a:t>merchant</a:t>
+            </a:r>
+            <a:endParaRPr lang="de-DE" sz="700" dirty="0"/>
+          </a:p>
+        </p:txBody>
+      </p:sp>
+      <p:sp>
+        <p:nvSpPr>
+          <p:cNvPr id="24" name="Rounded Rectangle 23">
+            <a:extLst>
+              <a:ext uri="{FF2B5EF4-FFF2-40B4-BE49-F238E27FC236}">
+                <a16:creationId xmlns:a16="http://schemas.microsoft.com/office/drawing/2014/main" id="{87CA2075-0D6A-DDED-E2C3-13B219CFFA4D}"/>
+              </a:ext>
+            </a:extLst>
+          </p:cNvPr>
+          <p:cNvSpPr/>
+          <p:nvPr/>
+        </p:nvSpPr>
+        <p:spPr>
+          <a:xfrm>
+            <a:off x="3196847" y="5369711"/>
+            <a:ext cx="659078" cy="206150"/>
+          </a:xfrm>
+          <a:prstGeom prst="roundRect">
+            <a:avLst/>
+          </a:prstGeom>
+          <a:solidFill>
+            <a:schemeClr val="accent3">
+              <a:lumMod val="60000"/>
+              <a:lumOff val="40000"/>
+            </a:schemeClr>
+          </a:solidFill>
+          <a:ln>
+            <a:solidFill>
+              <a:schemeClr val="accent1"/>
+            </a:solidFill>
+          </a:ln>
+        </p:spPr>
+        <p:style>
+          <a:lnRef idx="2">
+            <a:schemeClr val="accent1">
+              <a:shade val="50000"/>
+            </a:schemeClr>
+          </a:lnRef>
+          <a:fillRef idx="1">
+            <a:schemeClr val="accent1"/>
+          </a:fillRef>
+          <a:effectRef idx="0">
+            <a:schemeClr val="accent1"/>
+          </a:effectRef>
+          <a:fontRef idx="minor">
+            <a:schemeClr val="lt1"/>
+          </a:fontRef>
+        </p:style>
+        <p:txBody>
           <a:bodyPr rtlCol="0" anchor="ctr"/>
           <a:lstStyle/>
           <a:p>
             <a:pPr algn="ctr"/>
             <a:r>
               <a:rPr lang="en-US" sz="700" b="1" dirty="0"/>
-              <a:t>Enricher</a:t>
+              <a:t>CDC</a:t>
             </a:r>
           </a:p>
         </p:txBody>
       </p:sp>
       <p:cxnSp>
         <p:nvCxnSpPr>
-          <p:cNvPr id="1151" name="Straight Arrow Connector 47">
-            <a:extLst>
-              <a:ext uri="{FF2B5EF4-FFF2-40B4-BE49-F238E27FC236}">
-                <a16:creationId xmlns:a16="http://schemas.microsoft.com/office/drawing/2014/main" id="{9A277930-8834-BE49-9C0A-3499B7FD5A8D}"/>
+          <p:cNvPr id="29" name="Straight Arrow Connector 47">
+            <a:extLst>
+              <a:ext uri="{FF2B5EF4-FFF2-40B4-BE49-F238E27FC236}">
+                <a16:creationId xmlns:a16="http://schemas.microsoft.com/office/drawing/2014/main" id="{AE79C14D-78A0-A7DD-3FC8-4C0102233944}"/>
               </a:ext>
             </a:extLst>
           </p:cNvPr>
           <p:cNvCxnSpPr>
             <a:cxnSpLocks/>
-            <a:stCxn id="1121" idx="1"/>
-            <a:endCxn id="1150" idx="1"/>
+            <a:stCxn id="2" idx="4"/>
+            <a:endCxn id="24" idx="1"/>
           </p:cNvCxnSpPr>
           <p:nvPr/>
         </p:nvCxnSpPr>
         <p:spPr>
           <a:xfrm flipV="1">
-            <a:off x="3018423" y="4302787"/>
-            <a:ext cx="5225678" cy="1828806"/>
+            <a:off x="2886068" y="5472786"/>
+            <a:ext cx="310779" cy="2056"/>
           </a:xfrm>
           <a:prstGeom prst="curvedConnector3">
             <a:avLst>
@@ -44602,24 +50619,24 @@
       </p:cxnSp>
       <p:cxnSp>
         <p:nvCxnSpPr>
-          <p:cNvPr id="1163" name="Straight Arrow Connector 47">
-            <a:extLst>
-              <a:ext uri="{FF2B5EF4-FFF2-40B4-BE49-F238E27FC236}">
-                <a16:creationId xmlns:a16="http://schemas.microsoft.com/office/drawing/2014/main" id="{EA815649-34E2-E3AD-9F87-A2F2CDE03C35}"/>
+          <p:cNvPr id="33" name="Straight Arrow Connector 47">
+            <a:extLst>
+              <a:ext uri="{FF2B5EF4-FFF2-40B4-BE49-F238E27FC236}">
+                <a16:creationId xmlns:a16="http://schemas.microsoft.com/office/drawing/2014/main" id="{92FCFC25-735F-9313-26FD-71BE22717799}"/>
               </a:ext>
             </a:extLst>
           </p:cNvPr>
           <p:cNvCxnSpPr>
             <a:cxnSpLocks/>
-            <a:stCxn id="85" idx="1"/>
-            <a:endCxn id="1150" idx="1"/>
+            <a:stCxn id="24" idx="3"/>
+            <a:endCxn id="70" idx="3"/>
           </p:cNvCxnSpPr>
           <p:nvPr/>
         </p:nvCxnSpPr>
         <p:spPr>
-          <a:xfrm>
-            <a:off x="7730945" y="3822765"/>
-            <a:ext cx="513156" cy="480022"/>
+          <a:xfrm flipV="1">
+            <a:off x="3855925" y="5472472"/>
+            <a:ext cx="344870" cy="314"/>
           </a:xfrm>
           <a:prstGeom prst="curvedConnector3">
             <a:avLst>
@@ -44648,47 +50665,58 @@
           </a:fontRef>
         </p:style>
       </p:cxnSp>
-      <p:sp>
-        <p:nvSpPr>
-          <p:cNvPr id="1167" name="TextBox 1166">
-            <a:extLst>
-              <a:ext uri="{FF2B5EF4-FFF2-40B4-BE49-F238E27FC236}">
-                <a16:creationId xmlns:a16="http://schemas.microsoft.com/office/drawing/2014/main" id="{C785EC6A-D258-6268-A1F9-C35F7479E13D}"/>
-              </a:ext>
-            </a:extLst>
-          </p:cNvPr>
-          <p:cNvSpPr txBox="1"/>
+      <p:cxnSp>
+        <p:nvCxnSpPr>
+          <p:cNvPr id="94" name="Straight Arrow Connector 47">
+            <a:extLst>
+              <a:ext uri="{FF2B5EF4-FFF2-40B4-BE49-F238E27FC236}">
+                <a16:creationId xmlns:a16="http://schemas.microsoft.com/office/drawing/2014/main" id="{78D20E2F-262A-3866-C7EF-A7514997369F}"/>
+              </a:ext>
+            </a:extLst>
+          </p:cNvPr>
+          <p:cNvCxnSpPr>
+            <a:cxnSpLocks/>
+            <a:stCxn id="8" idx="1"/>
+            <a:endCxn id="68" idx="1"/>
+          </p:cNvCxnSpPr>
           <p:nvPr/>
-        </p:nvSpPr>
-        <p:spPr>
-          <a:xfrm>
-            <a:off x="13675750" y="5202860"/>
-            <a:ext cx="0" cy="0"/>
-          </a:xfrm>
-          <a:prstGeom prst="rect">
-            <a:avLst/>
+        </p:nvCxnSpPr>
+        <p:spPr>
+          <a:xfrm>
+            <a:off x="4378923" y="1548934"/>
+            <a:ext cx="1385736" cy="2379367"/>
+          </a:xfrm>
+          <a:prstGeom prst="curvedConnector3">
+            <a:avLst>
+              <a:gd name="adj1" fmla="val 50000"/>
+            </a:avLst>
           </a:prstGeom>
-          <a:noFill/>
-        </p:spPr>
-        <p:txBody>
-          <a:bodyPr wrap="none" lIns="0" tIns="0" rIns="0" bIns="0" rtlCol="0">
-            <a:noAutofit/>
-          </a:bodyPr>
-          <a:lstStyle/>
-          <a:p>
-            <a:pPr defTabSz="228600">
-              <a:spcAft>
-                <a:spcPts val="1200"/>
-              </a:spcAft>
-            </a:pPr>
-            <a:endParaRPr lang="de-DE" dirty="0"/>
-          </a:p>
-        </p:txBody>
-      </p:sp>
+          <a:ln>
+            <a:solidFill>
+              <a:srgbClr val="5A00D2"/>
+            </a:solidFill>
+            <a:tailEnd type="triangle"/>
+          </a:ln>
+        </p:spPr>
+        <p:style>
+          <a:lnRef idx="1">
+            <a:schemeClr val="accent1"/>
+          </a:lnRef>
+          <a:fillRef idx="0">
+            <a:schemeClr val="accent1"/>
+          </a:fillRef>
+          <a:effectRef idx="0">
+            <a:schemeClr val="accent1"/>
+          </a:effectRef>
+          <a:fontRef idx="minor">
+            <a:schemeClr val="tx1"/>
+          </a:fontRef>
+        </p:style>
+      </p:cxnSp>
     </p:spTree>
     <p:extLst>
       <p:ext uri="{BB962C8B-B14F-4D97-AF65-F5344CB8AC3E}">
-        <p14:creationId xmlns:p14="http://schemas.microsoft.com/office/powerpoint/2010/main" val="771826861"/>
+        <p14:creationId xmlns:p14="http://schemas.microsoft.com/office/powerpoint/2010/main" val="1685326604"/>
       </p:ext>
     </p:extLst>
   </p:cSld>

--- a/doc/use-case.pptx
+++ b/doc/use-case.pptx
@@ -242,7 +242,7 @@
             <a:fld id="{1DE7078C-3525-4C9B-BF62-C9FD13B9A875}" type="datetimeFigureOut">
               <a:rPr lang="en-US" smtClean="0"/>
               <a:pPr/>
-              <a:t>9/8/26</a:t>
+              <a:t>9/10/26</a:t>
             </a:fld>
             <a:endParaRPr lang="en-US" dirty="0"/>
           </a:p>
@@ -39669,7 +39669,7 @@
             <a:pPr algn="ctr"/>
             <a:r>
               <a:rPr lang="en-US" sz="700" b="1" dirty="0"/>
-              <a:t>Flagger</a:t>
+              <a:t>Merchants Flagging</a:t>
             </a:r>
           </a:p>
         </p:txBody>
@@ -39750,247 +39750,6 @@
             <a:r>
               <a:rPr lang="de-DE" sz="700" dirty="0"/>
               <a:t>priv.pay.transaction.delta.v1</a:t>
-            </a:r>
-          </a:p>
-        </p:txBody>
-      </p:sp>
-      <p:sp>
-        <p:nvSpPr>
-          <p:cNvPr id="47" name="Can 46">
-            <a:extLst>
-              <a:ext uri="{FF2B5EF4-FFF2-40B4-BE49-F238E27FC236}">
-                <a16:creationId xmlns:a16="http://schemas.microsoft.com/office/drawing/2014/main" id="{696F5165-E584-1361-08BE-F6AD14016330}"/>
-              </a:ext>
-            </a:extLst>
-          </p:cNvPr>
-          <p:cNvSpPr/>
-          <p:nvPr/>
-        </p:nvSpPr>
-        <p:spPr>
-          <a:xfrm rot="5400000">
-            <a:off x="2391444" y="4067290"/>
-            <a:ext cx="310669" cy="915333"/>
-          </a:xfrm>
-          <a:prstGeom prst="can">
-            <a:avLst/>
-          </a:prstGeom>
-          <a:solidFill>
-            <a:schemeClr val="bg1">
-              <a:lumMod val="85000"/>
-            </a:schemeClr>
-          </a:solidFill>
-          <a:ln>
-            <a:solidFill>
-              <a:schemeClr val="bg1"/>
-            </a:solidFill>
-          </a:ln>
-        </p:spPr>
-        <p:style>
-          <a:lnRef idx="2">
-            <a:schemeClr val="accent1">
-              <a:shade val="50000"/>
-            </a:schemeClr>
-          </a:lnRef>
-          <a:fillRef idx="1">
-            <a:schemeClr val="accent1"/>
-          </a:fillRef>
-          <a:effectRef idx="0">
-            <a:schemeClr val="accent1"/>
-          </a:effectRef>
-          <a:fontRef idx="minor">
-            <a:schemeClr val="lt1"/>
-          </a:fontRef>
-        </p:style>
-        <p:txBody>
-          <a:bodyPr rtlCol="0" anchor="ctr"/>
-          <a:lstStyle/>
-          <a:p>
-            <a:pPr algn="ctr"/>
-            <a:endParaRPr lang="en-US">
-              <a:solidFill>
-                <a:srgbClr val="5A00D2"/>
-              </a:solidFill>
-            </a:endParaRPr>
-          </a:p>
-        </p:txBody>
-      </p:sp>
-      <p:sp>
-        <p:nvSpPr>
-          <p:cNvPr id="48" name="Rounded Rectangle 47">
-            <a:extLst>
-              <a:ext uri="{FF2B5EF4-FFF2-40B4-BE49-F238E27FC236}">
-                <a16:creationId xmlns:a16="http://schemas.microsoft.com/office/drawing/2014/main" id="{7FC7DCCC-AE56-E390-D568-69B0BD614F15}"/>
-              </a:ext>
-            </a:extLst>
-          </p:cNvPr>
-          <p:cNvSpPr/>
-          <p:nvPr/>
-        </p:nvSpPr>
-        <p:spPr>
-          <a:xfrm>
-            <a:off x="2222591" y="4437747"/>
-            <a:ext cx="192024" cy="187452"/>
-          </a:xfrm>
-          <a:prstGeom prst="roundRect">
-            <a:avLst/>
-          </a:prstGeom>
-          <a:solidFill>
-            <a:srgbClr val="9600FF"/>
-          </a:solidFill>
-          <a:ln>
-            <a:noFill/>
-          </a:ln>
-        </p:spPr>
-        <p:style>
-          <a:lnRef idx="2">
-            <a:schemeClr val="accent1">
-              <a:shade val="50000"/>
-            </a:schemeClr>
-          </a:lnRef>
-          <a:fillRef idx="1">
-            <a:schemeClr val="accent1"/>
-          </a:fillRef>
-          <a:effectRef idx="0">
-            <a:schemeClr val="accent1"/>
-          </a:effectRef>
-          <a:fontRef idx="minor">
-            <a:schemeClr val="lt1"/>
-          </a:fontRef>
-        </p:style>
-        <p:txBody>
-          <a:bodyPr rtlCol="0" anchor="ctr"/>
-          <a:lstStyle/>
-          <a:p>
-            <a:pPr algn="ctr"/>
-            <a:endParaRPr lang="en-US"/>
-          </a:p>
-        </p:txBody>
-      </p:sp>
-      <p:sp>
-        <p:nvSpPr>
-          <p:cNvPr id="49" name="Rounded Rectangle 48">
-            <a:extLst>
-              <a:ext uri="{FF2B5EF4-FFF2-40B4-BE49-F238E27FC236}">
-                <a16:creationId xmlns:a16="http://schemas.microsoft.com/office/drawing/2014/main" id="{013258CB-6810-B545-E055-CA874DD464D5}"/>
-              </a:ext>
-            </a:extLst>
-          </p:cNvPr>
-          <p:cNvSpPr/>
-          <p:nvPr/>
-        </p:nvSpPr>
-        <p:spPr>
-          <a:xfrm>
-            <a:off x="2480087" y="4437747"/>
-            <a:ext cx="192024" cy="187452"/>
-          </a:xfrm>
-          <a:prstGeom prst="roundRect">
-            <a:avLst/>
-          </a:prstGeom>
-          <a:solidFill>
-            <a:srgbClr val="9600FF"/>
-          </a:solidFill>
-          <a:ln>
-            <a:noFill/>
-          </a:ln>
-        </p:spPr>
-        <p:style>
-          <a:lnRef idx="2">
-            <a:schemeClr val="accent1">
-              <a:shade val="50000"/>
-            </a:schemeClr>
-          </a:lnRef>
-          <a:fillRef idx="1">
-            <a:schemeClr val="accent1"/>
-          </a:fillRef>
-          <a:effectRef idx="0">
-            <a:schemeClr val="accent1"/>
-          </a:effectRef>
-          <a:fontRef idx="minor">
-            <a:schemeClr val="lt1"/>
-          </a:fontRef>
-        </p:style>
-        <p:txBody>
-          <a:bodyPr rtlCol="0" anchor="ctr"/>
-          <a:lstStyle/>
-          <a:p>
-            <a:pPr algn="ctr"/>
-            <a:endParaRPr lang="en-US"/>
-          </a:p>
-        </p:txBody>
-      </p:sp>
-      <p:sp>
-        <p:nvSpPr>
-          <p:cNvPr id="50" name="TextBox 49">
-            <a:extLst>
-              <a:ext uri="{FF2B5EF4-FFF2-40B4-BE49-F238E27FC236}">
-                <a16:creationId xmlns:a16="http://schemas.microsoft.com/office/drawing/2014/main" id="{540F7587-689E-E500-15A9-3C00B59A29F2}"/>
-              </a:ext>
-            </a:extLst>
-          </p:cNvPr>
-          <p:cNvSpPr txBox="1"/>
-          <p:nvPr/>
-        </p:nvSpPr>
-        <p:spPr>
-          <a:xfrm>
-            <a:off x="3103118" y="4674383"/>
-            <a:ext cx="0" cy="0"/>
-          </a:xfrm>
-          <a:prstGeom prst="rect">
-            <a:avLst/>
-          </a:prstGeom>
-          <a:noFill/>
-        </p:spPr>
-        <p:txBody>
-          <a:bodyPr wrap="none" lIns="0" tIns="0" rIns="0" bIns="0" rtlCol="0">
-            <a:noAutofit/>
-          </a:bodyPr>
-          <a:lstStyle/>
-          <a:p>
-            <a:pPr defTabSz="228600">
-              <a:spcAft>
-                <a:spcPts val="1200"/>
-              </a:spcAft>
-            </a:pPr>
-            <a:endParaRPr lang="de-DE" dirty="0"/>
-          </a:p>
-        </p:txBody>
-      </p:sp>
-      <p:sp>
-        <p:nvSpPr>
-          <p:cNvPr id="51" name="TextBox 50">
-            <a:extLst>
-              <a:ext uri="{FF2B5EF4-FFF2-40B4-BE49-F238E27FC236}">
-                <a16:creationId xmlns:a16="http://schemas.microsoft.com/office/drawing/2014/main" id="{12C729E1-17E8-D677-4161-32F3326192A5}"/>
-              </a:ext>
-            </a:extLst>
-          </p:cNvPr>
-          <p:cNvSpPr txBox="1"/>
-          <p:nvPr/>
-        </p:nvSpPr>
-        <p:spPr>
-          <a:xfrm>
-            <a:off x="2016591" y="4205977"/>
-            <a:ext cx="1666555" cy="197028"/>
-          </a:xfrm>
-          <a:prstGeom prst="rect">
-            <a:avLst/>
-          </a:prstGeom>
-          <a:noFill/>
-        </p:spPr>
-        <p:txBody>
-          <a:bodyPr wrap="none" lIns="0" tIns="0" rIns="0" bIns="0" rtlCol="0">
-            <a:noAutofit/>
-          </a:bodyPr>
-          <a:lstStyle/>
-          <a:p>
-            <a:pPr defTabSz="228600">
-              <a:spcAft>
-                <a:spcPts val="1200"/>
-              </a:spcAft>
-            </a:pPr>
-            <a:r>
-              <a:rPr lang="de-DE" sz="700" dirty="0"/>
-              <a:t>priv.pay.blacklist.state.v1</a:t>
             </a:r>
           </a:p>
         </p:txBody>
@@ -40435,7 +40194,7 @@
             <a:pPr algn="ctr"/>
             <a:r>
               <a:rPr lang="en-US" sz="700" b="1" dirty="0"/>
-              <a:t>Enricher</a:t>
+              <a:t>Customer Enricher</a:t>
             </a:r>
           </a:p>
         </p:txBody>
@@ -40454,7 +40213,7 @@
         </p:nvSpPr>
         <p:spPr>
           <a:xfrm>
-            <a:off x="3140200" y="5246277"/>
+            <a:off x="3140200" y="4761780"/>
             <a:ext cx="0" cy="0"/>
           </a:xfrm>
           <a:prstGeom prst="rect">
@@ -40491,7 +40250,7 @@
         </p:nvSpPr>
         <p:spPr>
           <a:xfrm rot="5400000">
-            <a:off x="4503127" y="5014805"/>
+            <a:off x="4503127" y="4530308"/>
             <a:ext cx="310669" cy="915333"/>
           </a:xfrm>
           <a:prstGeom prst="can">
@@ -40551,7 +40310,7 @@
         </p:nvSpPr>
         <p:spPr>
           <a:xfrm>
-            <a:off x="4334274" y="5385262"/>
+            <a:off x="4334274" y="4900765"/>
             <a:ext cx="192024" cy="187452"/>
           </a:xfrm>
           <a:prstGeom prst="roundRect">
@@ -40603,7 +40362,7 @@
         </p:nvSpPr>
         <p:spPr>
           <a:xfrm>
-            <a:off x="4591770" y="5385262"/>
+            <a:off x="4591770" y="4900765"/>
             <a:ext cx="192024" cy="187452"/>
           </a:xfrm>
           <a:prstGeom prst="roundRect">
@@ -40655,7 +40414,7 @@
         </p:nvSpPr>
         <p:spPr>
           <a:xfrm>
-            <a:off x="5214801" y="5621898"/>
+            <a:off x="5214801" y="5137401"/>
             <a:ext cx="0" cy="0"/>
           </a:xfrm>
           <a:prstGeom prst="rect">
@@ -40692,7 +40451,7 @@
         </p:nvSpPr>
         <p:spPr>
           <a:xfrm>
-            <a:off x="4200795" y="5188234"/>
+            <a:off x="4200795" y="4703737"/>
             <a:ext cx="1666555" cy="197028"/>
           </a:xfrm>
           <a:prstGeom prst="rect">
@@ -40713,7 +40472,7 @@
             </a:pPr>
             <a:r>
               <a:rPr lang="de-DE" sz="700" dirty="0"/>
-              <a:t>priv.ref.merchant.state.v1</a:t>
+              <a:t>pub.ref.merchant.state.v1</a:t>
             </a:r>
           </a:p>
         </p:txBody>
@@ -40737,7 +40496,7 @@
         <p:spPr>
           <a:xfrm>
             <a:off x="860725" y="3922996"/>
-            <a:ext cx="1349250" cy="1551846"/>
+            <a:ext cx="1349250" cy="1067349"/>
           </a:xfrm>
           <a:prstGeom prst="curvedConnector3">
             <a:avLst>
@@ -40833,13 +40592,13 @@
         <p:spPr>
           <a:xfrm flipH="1" flipV="1">
             <a:off x="3412698" y="3923149"/>
-            <a:ext cx="1703430" cy="1549323"/>
+            <a:ext cx="1703430" cy="1064826"/>
           </a:xfrm>
           <a:prstGeom prst="curvedConnector5">
             <a:avLst>
               <a:gd name="adj1" fmla="val -13420"/>
-              <a:gd name="adj2" fmla="val 64470"/>
-              <a:gd name="adj3" fmla="val 109291"/>
+              <a:gd name="adj2" fmla="val 66650"/>
+              <a:gd name="adj3" fmla="val 113420"/>
             </a:avLst>
           </a:prstGeom>
           <a:ln>
@@ -40878,7 +40637,7 @@
         </p:nvSpPr>
         <p:spPr>
           <a:xfrm rot="5400000">
-            <a:off x="7117946" y="3470607"/>
+            <a:off x="7042882" y="3470607"/>
             <a:ext cx="310669" cy="915333"/>
           </a:xfrm>
           <a:prstGeom prst="can">
@@ -40938,7 +40697,7 @@
         </p:nvSpPr>
         <p:spPr>
           <a:xfrm>
-            <a:off x="6949093" y="3841063"/>
+            <a:off x="6874029" y="3841063"/>
             <a:ext cx="192024" cy="187452"/>
           </a:xfrm>
           <a:prstGeom prst="roundRect">
@@ -40990,7 +40749,7 @@
         </p:nvSpPr>
         <p:spPr>
           <a:xfrm>
-            <a:off x="7206589" y="3841063"/>
+            <a:off x="7131525" y="3841063"/>
             <a:ext cx="192024" cy="187452"/>
           </a:xfrm>
           <a:prstGeom prst="roundRect">
@@ -41042,7 +40801,7 @@
         </p:nvSpPr>
         <p:spPr>
           <a:xfrm>
-            <a:off x="7829620" y="4077699"/>
+            <a:off x="7754556" y="4077699"/>
             <a:ext cx="0" cy="0"/>
           </a:xfrm>
           <a:prstGeom prst="rect">
@@ -41079,7 +40838,7 @@
         </p:nvSpPr>
         <p:spPr>
           <a:xfrm>
-            <a:off x="6533828" y="3622755"/>
+            <a:off x="6458764" y="3622755"/>
             <a:ext cx="1666555" cy="197028"/>
           </a:xfrm>
           <a:prstGeom prst="rect">
@@ -41100,7 +40859,7 @@
             </a:pPr>
             <a:r>
               <a:rPr lang="de-DE" sz="700" dirty="0"/>
-              <a:t>priv.pay.transaction-flagged-enriched.delta.v1</a:t>
+              <a:t>priv.pay.transaction-flagged2.delta.v1</a:t>
             </a:r>
           </a:p>
         </p:txBody>
@@ -41123,8 +40882,8 @@
         </p:nvCxnSpPr>
         <p:spPr>
           <a:xfrm flipV="1">
-            <a:off x="6423739" y="3928274"/>
-            <a:ext cx="391875" cy="29"/>
+            <a:off x="6423737" y="3928274"/>
+            <a:ext cx="316813" cy="27"/>
           </a:xfrm>
           <a:prstGeom prst="curvedConnector3">
             <a:avLst>
@@ -41165,62 +40924,14 @@
           <p:cNvCxnSpPr>
             <a:cxnSpLocks/>
             <a:stCxn id="85" idx="1"/>
-            <a:endCxn id="112" idx="1"/>
+            <a:endCxn id="14" idx="1"/>
           </p:cNvCxnSpPr>
           <p:nvPr/>
         </p:nvCxnSpPr>
         <p:spPr>
           <a:xfrm flipV="1">
-            <a:off x="7730947" y="3927797"/>
-            <a:ext cx="2624072" cy="477"/>
-          </a:xfrm>
-          <a:prstGeom prst="curvedConnector3">
-            <a:avLst>
-              <a:gd name="adj1" fmla="val 50000"/>
-            </a:avLst>
-          </a:prstGeom>
-          <a:ln>
-            <a:solidFill>
-              <a:srgbClr val="5A00D2"/>
-            </a:solidFill>
-            <a:tailEnd type="triangle"/>
-          </a:ln>
-        </p:spPr>
-        <p:style>
-          <a:lnRef idx="1">
-            <a:schemeClr val="accent1"/>
-          </a:lnRef>
-          <a:fillRef idx="0">
-            <a:schemeClr val="accent1"/>
-          </a:fillRef>
-          <a:effectRef idx="0">
-            <a:schemeClr val="accent1"/>
-          </a:effectRef>
-          <a:fontRef idx="minor">
-            <a:schemeClr val="tx1"/>
-          </a:fontRef>
-        </p:style>
-      </p:cxnSp>
-      <p:cxnSp>
-        <p:nvCxnSpPr>
-          <p:cNvPr id="96" name="Straight Arrow Connector 47">
-            <a:extLst>
-              <a:ext uri="{FF2B5EF4-FFF2-40B4-BE49-F238E27FC236}">
-                <a16:creationId xmlns:a16="http://schemas.microsoft.com/office/drawing/2014/main" id="{A22381D0-0930-9087-DF0D-86B2FD58149F}"/>
-              </a:ext>
-            </a:extLst>
-          </p:cNvPr>
-          <p:cNvCxnSpPr>
-            <a:cxnSpLocks/>
-            <a:stCxn id="47" idx="1"/>
-            <a:endCxn id="44" idx="1"/>
-          </p:cNvCxnSpPr>
-          <p:nvPr/>
-        </p:nvCxnSpPr>
-        <p:spPr>
-          <a:xfrm flipV="1">
-            <a:off x="3004445" y="3923149"/>
-            <a:ext cx="408255" cy="601806"/>
+            <a:off x="7655883" y="3925635"/>
+            <a:ext cx="354189" cy="2639"/>
           </a:xfrm>
           <a:prstGeom prst="curvedConnector3">
             <a:avLst>
@@ -42726,7 +42437,7 @@
         </p:blipFill>
         <p:spPr>
           <a:xfrm>
-            <a:off x="11392164" y="5220152"/>
+            <a:off x="11392164" y="4735655"/>
             <a:ext cx="481251" cy="481251"/>
           </a:xfrm>
           <a:prstGeom prst="rect">
@@ -42763,7 +42474,7 @@
         </p:blipFill>
         <p:spPr bwMode="auto">
           <a:xfrm>
-            <a:off x="11363429" y="5498365"/>
+            <a:off x="11363429" y="5013868"/>
             <a:ext cx="198421" cy="198421"/>
           </a:xfrm>
           <a:prstGeom prst="rect">
@@ -42788,7 +42499,7 @@
         </p:nvSpPr>
         <p:spPr>
           <a:xfrm>
-            <a:off x="10392101" y="5359400"/>
+            <a:off x="10392101" y="4874903"/>
             <a:ext cx="659078" cy="206150"/>
           </a:xfrm>
           <a:prstGeom prst="roundRect">
@@ -42852,7 +42563,7 @@
         </p:nvCxnSpPr>
         <p:spPr>
           <a:xfrm flipV="1">
-            <a:off x="5116128" y="5462475"/>
+            <a:off x="5116128" y="4977978"/>
             <a:ext cx="5275973" cy="9997"/>
           </a:xfrm>
           <a:prstGeom prst="curvedConnector3">
@@ -42900,7 +42611,7 @@
         </p:nvCxnSpPr>
         <p:spPr>
           <a:xfrm flipV="1">
-            <a:off x="11051179" y="5460778"/>
+            <a:off x="11051179" y="4976281"/>
             <a:ext cx="340985" cy="1697"/>
           </a:xfrm>
           <a:prstGeom prst="curvedConnector3">
@@ -42944,7 +42655,7 @@
         </p:nvSpPr>
         <p:spPr>
           <a:xfrm>
-            <a:off x="11287786" y="4535765"/>
+            <a:off x="11250704" y="4703737"/>
             <a:ext cx="812569" cy="197028"/>
           </a:xfrm>
           <a:prstGeom prst="rect">
@@ -42965,7 +42676,7 @@
             </a:pPr>
             <a:r>
               <a:rPr lang="de-DE" sz="700" dirty="0" err="1"/>
-              <a:t>raw_merchant_t</a:t>
+              <a:t>raw_merchant_ts</a:t>
             </a:r>
             <a:endParaRPr lang="de-DE" sz="700" dirty="0"/>
           </a:p>
@@ -43186,7 +42897,7 @@
         <p:spPr>
           <a:xfrm flipV="1">
             <a:off x="11873415" y="3245651"/>
-            <a:ext cx="841362" cy="2215127"/>
+            <a:ext cx="841362" cy="1730630"/>
           </a:xfrm>
           <a:prstGeom prst="curvedConnector3">
             <a:avLst>
@@ -43510,7 +43221,7 @@
         <p:spPr>
           <a:xfrm>
             <a:off x="1810646" y="2744474"/>
-            <a:ext cx="15774704" cy="2096084"/>
+            <a:ext cx="15774704" cy="1549323"/>
           </a:xfrm>
           <a:prstGeom prst="roundRect">
             <a:avLst/>
@@ -43620,7 +43331,7 @@
         </p:nvSpPr>
         <p:spPr>
           <a:xfrm>
-            <a:off x="1810646" y="5135002"/>
+            <a:off x="1810646" y="4650505"/>
             <a:ext cx="10872586" cy="1017135"/>
           </a:xfrm>
           <a:prstGeom prst="roundRect">
@@ -43672,7 +43383,7 @@
         </p:nvSpPr>
         <p:spPr>
           <a:xfrm>
-            <a:off x="2121472" y="5025318"/>
+            <a:off x="2121472" y="4540821"/>
             <a:ext cx="983419" cy="187561"/>
           </a:xfrm>
           <a:prstGeom prst="roundRect">
@@ -44076,7 +43787,7 @@
         </p:nvSpPr>
         <p:spPr>
           <a:xfrm>
-            <a:off x="2209975" y="5347947"/>
+            <a:off x="2209975" y="4863450"/>
             <a:ext cx="676093" cy="253790"/>
           </a:xfrm>
           <a:prstGeom prst="can">
@@ -44146,7 +43857,7 @@
         </p:blipFill>
         <p:spPr>
           <a:xfrm>
-            <a:off x="2358053" y="5660742"/>
+            <a:off x="2358053" y="5176245"/>
             <a:ext cx="334949" cy="334949"/>
           </a:xfrm>
           <a:prstGeom prst="rect">
@@ -44168,7 +43879,7 @@
         </p:nvSpPr>
         <p:spPr>
           <a:xfrm>
-            <a:off x="2368948" y="5607357"/>
+            <a:off x="2368948" y="5122860"/>
             <a:ext cx="337852" cy="179116"/>
           </a:xfrm>
           <a:prstGeom prst="rect">
@@ -44209,7 +43920,7 @@
         </p:nvSpPr>
         <p:spPr>
           <a:xfrm>
-            <a:off x="3196847" y="5369711"/>
+            <a:off x="3196847" y="4885214"/>
             <a:ext cx="659078" cy="206150"/>
           </a:xfrm>
           <a:prstGeom prst="roundRect">
@@ -44273,7 +43984,7 @@
         </p:nvCxnSpPr>
         <p:spPr>
           <a:xfrm flipV="1">
-            <a:off x="2886068" y="5472786"/>
+            <a:off x="2886068" y="4988289"/>
             <a:ext cx="310779" cy="2056"/>
           </a:xfrm>
           <a:prstGeom prst="curvedConnector3">
@@ -44321,7 +44032,7 @@
         </p:nvCxnSpPr>
         <p:spPr>
           <a:xfrm flipV="1">
-            <a:off x="3855925" y="5472472"/>
+            <a:off x="3855925" y="4987975"/>
             <a:ext cx="344870" cy="314"/>
           </a:xfrm>
           <a:prstGeom prst="curvedConnector3">
@@ -44399,6 +44110,409 @@
           </a:fontRef>
         </p:style>
       </p:cxnSp>
+      <p:sp>
+        <p:nvSpPr>
+          <p:cNvPr id="14" name="Rounded Rectangle 13">
+            <a:extLst>
+              <a:ext uri="{FF2B5EF4-FFF2-40B4-BE49-F238E27FC236}">
+                <a16:creationId xmlns:a16="http://schemas.microsoft.com/office/drawing/2014/main" id="{8063888F-7931-7446-7A88-9CBFFF4A6CDA}"/>
+              </a:ext>
+            </a:extLst>
+          </p:cNvPr>
+          <p:cNvSpPr/>
+          <p:nvPr/>
+        </p:nvSpPr>
+        <p:spPr>
+          <a:xfrm>
+            <a:off x="8010072" y="3822560"/>
+            <a:ext cx="659078" cy="206150"/>
+          </a:xfrm>
+          <a:prstGeom prst="roundRect">
+            <a:avLst/>
+          </a:prstGeom>
+          <a:solidFill>
+            <a:schemeClr val="accent3">
+              <a:lumMod val="60000"/>
+              <a:lumOff val="40000"/>
+            </a:schemeClr>
+          </a:solidFill>
+          <a:ln>
+            <a:solidFill>
+              <a:schemeClr val="accent1"/>
+            </a:solidFill>
+          </a:ln>
+        </p:spPr>
+        <p:style>
+          <a:lnRef idx="2">
+            <a:schemeClr val="accent1">
+              <a:shade val="50000"/>
+            </a:schemeClr>
+          </a:lnRef>
+          <a:fillRef idx="1">
+            <a:schemeClr val="accent1"/>
+          </a:fillRef>
+          <a:effectRef idx="0">
+            <a:schemeClr val="accent1"/>
+          </a:effectRef>
+          <a:fontRef idx="minor">
+            <a:schemeClr val="lt1"/>
+          </a:fontRef>
+        </p:style>
+        <p:txBody>
+          <a:bodyPr lIns="0" rIns="0" rtlCol="0" anchor="ctr"/>
+          <a:lstStyle/>
+          <a:p>
+            <a:pPr algn="ctr"/>
+            <a:r>
+              <a:rPr lang="en-US" sz="700" b="1" dirty="0"/>
+              <a:t>Fraud</a:t>
+            </a:r>
+          </a:p>
+          <a:p>
+            <a:pPr algn="ctr"/>
+            <a:r>
+              <a:rPr lang="en-US" sz="700" b="1" dirty="0"/>
+              <a:t>Pattern Detect</a:t>
+            </a:r>
+          </a:p>
+        </p:txBody>
+      </p:sp>
+      <p:sp>
+        <p:nvSpPr>
+          <p:cNvPr id="17" name="Can 16">
+            <a:extLst>
+              <a:ext uri="{FF2B5EF4-FFF2-40B4-BE49-F238E27FC236}">
+                <a16:creationId xmlns:a16="http://schemas.microsoft.com/office/drawing/2014/main" id="{C164E90B-16BE-16E7-2B6A-959E072B5A9E}"/>
+              </a:ext>
+            </a:extLst>
+          </p:cNvPr>
+          <p:cNvSpPr/>
+          <p:nvPr/>
+        </p:nvSpPr>
+        <p:spPr>
+          <a:xfrm rot="5400000">
+            <a:off x="9373749" y="3465329"/>
+            <a:ext cx="310669" cy="915333"/>
+          </a:xfrm>
+          <a:prstGeom prst="can">
+            <a:avLst/>
+          </a:prstGeom>
+          <a:solidFill>
+            <a:schemeClr val="bg1">
+              <a:lumMod val="85000"/>
+            </a:schemeClr>
+          </a:solidFill>
+          <a:ln>
+            <a:solidFill>
+              <a:schemeClr val="bg1"/>
+            </a:solidFill>
+          </a:ln>
+        </p:spPr>
+        <p:style>
+          <a:lnRef idx="2">
+            <a:schemeClr val="accent1">
+              <a:shade val="50000"/>
+            </a:schemeClr>
+          </a:lnRef>
+          <a:fillRef idx="1">
+            <a:schemeClr val="accent1"/>
+          </a:fillRef>
+          <a:effectRef idx="0">
+            <a:schemeClr val="accent1"/>
+          </a:effectRef>
+          <a:fontRef idx="minor">
+            <a:schemeClr val="lt1"/>
+          </a:fontRef>
+        </p:style>
+        <p:txBody>
+          <a:bodyPr rtlCol="0" anchor="ctr"/>
+          <a:lstStyle/>
+          <a:p>
+            <a:pPr algn="ctr"/>
+            <a:endParaRPr lang="en-US">
+              <a:solidFill>
+                <a:srgbClr val="5A00D2"/>
+              </a:solidFill>
+            </a:endParaRPr>
+          </a:p>
+        </p:txBody>
+      </p:sp>
+      <p:sp>
+        <p:nvSpPr>
+          <p:cNvPr id="21" name="Rounded Rectangle 20">
+            <a:extLst>
+              <a:ext uri="{FF2B5EF4-FFF2-40B4-BE49-F238E27FC236}">
+                <a16:creationId xmlns:a16="http://schemas.microsoft.com/office/drawing/2014/main" id="{234B6402-E815-FC4C-C6C7-17B3F16AAD1A}"/>
+              </a:ext>
+            </a:extLst>
+          </p:cNvPr>
+          <p:cNvSpPr/>
+          <p:nvPr/>
+        </p:nvSpPr>
+        <p:spPr>
+          <a:xfrm>
+            <a:off x="9204896" y="3835785"/>
+            <a:ext cx="192024" cy="187452"/>
+          </a:xfrm>
+          <a:prstGeom prst="roundRect">
+            <a:avLst/>
+          </a:prstGeom>
+          <a:solidFill>
+            <a:srgbClr val="9600FF"/>
+          </a:solidFill>
+          <a:ln>
+            <a:noFill/>
+          </a:ln>
+        </p:spPr>
+        <p:style>
+          <a:lnRef idx="2">
+            <a:schemeClr val="accent1">
+              <a:shade val="50000"/>
+            </a:schemeClr>
+          </a:lnRef>
+          <a:fillRef idx="1">
+            <a:schemeClr val="accent1"/>
+          </a:fillRef>
+          <a:effectRef idx="0">
+            <a:schemeClr val="accent1"/>
+          </a:effectRef>
+          <a:fontRef idx="minor">
+            <a:schemeClr val="lt1"/>
+          </a:fontRef>
+        </p:style>
+        <p:txBody>
+          <a:bodyPr rtlCol="0" anchor="ctr"/>
+          <a:lstStyle/>
+          <a:p>
+            <a:pPr algn="ctr"/>
+            <a:endParaRPr lang="en-US"/>
+          </a:p>
+        </p:txBody>
+      </p:sp>
+      <p:sp>
+        <p:nvSpPr>
+          <p:cNvPr id="22" name="Rounded Rectangle 21">
+            <a:extLst>
+              <a:ext uri="{FF2B5EF4-FFF2-40B4-BE49-F238E27FC236}">
+                <a16:creationId xmlns:a16="http://schemas.microsoft.com/office/drawing/2014/main" id="{99C0E33A-1522-3F8E-F3F2-8709CB202971}"/>
+              </a:ext>
+            </a:extLst>
+          </p:cNvPr>
+          <p:cNvSpPr/>
+          <p:nvPr/>
+        </p:nvSpPr>
+        <p:spPr>
+          <a:xfrm>
+            <a:off x="9462392" y="3835785"/>
+            <a:ext cx="192024" cy="187452"/>
+          </a:xfrm>
+          <a:prstGeom prst="roundRect">
+            <a:avLst/>
+          </a:prstGeom>
+          <a:solidFill>
+            <a:srgbClr val="9600FF"/>
+          </a:solidFill>
+          <a:ln>
+            <a:noFill/>
+          </a:ln>
+        </p:spPr>
+        <p:style>
+          <a:lnRef idx="2">
+            <a:schemeClr val="accent1">
+              <a:shade val="50000"/>
+            </a:schemeClr>
+          </a:lnRef>
+          <a:fillRef idx="1">
+            <a:schemeClr val="accent1"/>
+          </a:fillRef>
+          <a:effectRef idx="0">
+            <a:schemeClr val="accent1"/>
+          </a:effectRef>
+          <a:fontRef idx="minor">
+            <a:schemeClr val="lt1"/>
+          </a:fontRef>
+        </p:style>
+        <p:txBody>
+          <a:bodyPr rtlCol="0" anchor="ctr"/>
+          <a:lstStyle/>
+          <a:p>
+            <a:pPr algn="ctr"/>
+            <a:endParaRPr lang="en-US"/>
+          </a:p>
+        </p:txBody>
+      </p:sp>
+      <p:sp>
+        <p:nvSpPr>
+          <p:cNvPr id="25" name="TextBox 24">
+            <a:extLst>
+              <a:ext uri="{FF2B5EF4-FFF2-40B4-BE49-F238E27FC236}">
+                <a16:creationId xmlns:a16="http://schemas.microsoft.com/office/drawing/2014/main" id="{1DD7BBDA-5BB7-751C-94CF-B3DD4DAA7023}"/>
+              </a:ext>
+            </a:extLst>
+          </p:cNvPr>
+          <p:cNvSpPr txBox="1"/>
+          <p:nvPr/>
+        </p:nvSpPr>
+        <p:spPr>
+          <a:xfrm>
+            <a:off x="10085423" y="4072421"/>
+            <a:ext cx="0" cy="0"/>
+          </a:xfrm>
+          <a:prstGeom prst="rect">
+            <a:avLst/>
+          </a:prstGeom>
+          <a:noFill/>
+        </p:spPr>
+        <p:txBody>
+          <a:bodyPr wrap="none" lIns="0" tIns="0" rIns="0" bIns="0" rtlCol="0">
+            <a:noAutofit/>
+          </a:bodyPr>
+          <a:lstStyle/>
+          <a:p>
+            <a:pPr defTabSz="228600">
+              <a:spcAft>
+                <a:spcPts val="1200"/>
+              </a:spcAft>
+            </a:pPr>
+            <a:endParaRPr lang="de-DE" dirty="0"/>
+          </a:p>
+        </p:txBody>
+      </p:sp>
+      <p:cxnSp>
+        <p:nvCxnSpPr>
+          <p:cNvPr id="26" name="Straight Arrow Connector 47">
+            <a:extLst>
+              <a:ext uri="{FF2B5EF4-FFF2-40B4-BE49-F238E27FC236}">
+                <a16:creationId xmlns:a16="http://schemas.microsoft.com/office/drawing/2014/main" id="{8BA9E83C-E0C5-5C3B-75C3-A6243D2D42F1}"/>
+              </a:ext>
+            </a:extLst>
+          </p:cNvPr>
+          <p:cNvCxnSpPr>
+            <a:cxnSpLocks/>
+            <a:endCxn id="17" idx="3"/>
+          </p:cNvCxnSpPr>
+          <p:nvPr/>
+        </p:nvCxnSpPr>
+        <p:spPr>
+          <a:xfrm flipV="1">
+            <a:off x="8679542" y="3922996"/>
+            <a:ext cx="391875" cy="29"/>
+          </a:xfrm>
+          <a:prstGeom prst="curvedConnector3">
+            <a:avLst>
+              <a:gd name="adj1" fmla="val 50000"/>
+            </a:avLst>
+          </a:prstGeom>
+          <a:ln>
+            <a:solidFill>
+              <a:srgbClr val="5A00D2"/>
+            </a:solidFill>
+            <a:tailEnd type="triangle"/>
+          </a:ln>
+        </p:spPr>
+        <p:style>
+          <a:lnRef idx="1">
+            <a:schemeClr val="accent1"/>
+          </a:lnRef>
+          <a:fillRef idx="0">
+            <a:schemeClr val="accent1"/>
+          </a:fillRef>
+          <a:effectRef idx="0">
+            <a:schemeClr val="accent1"/>
+          </a:effectRef>
+          <a:fontRef idx="minor">
+            <a:schemeClr val="tx1"/>
+          </a:fontRef>
+        </p:style>
+      </p:cxnSp>
+      <p:cxnSp>
+        <p:nvCxnSpPr>
+          <p:cNvPr id="27" name="Straight Arrow Connector 47">
+            <a:extLst>
+              <a:ext uri="{FF2B5EF4-FFF2-40B4-BE49-F238E27FC236}">
+                <a16:creationId xmlns:a16="http://schemas.microsoft.com/office/drawing/2014/main" id="{6D04FB08-0BCC-50A2-3498-19243B484E11}"/>
+              </a:ext>
+            </a:extLst>
+          </p:cNvPr>
+          <p:cNvCxnSpPr>
+            <a:cxnSpLocks/>
+            <a:stCxn id="17" idx="1"/>
+            <a:endCxn id="112" idx="1"/>
+          </p:cNvCxnSpPr>
+          <p:nvPr/>
+        </p:nvCxnSpPr>
+        <p:spPr>
+          <a:xfrm>
+            <a:off x="9986750" y="3922996"/>
+            <a:ext cx="368269" cy="4801"/>
+          </a:xfrm>
+          <a:prstGeom prst="curvedConnector3">
+            <a:avLst>
+              <a:gd name="adj1" fmla="val 50000"/>
+            </a:avLst>
+          </a:prstGeom>
+          <a:ln>
+            <a:solidFill>
+              <a:srgbClr val="5A00D2"/>
+            </a:solidFill>
+            <a:tailEnd type="triangle"/>
+          </a:ln>
+        </p:spPr>
+        <p:style>
+          <a:lnRef idx="1">
+            <a:schemeClr val="accent1"/>
+          </a:lnRef>
+          <a:fillRef idx="0">
+            <a:schemeClr val="accent1"/>
+          </a:fillRef>
+          <a:effectRef idx="0">
+            <a:schemeClr val="accent1"/>
+          </a:effectRef>
+          <a:fontRef idx="minor">
+            <a:schemeClr val="tx1"/>
+          </a:fontRef>
+        </p:style>
+      </p:cxnSp>
+      <p:sp>
+        <p:nvSpPr>
+          <p:cNvPr id="34" name="TextBox 33">
+            <a:extLst>
+              <a:ext uri="{FF2B5EF4-FFF2-40B4-BE49-F238E27FC236}">
+                <a16:creationId xmlns:a16="http://schemas.microsoft.com/office/drawing/2014/main" id="{BD9576FA-1476-89B8-DC18-0F731C52A11B}"/>
+              </a:ext>
+            </a:extLst>
+          </p:cNvPr>
+          <p:cNvSpPr txBox="1"/>
+          <p:nvPr/>
+        </p:nvSpPr>
+        <p:spPr>
+          <a:xfrm>
+            <a:off x="8803200" y="3625055"/>
+            <a:ext cx="1666555" cy="197028"/>
+          </a:xfrm>
+          <a:prstGeom prst="rect">
+            <a:avLst/>
+          </a:prstGeom>
+          <a:noFill/>
+        </p:spPr>
+        <p:txBody>
+          <a:bodyPr wrap="none" lIns="0" tIns="0" rIns="0" bIns="0" rtlCol="0">
+            <a:noAutofit/>
+          </a:bodyPr>
+          <a:lstStyle/>
+          <a:p>
+            <a:pPr defTabSz="228600">
+              <a:spcAft>
+                <a:spcPts val="1200"/>
+              </a:spcAft>
+            </a:pPr>
+            <a:r>
+              <a:rPr lang="de-DE" sz="700" dirty="0"/>
+              <a:t>priv.pay.transaction-flagged3.delta.v1</a:t>
+            </a:r>
+          </a:p>
+        </p:txBody>
+      </p:sp>
     </p:spTree>
     <p:extLst>
       <p:ext uri="{BB962C8B-B14F-4D97-AF65-F5344CB8AC3E}">
@@ -51265,21 +51379,6 @@
 </file>
 
 <file path=customXml/item1.xml><?xml version="1.0" encoding="utf-8"?>
-<p:properties xmlns:p="http://schemas.microsoft.com/office/2006/metadata/properties" xmlns:xsi="http://www.w3.org/2001/XMLSchema-instance" xmlns:pc="http://schemas.microsoft.com/office/infopath/2007/PartnerControls">
-  <documentManagement/>
-</p:properties>
-</file>
-
-<file path=customXml/item2.xml><?xml version="1.0" encoding="utf-8"?>
-<?mso-contentType ?>
-<FormTemplates xmlns="http://schemas.microsoft.com/sharepoint/v3/contenttype/forms">
-  <Display>DocumentLibraryForm</Display>
-  <Edit>DocumentLibraryForm</Edit>
-  <New>DocumentLibraryForm</New>
-</FormTemplates>
-</file>
-
-<file path=customXml/item3.xml><?xml version="1.0" encoding="utf-8"?>
 <ct:contentTypeSchema xmlns:ct="http://schemas.microsoft.com/office/2006/metadata/contentType" xmlns:ma="http://schemas.microsoft.com/office/2006/metadata/properties/metaAttributes" ct:_="" ma:_="" ma:contentTypeName="Document" ma:contentTypeID="0x010100339EF807C2354943A31A31FB9E6B8A38" ma:contentTypeVersion="2" ma:contentTypeDescription="Create a new document." ma:contentTypeScope="" ma:versionID="f03a519f31e72ece704f842ab0e4ba72">
   <xsd:schema xmlns:xsd="http://www.w3.org/2001/XMLSchema" xmlns:xs="http://www.w3.org/2001/XMLSchema" xmlns:p="http://schemas.microsoft.com/office/2006/metadata/properties" xmlns:ns2="5d757215-fbc3-4533-822f-84ec73f97a40" targetNamespace="http://schemas.microsoft.com/office/2006/metadata/properties" ma:root="true" ma:fieldsID="1cb72d0557a9ded9ba0b46b2c3d18190" ns2:_="">
     <xsd:import namespace="5d757215-fbc3-4533-822f-84ec73f97a40"/>
@@ -51411,32 +51510,22 @@
 </ct:contentTypeSchema>
 </file>
 
-<file path=customXml/itemProps1.xml><?xml version="1.0" encoding="utf-8"?>
-<ds:datastoreItem xmlns:ds="http://schemas.openxmlformats.org/officeDocument/2006/customXml" ds:itemID="{46BFFC05-B2F6-4CED-BE65-F75B1EB7AD7B}">
-  <ds:schemaRefs>
-    <ds:schemaRef ds:uri="http://purl.org/dc/dcmitype/"/>
-    <ds:schemaRef ds:uri="http://purl.org/dc/terms/"/>
-    <ds:schemaRef ds:uri="http://purl.org/dc/elements/1.1/"/>
-    <ds:schemaRef ds:uri="http://schemas.microsoft.com/office/2006/metadata/properties"/>
-    <ds:schemaRef ds:uri="http://schemas.microsoft.com/office/2006/documentManagement/types"/>
-    <ds:schemaRef ds:uri="f09dec34-126f-4759-b06d-a920de720ce4"/>
-    <ds:schemaRef ds:uri="http://schemas.openxmlformats.org/package/2006/metadata/core-properties"/>
-    <ds:schemaRef ds:uri="http://schemas.microsoft.com/office/infopath/2007/PartnerControls"/>
-    <ds:schemaRef ds:uri="17c09f85-56e7-4417-b5d2-7fa4154de313"/>
-    <ds:schemaRef ds:uri="http://www.w3.org/XML/1998/namespace"/>
-  </ds:schemaRefs>
-</ds:datastoreItem>
+<file path=customXml/item2.xml><?xml version="1.0" encoding="utf-8"?>
+<?mso-contentType ?>
+<FormTemplates xmlns="http://schemas.microsoft.com/sharepoint/v3/contenttype/forms">
+  <Display>DocumentLibraryForm</Display>
+  <Edit>DocumentLibraryForm</Edit>
+  <New>DocumentLibraryForm</New>
+</FormTemplates>
 </file>
 
-<file path=customXml/itemProps2.xml><?xml version="1.0" encoding="utf-8"?>
-<ds:datastoreItem xmlns:ds="http://schemas.openxmlformats.org/officeDocument/2006/customXml" ds:itemID="{79831B46-6CD1-40D2-9FB5-3E58559F90A3}">
-  <ds:schemaRefs>
-    <ds:schemaRef ds:uri="http://schemas.microsoft.com/sharepoint/v3/contenttype/forms"/>
-  </ds:schemaRefs>
-</ds:datastoreItem>
+<file path=customXml/item3.xml><?xml version="1.0" encoding="utf-8"?>
+<p:properties xmlns:p="http://schemas.microsoft.com/office/2006/metadata/properties" xmlns:xsi="http://www.w3.org/2001/XMLSchema-instance" xmlns:pc="http://schemas.microsoft.com/office/infopath/2007/PartnerControls">
+  <documentManagement/>
+</p:properties>
 </file>
 
-<file path=customXml/itemProps3.xml><?xml version="1.0" encoding="utf-8"?>
+<file path=customXml/itemProps1.xml><?xml version="1.0" encoding="utf-8"?>
 <ds:datastoreItem xmlns:ds="http://schemas.openxmlformats.org/officeDocument/2006/customXml" ds:itemID="{46E8BD94-4C5F-4212-A7B2-A3B2366772F3}">
   <ds:schemaRefs>
     <ds:schemaRef ds:uri="http://schemas.microsoft.com/office/2006/metadata/contentType"/>
@@ -51452,4 +51541,29 @@
     <ds:schemaRef ds:uri="http://schemas.microsoft.com/internal/obd"/>
   </ds:schemaRefs>
 </ds:datastoreItem>
+</file>
+
+<file path=customXml/itemProps2.xml><?xml version="1.0" encoding="utf-8"?>
+<ds:datastoreItem xmlns:ds="http://schemas.openxmlformats.org/officeDocument/2006/customXml" ds:itemID="{79831B46-6CD1-40D2-9FB5-3E58559F90A3}">
+  <ds:schemaRefs>
+    <ds:schemaRef ds:uri="http://schemas.microsoft.com/sharepoint/v3/contenttype/forms"/>
+  </ds:schemaRefs>
+</ds:datastoreItem>
+</file>
+
+<file path=customXml/itemProps3.xml><?xml version="1.0" encoding="utf-8"?>
+<ds:datastoreItem xmlns:ds="http://schemas.openxmlformats.org/officeDocument/2006/customXml" ds:itemID="{46BFFC05-B2F6-4CED-BE65-F75B1EB7AD7B}">
+  <ds:schemaRefs>
+    <ds:schemaRef ds:uri="http://purl.org/dc/dcmitype/"/>
+    <ds:schemaRef ds:uri="http://purl.org/dc/terms/"/>
+    <ds:schemaRef ds:uri="http://purl.org/dc/elements/1.1/"/>
+    <ds:schemaRef ds:uri="http://schemas.microsoft.com/office/2006/metadata/properties"/>
+    <ds:schemaRef ds:uri="http://schemas.microsoft.com/office/2006/documentManagement/types"/>
+    <ds:schemaRef ds:uri="f09dec34-126f-4759-b06d-a920de720ce4"/>
+    <ds:schemaRef ds:uri="http://schemas.openxmlformats.org/package/2006/metadata/core-properties"/>
+    <ds:schemaRef ds:uri="http://schemas.microsoft.com/office/infopath/2007/PartnerControls"/>
+    <ds:schemaRef ds:uri="17c09f85-56e7-4417-b5d2-7fa4154de313"/>
+    <ds:schemaRef ds:uri="http://www.w3.org/XML/1998/namespace"/>
+  </ds:schemaRefs>
+</ds:datastoreItem>
 </file>